--- a/docs/evaluating-finetuning-agents.pptx
+++ b/docs/evaluating-finetuning-agents.pptx
@@ -19,9 +19,10 @@
     <p:sldId id="267" r:id="rId13"/>
     <p:sldId id="268" r:id="rId14"/>
     <p:sldId id="269" r:id="rId15"/>
+    <p:sldId id="270" r:id="rId16"/>
   </p:sldIdLst>
   <p:notesMasterIdLst>
-    <p:notesMasterId r:id="rId16"/>
+    <p:notesMasterId r:id="rId17"/>
   </p:notesMasterIdLst>
   <p:sldSz cx="12192000" cy="6858000"/>
   <p:notesSz cx="6858000" cy="12192000"/>
@@ -604,8 +605,13 @@
           <a:p>
             <a:r>
               <a:rPr lang="en-US" dirty="0"/>
-              <a:t>Swap the rubric live and re-run bucket B. The ranking flips.
-The transferable move is the last line: instrument the bias you suspect. judge_length_words costs nothing and it is the tell.</a:t>
+              <a:t>INTERACTIVE BEAT — budget 4 minutes.
+1. Read both aloud. Do not editorialise.
+2. Hands: who says A? Who says B? Count them out loud.
+3. Ask one person who voted A why. They will say 'more helpful', 'more thorough', 'more supportive'. That is the whole finding.
+4. Reveal: the v1 judge agrees with the A voters, every time.
+Be precise about WHY A loses, because this is where a lazy version of this talk cheats. A is not made up. Every figure in it is real and verifiable against get_readiness_inputs — that is what v1 actually does. A fails on three criteria: three alternatives instead of one action, no Green/Amber/Red verdict, and no mention that Wednesday's sleep was untrustworthy. It scores 3. B scores 5.
+Do not skip the hand count. The room has to own the wrong answer before the fix lands.</a:t>
             </a:r>
             <a:endParaRPr lang="en-US" dirty="0"/>
           </a:p>
@@ -693,9 +699,8 @@
           <a:p>
             <a:r>
               <a:rPr lang="en-US" dirty="0"/>
-              <a:t>FILL THE BOTTOM STRIP with the real numbers from your v1 and v2 runs before presenting — replace each 'v1 → v2' with the actual pair.
-Every change traces to a case that failed. That is the whole point: no change enters the prompt because it sounded wise.
-Say the cost line out loud: v2's prompt is longer and calls one more tool. Improvement is not free, and an EM is the person who has to sign off on that trade.</a:t>
+              <a:t>Swap the rubric live and re-run bucket B. The ranking flips.
+The transferable move is the last line: instrument the bias you suspect. judge_length_words costs nothing and it is the tell.</a:t>
             </a:r>
             <a:endParaRPr lang="en-US" dirty="0"/>
           </a:p>
@@ -783,8 +788,10 @@
           <a:p>
             <a:r>
               <a:rPr lang="en-US" dirty="0"/>
-              <a:t>Do not rush this slide to get to the close. For an EM audience this is the credibility slide — it is the difference between someone who has run an eval loop and someone who has read about one.
-If you are short on time, this is the slide to keep and the 'finetuning scope' slide to drop.</a:t>
+              <a:t>FILL THE BOTTOM STRIP with the real numbers from your v1 and v2 runs before presenting — replace each 'v1 → v2' with the actual pair.
+Row 1 detail worth saying out loud: 18 of those recovery hours will have elapsed by tomorrow morning, which is exactly what changes the call. Every number v1 gave was right; it answered a different question.
+Dwell on the last row. It sat in the same failure list as the other five, and the fix was not in the prompt at all. An eval harness tells you SOMETHING is wrong; only the trace tells you WHICH LAYER to fix.
+Say the cost line out loud: v2's prompt is longer and calls one more tool. Improvement is not free, and an EM is the person who signs off on that trade.</a:t>
             </a:r>
             <a:endParaRPr lang="en-US" dirty="0"/>
           </a:p>
@@ -872,8 +879,9 @@
           <a:p>
             <a:r>
               <a:rPr lang="en-US" dirty="0"/>
-              <a:t>This is the slide that separates a built system from a slide deck. Pick two and tell them properly — the kilojoules one always lands, and the Langfuse one is the most useful to anyone shipping on a low-code stack.
-Point: none of these are model problems. They are data and plumbing problems, and they will dominate your first month.</a:t>
+              <a:t>Do not rush this slide to get to the close. For an EM audience this is the credibility slide — the difference between someone who has run an eval loop and someone who has read about one.
+Item 2 is the one to land hardest, and it is a confession: the first draft of this talk assumed v1 would hallucinate numbers. It did not. Modern models with well-described tools ground their figures. The failures that survive good grounding are the ones you would never catch by reading answers — which is the entire argument for a harness.
+If you are short on time, this is the slide to keep and the 'finetuning scope' slide to drop.</a:t>
             </a:r>
             <a:endParaRPr lang="en-US" dirty="0"/>
           </a:p>
@@ -961,9 +969,8 @@
           <a:p>
             <a:r>
               <a:rPr lang="en-US" dirty="0"/>
-              <a:t>Summarise in three beats: named tools made it scoreable, the buckets made it honest, the judge needed its own rubric fixed.
-Resources: repo, SPEC.md, and the n8n build sheet so they can rebuild the canvas themselves.
-Then open the floor. Leave 2–3 minutes.</a:t>
+              <a:t>This is the slide that separates a built system from a slide deck. Pick two and tell them properly — the kilojoules one always lands, and the Langfuse one is the most useful to anyone shipping on a low-code stack.
+Point: none of these are model problems. They are data and plumbing problems, and they will dominate your first month.</a:t>
             </a:r>
             <a:endParaRPr lang="en-US" dirty="0"/>
           </a:p>
@@ -987,6 +994,96 @@
             <a:fld id="{F7021451-1387-4CA6-816F-3879F97B5CBC}" type="slidenum">
               <a:rPr lang="en-US"/>
               <a:t>14</a:t>
+            </a:fld>
+            <a:endParaRPr lang="en-US"/>
+          </a:p>
+        </p:txBody>
+      </p:sp>
+    </p:spTree>
+    <p:extLst>
+      <p:ext uri="{BB962C8B-B14F-4D97-AF65-F5344CB8AC3E}">
+        <p14:creationId xmlns:p14="http://schemas.microsoft.com/office/powerpoint/2010/main" val="1024086991"/>
+      </p:ext>
+    </p:extLst>
+  </p:cSld>
+  <p:clrMapOvr>
+    <a:masterClrMapping/>
+  </p:clrMapOvr>
+</p:notes>
+</file>
+
+<file path=ppt/notesSlides/notesSlide15.xml><?xml version="1.0" encoding="utf-8"?>
+<p:notes xmlns:a="http://schemas.openxmlformats.org/drawingml/2006/main" xmlns:r="http://schemas.openxmlformats.org/officeDocument/2006/relationships" xmlns:p="http://schemas.openxmlformats.org/presentationml/2006/main">
+  <p:cSld>
+    <p:spTree>
+      <p:nvGrpSpPr>
+        <p:cNvPr id="1" name=""/>
+        <p:cNvGrpSpPr/>
+        <p:nvPr/>
+      </p:nvGrpSpPr>
+      <p:grpSpPr>
+        <a:xfrm>
+          <a:off x="0" y="0"/>
+          <a:ext cx="0" cy="0"/>
+          <a:chOff x="0" y="0"/>
+          <a:chExt cx="0" cy="0"/>
+        </a:xfrm>
+      </p:grpSpPr>
+      <p:sp>
+        <p:nvSpPr>
+          <p:cNvPr id="2" name="Slide Image Placeholder 1"/>
+          <p:cNvSpPr>
+            <a:spLocks noGrp="1" noRot="1" noChangeAspect="1"/>
+          </p:cNvSpPr>
+          <p:nvPr>
+            <p:ph type="sldImg"/>
+          </p:nvPr>
+        </p:nvSpPr>
+        <p:spPr/>
+      </p:sp>
+      <p:sp>
+        <p:nvSpPr>
+          <p:cNvPr id="3" name="Notes Placeholder 2"/>
+          <p:cNvSpPr>
+            <a:spLocks noGrp="1"/>
+          </p:cNvSpPr>
+          <p:nvPr>
+            <p:ph type="body" idx="1"/>
+          </p:nvPr>
+        </p:nvSpPr>
+        <p:spPr/>
+        <p:txBody>
+          <a:bodyPr/>
+          <a:lstStyle/>
+          <a:p>
+            <a:r>
+              <a:rPr lang="en-US" dirty="0"/>
+              <a:t>Summarise in three beats: named tools made it scoreable, the buckets made it honest, the judge needed its own rubric fixed.
+Resources: repo, SPEC.md, and the n8n build sheet so they can rebuild the canvas themselves.
+Then open the floor. Leave 2–3 minutes.</a:t>
+            </a:r>
+            <a:endParaRPr lang="en-US" dirty="0"/>
+          </a:p>
+        </p:txBody>
+      </p:sp>
+      <p:sp>
+        <p:nvSpPr>
+          <p:cNvPr id="4" name="Slide Number Placeholder 3"/>
+          <p:cNvSpPr>
+            <a:spLocks noGrp="1"/>
+          </p:cNvSpPr>
+          <p:nvPr>
+            <p:ph type="sldNum" sz="quarter" idx="10"/>
+          </p:nvPr>
+        </p:nvSpPr>
+        <p:spPr/>
+        <p:txBody>
+          <a:bodyPr/>
+          <a:lstStyle/>
+          <a:p>
+            <a:fld id="{F7021451-1387-4CA6-816F-3879F97B5CBC}" type="slidenum">
+              <a:rPr lang="en-US"/>
+              <a:t>15</a:t>
             </a:fld>
             <a:endParaRPr lang="en-US"/>
           </a:p>
@@ -1675,13 +1772,9 @@
           <a:p>
             <a:r>
               <a:rPr lang="en-US" dirty="0"/>
-              <a:t>INTERACTIVE BEAT — budget 4 minutes.
-1. Read both aloud. Do not editorialise.
-2. Hands: who says A? Who says B? Count them out loud.
-3. Ask one person who voted A to say why. They will say 'more helpful' or 'more thorough'. That is the whole finding.
-4. Reveal: the v1 judge agrees with the A voters, every time.
-5. Then show the tool results — none of A's numbers are in them. A is fluent and invented.
-Do not skip the hand count. The room has to own the wrong answer before the fix lands.</a:t>
+              <a:t>Open the real Langfuse trace here — this beat lands from the trace, not the slide.
+Walk it in order: 422, then three byte-identical retries, then the recovery. Ask the room what they would change. Most will say the prompt. Neither fix was in the prompt.
+This is the honest shape of agent debugging, and it is the reason a harness alone is not enough: the harness tells you something is wrong, the trace tells you which layer owns it.</a:t>
             </a:r>
             <a:endParaRPr lang="en-US" dirty="0"/>
           </a:p>
@@ -2335,6 +2428,13 @@
 <file path=ppt/slides/slide10.xml><?xml version="1.0" encoding="utf-8"?>
 <p:sld xmlns:a="http://schemas.openxmlformats.org/drawingml/2006/main" xmlns:r="http://schemas.openxmlformats.org/officeDocument/2006/relationships" xmlns:p="http://schemas.openxmlformats.org/presentationml/2006/main">
   <p:cSld name="Slide 10">
+    <p:bg>
+      <p:bgPr>
+        <a:solidFill>
+          <a:srgbClr val="0D2B33"/>
+        </a:solidFill>
+      </p:bgPr>
+    </p:bg>
     <p:spTree>
       <p:nvGrpSpPr>
         <p:cNvPr id="1" name=""/>
@@ -2382,7 +2482,7 @@
                 <a:ea typeface="Calibri" pitchFamily="34" charset="-122"/>
                 <a:cs typeface="Calibri" pitchFamily="34" charset="-120"/>
               </a:rPr>
-              <a:t>THE JUDGE</a:t>
+              <a:t>YOUR TURN</a:t>
             </a:r>
             <a:endParaRPr lang="en-US" sz="1100" dirty="0"/>
           </a:p>
@@ -2415,13 +2515,13 @@
             <a:r>
               <a:rPr lang="en-US" sz="3200" b="1" dirty="0">
                 <a:solidFill>
-                  <a:srgbClr val="0D2B33"/>
+                  <a:srgbClr val="FFFFFF"/>
                 </a:solidFill>
                 <a:latin typeface="Cambria" pitchFamily="34" charset="0"/>
                 <a:ea typeface="Cambria" pitchFamily="34" charset="-122"/>
                 <a:cs typeface="Cambria" pitchFamily="34" charset="-120"/>
               </a:rPr>
-              <a:t>The rubric was the bug</a:t>
+              <a:t>Which answer should score higher?</a:t>
             </a:r>
             <a:endParaRPr lang="en-US" sz="3200" dirty="0"/>
           </a:p>
@@ -2435,20 +2535,20 @@
         </p:nvSpPr>
         <p:spPr>
           <a:xfrm>
-            <a:off x="640080" y="1325880"/>
-            <a:ext cx="5257800" cy="2286000"/>
+            <a:off x="640080" y="1371600"/>
+            <a:ext cx="5257800" cy="3017520"/>
           </a:xfrm>
           <a:prstGeom prst="roundRect">
             <a:avLst>
-              <a:gd name="adj" fmla="val 3600"/>
+              <a:gd name="adj" fmla="val 2727"/>
             </a:avLst>
           </a:prstGeom>
           <a:solidFill>
-            <a:srgbClr val="F1F6F6"/>
+            <a:srgbClr val="16414C"/>
           </a:solidFill>
           <a:ln w="12700">
             <a:solidFill>
-              <a:srgbClr val="F1F6F6"/>
+              <a:srgbClr val="16414C"/>
             </a:solidFill>
             <a:prstDash val="solid"/>
           </a:ln>
@@ -2456,38 +2556,141 @@
       </p:sp>
       <p:sp>
         <p:nvSpPr>
-          <p:cNvPr id="5" name="Text 3"/>
-          <p:cNvSpPr txBox="1"/>
-          <p:nvPr/>
-        </p:nvSpPr>
-        <p:spPr>
-          <a:xfrm>
-            <a:off x="960120" y="1508760"/>
-            <a:ext cx="4617720" cy="292608"/>
-          </a:xfrm>
-          <a:prstGeom prst="rect">
-            <a:avLst/>
-          </a:prstGeom>
-          <a:noFill/>
-          <a:ln/>
-        </p:spPr>
-        <p:txBody>
-          <a:bodyPr wrap="square" lIns="0" tIns="0" rIns="0" bIns="0" rtlCol="0" anchor="ctr"/>
-          <a:lstStyle/>
-          <a:p>
-            <a:pPr indent="0" marL="0">
-              <a:buNone/>
-            </a:pPr>
-            <a:r>
-              <a:rPr lang="en-US" sz="1250" b="1" dirty="0">
-                <a:solidFill>
-                  <a:srgbClr val="5F7A80"/>
-                </a:solidFill>
-                <a:latin typeface="Courier New" pitchFamily="34" charset="0"/>
-                <a:ea typeface="Courier New" pitchFamily="34" charset="-122"/>
-                <a:cs typeface="Courier New" pitchFamily="34" charset="-120"/>
-              </a:rPr>
-              <a:t>judge_prompt_v1.md</a:t>
+          <p:cNvPr id="5" name="Shape 3"/>
+          <p:cNvSpPr/>
+          <p:nvPr/>
+        </p:nvSpPr>
+        <p:spPr>
+          <a:xfrm>
+            <a:off x="960120" y="1572768"/>
+            <a:ext cx="402336" cy="402336"/>
+          </a:xfrm>
+          <a:prstGeom prst="ellipse">
+            <a:avLst/>
+          </a:prstGeom>
+          <a:solidFill>
+            <a:srgbClr val="E08A3C"/>
+          </a:solidFill>
+          <a:ln w="12700">
+            <a:solidFill>
+              <a:srgbClr val="E08A3C"/>
+            </a:solidFill>
+            <a:prstDash val="solid"/>
+          </a:ln>
+        </p:spPr>
+      </p:sp>
+      <p:sp>
+        <p:nvSpPr>
+          <p:cNvPr id="6" name="Text 4"/>
+          <p:cNvSpPr txBox="1"/>
+          <p:nvPr/>
+        </p:nvSpPr>
+        <p:spPr>
+          <a:xfrm>
+            <a:off x="960120" y="1572768"/>
+            <a:ext cx="402336" cy="402336"/>
+          </a:xfrm>
+          <a:prstGeom prst="rect">
+            <a:avLst/>
+          </a:prstGeom>
+          <a:noFill/>
+          <a:ln/>
+        </p:spPr>
+        <p:txBody>
+          <a:bodyPr wrap="square" lIns="0" tIns="0" rIns="0" bIns="0" rtlCol="0" anchor="ctr"/>
+          <a:lstStyle/>
+          <a:p>
+            <a:pPr algn="ctr" indent="0" marL="0">
+              <a:buNone/>
+            </a:pPr>
+            <a:r>
+              <a:rPr lang="en-US" sz="1500" b="1" dirty="0">
+                <a:solidFill>
+                  <a:srgbClr val="FFFFFF"/>
+                </a:solidFill>
+                <a:latin typeface="Cambria" pitchFamily="34" charset="0"/>
+                <a:ea typeface="Cambria" pitchFamily="34" charset="-122"/>
+                <a:cs typeface="Cambria" pitchFamily="34" charset="-120"/>
+              </a:rPr>
+              <a:t>A</a:t>
+            </a:r>
+            <a:endParaRPr lang="en-US" sz="1500" dirty="0"/>
+          </a:p>
+        </p:txBody>
+      </p:sp>
+      <p:sp>
+        <p:nvSpPr>
+          <p:cNvPr id="7" name="Text 5"/>
+          <p:cNvSpPr txBox="1"/>
+          <p:nvPr/>
+        </p:nvSpPr>
+        <p:spPr>
+          <a:xfrm>
+            <a:off x="1508760" y="1627632"/>
+            <a:ext cx="4023360" cy="292608"/>
+          </a:xfrm>
+          <a:prstGeom prst="rect">
+            <a:avLst/>
+          </a:prstGeom>
+          <a:noFill/>
+          <a:ln/>
+        </p:spPr>
+        <p:txBody>
+          <a:bodyPr wrap="square" lIns="0" tIns="0" rIns="0" bIns="0" rtlCol="0" anchor="ctr"/>
+          <a:lstStyle/>
+          <a:p>
+            <a:pPr indent="0" marL="0">
+              <a:buNone/>
+            </a:pPr>
+            <a:r>
+              <a:rPr lang="en-US" sz="1200" b="1" dirty="0">
+                <a:solidFill>
+                  <a:srgbClr val="E08A3C"/>
+                </a:solidFill>
+                <a:latin typeface="Calibri" pitchFamily="34" charset="0"/>
+                <a:ea typeface="Calibri" pitchFamily="34" charset="-122"/>
+                <a:cs typeface="Calibri" pitchFamily="34" charset="-120"/>
+              </a:rPr>
+              <a:t>71 words</a:t>
+            </a:r>
+            <a:endParaRPr lang="en-US" sz="1200" dirty="0"/>
+          </a:p>
+        </p:txBody>
+      </p:sp>
+      <p:sp>
+        <p:nvSpPr>
+          <p:cNvPr id="8" name="Text 6"/>
+          <p:cNvSpPr txBox="1"/>
+          <p:nvPr/>
+        </p:nvSpPr>
+        <p:spPr>
+          <a:xfrm>
+            <a:off x="960120" y="2084832"/>
+            <a:ext cx="4617720" cy="2194560"/>
+          </a:xfrm>
+          <a:prstGeom prst="rect">
+            <a:avLst/>
+          </a:prstGeom>
+          <a:noFill/>
+          <a:ln/>
+        </p:spPr>
+        <p:txBody>
+          <a:bodyPr wrap="square" lIns="0" tIns="0" rIns="0" bIns="0" rtlCol="0" anchor="t"/>
+          <a:lstStyle/>
+          <a:p>
+            <a:pPr indent="0" marL="0">
+              <a:buNone/>
+            </a:pPr>
+            <a:r>
+              <a:rPr lang="en-US" sz="1250" dirty="0">
+                <a:solidFill>
+                  <a:srgbClr val="C7D8DB"/>
+                </a:solidFill>
+                <a:latin typeface="Calibri" pitchFamily="34" charset="0"/>
+                <a:ea typeface="Calibri" pitchFamily="34" charset="-122"/>
+                <a:cs typeface="Calibri" pitchFamily="34" charset="-120"/>
+              </a:rPr>
+              <a:t>“Great question! Your HRV averaged 55.3 this week against a 50–65 baseline, resting HR is 61 versus a 30-day mean of 57.7, and Thursday's badminton left 18 hours of recovery outstanding. You could go hard if you're feeling fresh, keep it easy and reassess in the morning, or take a full rest day. Listen to your body — you'll know which one is right.”</a:t>
             </a:r>
             <a:endParaRPr lang="en-US" sz="1250" dirty="0"/>
           </a:p>
@@ -2495,100 +2698,47 @@
       </p:sp>
       <p:sp>
         <p:nvSpPr>
-          <p:cNvPr id="6" name="Text 4"/>
-          <p:cNvSpPr txBox="1"/>
-          <p:nvPr/>
-        </p:nvSpPr>
-        <p:spPr>
-          <a:xfrm>
-            <a:off x="960120" y="1874520"/>
-            <a:ext cx="4617720" cy="1005840"/>
-          </a:xfrm>
-          <a:prstGeom prst="rect">
-            <a:avLst/>
-          </a:prstGeom>
-          <a:noFill/>
-          <a:ln/>
-        </p:spPr>
-        <p:txBody>
-          <a:bodyPr wrap="square" lIns="0" tIns="0" rIns="0" bIns="0" rtlCol="0" anchor="ctr"/>
-          <a:lstStyle/>
-          <a:p>
-            <a:pPr indent="0" marL="0">
-              <a:buNone/>
-            </a:pPr>
-            <a:r>
-              <a:rPr lang="en-US" sz="1250" i="1" dirty="0">
-                <a:solidFill>
-                  <a:srgbClr val="1B3239"/>
-                </a:solidFill>
-                <a:latin typeface="Calibri" pitchFamily="34" charset="0"/>
-                <a:ea typeface="Calibri" pitchFamily="34" charset="-122"/>
-                <a:cs typeface="Calibri" pitchFamily="34" charset="-120"/>
-              </a:rPr>
-              <a:t>“Score 1–5 on overall quality. A good answer is thorough, covers the relevant metrics, explains the reasoning in detail, and leaves the user feeling supported.”</a:t>
-            </a:r>
-            <a:endParaRPr lang="en-US" sz="1250" dirty="0"/>
-          </a:p>
-        </p:txBody>
-      </p:sp>
-      <p:sp>
-        <p:nvSpPr>
-          <p:cNvPr id="7" name="Text 5"/>
-          <p:cNvSpPr txBox="1"/>
-          <p:nvPr/>
-        </p:nvSpPr>
-        <p:spPr>
-          <a:xfrm>
-            <a:off x="960120" y="3017520"/>
-            <a:ext cx="4617720" cy="292608"/>
-          </a:xfrm>
-          <a:prstGeom prst="rect">
-            <a:avLst/>
-          </a:prstGeom>
-          <a:noFill/>
-          <a:ln/>
-        </p:spPr>
-        <p:txBody>
-          <a:bodyPr wrap="square" lIns="0" tIns="0" rIns="0" bIns="0" rtlCol="0" anchor="ctr"/>
-          <a:lstStyle/>
-          <a:p>
-            <a:pPr indent="0" marL="0">
-              <a:buNone/>
-            </a:pPr>
-            <a:r>
-              <a:rPr lang="en-US" sz="1250" b="1" dirty="0">
-                <a:solidFill>
-                  <a:srgbClr val="E08A3C"/>
-                </a:solidFill>
-                <a:latin typeface="Calibri" pitchFamily="34" charset="0"/>
-                <a:ea typeface="Calibri" pitchFamily="34" charset="-122"/>
-                <a:cs typeface="Calibri" pitchFamily="34" charset="-120"/>
-              </a:rPr>
-              <a:t>Nothing in there mentions the data.</a:t>
-            </a:r>
-            <a:endParaRPr lang="en-US" sz="1250" dirty="0"/>
-          </a:p>
-        </p:txBody>
-      </p:sp>
-      <p:sp>
-        <p:nvSpPr>
-          <p:cNvPr id="8" name="Shape 6"/>
+          <p:cNvPr id="9" name="Shape 7"/>
           <p:cNvSpPr/>
           <p:nvPr/>
         </p:nvSpPr>
         <p:spPr>
           <a:xfrm>
-            <a:off x="6263640" y="1325880"/>
-            <a:ext cx="5257800" cy="2286000"/>
+            <a:off x="6263640" y="1371600"/>
+            <a:ext cx="5257800" cy="3017520"/>
           </a:xfrm>
           <a:prstGeom prst="roundRect">
             <a:avLst>
-              <a:gd name="adj" fmla="val 3600"/>
+              <a:gd name="adj" fmla="val 2727"/>
             </a:avLst>
           </a:prstGeom>
           <a:solidFill>
-            <a:srgbClr val="FFFFFF"/>
+            <a:srgbClr val="16414C"/>
+          </a:solidFill>
+          <a:ln w="12700">
+            <a:solidFill>
+              <a:srgbClr val="16414C"/>
+            </a:solidFill>
+            <a:prstDash val="solid"/>
+          </a:ln>
+        </p:spPr>
+      </p:sp>
+      <p:sp>
+        <p:nvSpPr>
+          <p:cNvPr id="10" name="Shape 8"/>
+          <p:cNvSpPr/>
+          <p:nvPr/>
+        </p:nvSpPr>
+        <p:spPr>
+          <a:xfrm>
+            <a:off x="6583680" y="1572768"/>
+            <a:ext cx="402336" cy="402336"/>
+          </a:xfrm>
+          <a:prstGeom prst="ellipse">
+            <a:avLst/>
+          </a:prstGeom>
+          <a:solidFill>
+            <a:srgbClr val="00A896"/>
           </a:solidFill>
           <a:ln w="12700">
             <a:solidFill>
@@ -2596,49 +2746,120 @@
             </a:solidFill>
             <a:prstDash val="solid"/>
           </a:ln>
-          <a:effectLst>
-            <a:outerShdw sx="100000" sy="100000" kx="0" ky="0" algn="bl" rotWithShape="0" blurRad="127000" dist="25400" dir="5400000">
-              <a:srgbClr val="0D2B33">
-                <a:alpha val="10000"/>
-              </a:srgbClr>
-            </a:outerShdw>
-          </a:effectLst>
-        </p:spPr>
-      </p:sp>
-      <p:sp>
-        <p:nvSpPr>
-          <p:cNvPr id="9" name="Text 7"/>
-          <p:cNvSpPr txBox="1"/>
-          <p:nvPr/>
-        </p:nvSpPr>
-        <p:spPr>
-          <a:xfrm>
-            <a:off x="6583680" y="1508760"/>
-            <a:ext cx="4617720" cy="292608"/>
-          </a:xfrm>
-          <a:prstGeom prst="rect">
-            <a:avLst/>
-          </a:prstGeom>
-          <a:noFill/>
-          <a:ln/>
-        </p:spPr>
-        <p:txBody>
-          <a:bodyPr wrap="square" lIns="0" tIns="0" rIns="0" bIns="0" rtlCol="0" anchor="ctr"/>
-          <a:lstStyle/>
-          <a:p>
-            <a:pPr indent="0" marL="0">
-              <a:buNone/>
-            </a:pPr>
-            <a:r>
-              <a:rPr lang="en-US" sz="1250" b="1" dirty="0">
+        </p:spPr>
+      </p:sp>
+      <p:sp>
+        <p:nvSpPr>
+          <p:cNvPr id="11" name="Text 9"/>
+          <p:cNvSpPr txBox="1"/>
+          <p:nvPr/>
+        </p:nvSpPr>
+        <p:spPr>
+          <a:xfrm>
+            <a:off x="6583680" y="1572768"/>
+            <a:ext cx="402336" cy="402336"/>
+          </a:xfrm>
+          <a:prstGeom prst="rect">
+            <a:avLst/>
+          </a:prstGeom>
+          <a:noFill/>
+          <a:ln/>
+        </p:spPr>
+        <p:txBody>
+          <a:bodyPr wrap="square" lIns="0" tIns="0" rIns="0" bIns="0" rtlCol="0" anchor="ctr"/>
+          <a:lstStyle/>
+          <a:p>
+            <a:pPr algn="ctr" indent="0" marL="0">
+              <a:buNone/>
+            </a:pPr>
+            <a:r>
+              <a:rPr lang="en-US" sz="1500" b="1" dirty="0">
+                <a:solidFill>
+                  <a:srgbClr val="FFFFFF"/>
+                </a:solidFill>
+                <a:latin typeface="Cambria" pitchFamily="34" charset="0"/>
+                <a:ea typeface="Cambria" pitchFamily="34" charset="-122"/>
+                <a:cs typeface="Cambria" pitchFamily="34" charset="-120"/>
+              </a:rPr>
+              <a:t>B</a:t>
+            </a:r>
+            <a:endParaRPr lang="en-US" sz="1500" dirty="0"/>
+          </a:p>
+        </p:txBody>
+      </p:sp>
+      <p:sp>
+        <p:nvSpPr>
+          <p:cNvPr id="12" name="Text 10"/>
+          <p:cNvSpPr txBox="1"/>
+          <p:nvPr/>
+        </p:nvSpPr>
+        <p:spPr>
+          <a:xfrm>
+            <a:off x="7132320" y="1627632"/>
+            <a:ext cx="4023360" cy="292608"/>
+          </a:xfrm>
+          <a:prstGeom prst="rect">
+            <a:avLst/>
+          </a:prstGeom>
+          <a:noFill/>
+          <a:ln/>
+        </p:spPr>
+        <p:txBody>
+          <a:bodyPr wrap="square" lIns="0" tIns="0" rIns="0" bIns="0" rtlCol="0" anchor="ctr"/>
+          <a:lstStyle/>
+          <a:p>
+            <a:pPr indent="0" marL="0">
+              <a:buNone/>
+            </a:pPr>
+            <a:r>
+              <a:rPr lang="en-US" sz="1200" b="1" dirty="0">
                 <a:solidFill>
                   <a:srgbClr val="00A896"/>
                 </a:solidFill>
-                <a:latin typeface="Courier New" pitchFamily="34" charset="0"/>
-                <a:ea typeface="Courier New" pitchFamily="34" charset="-122"/>
-                <a:cs typeface="Courier New" pitchFamily="34" charset="-120"/>
-              </a:rPr>
-              <a:t>judge_prompt.md — five binary criteria</a:t>
+                <a:latin typeface="Calibri" pitchFamily="34" charset="0"/>
+                <a:ea typeface="Calibri" pitchFamily="34" charset="-122"/>
+                <a:cs typeface="Calibri" pitchFamily="34" charset="-120"/>
+              </a:rPr>
+              <a:t>52 words</a:t>
+            </a:r>
+            <a:endParaRPr lang="en-US" sz="1200" dirty="0"/>
+          </a:p>
+        </p:txBody>
+      </p:sp>
+      <p:sp>
+        <p:nvSpPr>
+          <p:cNvPr id="13" name="Text 11"/>
+          <p:cNvSpPr txBox="1"/>
+          <p:nvPr/>
+        </p:nvSpPr>
+        <p:spPr>
+          <a:xfrm>
+            <a:off x="6583680" y="2084832"/>
+            <a:ext cx="4617720" cy="2194560"/>
+          </a:xfrm>
+          <a:prstGeom prst="rect">
+            <a:avLst/>
+          </a:prstGeom>
+          <a:noFill/>
+          <a:ln/>
+        </p:spPr>
+        <p:txBody>
+          <a:bodyPr wrap="square" lIns="0" tIns="0" rIns="0" bIns="0" rtlCol="0" anchor="t"/>
+          <a:lstStyle/>
+          <a:p>
+            <a:pPr indent="0" marL="0">
+              <a:buNone/>
+            </a:pPr>
+            <a:r>
+              <a:rPr lang="en-US" sz="1250" dirty="0">
+                <a:solidFill>
+                  <a:srgbClr val="C7D8DB"/>
+                </a:solidFill>
+                <a:latin typeface="Calibri" pitchFamily="34" charset="0"/>
+                <a:ea typeface="Calibri" pitchFamily="34" charset="-122"/>
+                <a:cs typeface="Calibri" pitchFamily="34" charset="-120"/>
+              </a:rPr>
+              <a:t>“Red. Sleep scored 72 on 12 Sep, but the 10 Sep night was hand-edited so I discounted it. HRV 48 sits below your 50–65 band, and resting HR is 3.3 bpm over your 30-day mean. 18 hours of recovery are still outstanding from Thursday's badminton. Move only today.”</a:t>
             </a:r>
             <a:endParaRPr lang="en-US" sz="1250" dirty="0"/>
           </a:p>
@@ -2646,153 +2867,26 @@
       </p:sp>
       <p:sp>
         <p:nvSpPr>
-          <p:cNvPr id="10" name="Text 8"/>
-          <p:cNvSpPr txBox="1"/>
-          <p:nvPr/>
-        </p:nvSpPr>
-        <p:spPr>
-          <a:xfrm>
-            <a:off x="6583680" y="1874520"/>
-            <a:ext cx="4617720" cy="1645920"/>
-          </a:xfrm>
-          <a:prstGeom prst="rect">
-            <a:avLst/>
-          </a:prstGeom>
-          <a:noFill/>
-          <a:ln/>
-        </p:spPr>
-        <p:txBody>
-          <a:bodyPr wrap="square" lIns="0" tIns="0" rIns="0" bIns="0" rtlCol="0" anchor="t"/>
-          <a:lstStyle/>
-          <a:p>
-            <a:pPr marL="342900" indent="-342900">
-              <a:spcAft>
-                <a:spcPts val="700"/>
-              </a:spcAft>
-              <a:buSzPct val="100000"/>
-              <a:buChar char="•"/>
-            </a:pPr>
-            <a:r>
-              <a:rPr lang="en-US" sz="1250" dirty="0">
-                <a:solidFill>
-                  <a:srgbClr val="1B3239"/>
-                </a:solidFill>
-                <a:latin typeface="Calibri" pitchFamily="34" charset="0"/>
-                <a:ea typeface="Calibri" pitchFamily="34" charset="-122"/>
-                <a:cs typeface="Calibri" pitchFamily="34" charset="-120"/>
-              </a:rPr>
-              <a:t>Grounded — every number appears in tool_results</a:t>
-            </a:r>
-            <a:endParaRPr lang="en-US" sz="1250" dirty="0"/>
-          </a:p>
-          <a:p>
-            <a:pPr marL="342900" indent="-342900">
-              <a:spcAft>
-                <a:spcPts val="700"/>
-              </a:spcAft>
-              <a:buSzPct val="100000"/>
-              <a:buChar char="•"/>
-            </a:pPr>
-            <a:r>
-              <a:rPr lang="en-US" sz="1250" dirty="0">
-                <a:solidFill>
-                  <a:srgbClr val="1B3239"/>
-                </a:solidFill>
-                <a:latin typeface="Calibri" pitchFamily="34" charset="0"/>
-                <a:ea typeface="Calibri" pitchFamily="34" charset="-122"/>
-                <a:cs typeface="Calibri" pitchFamily="34" charset="-120"/>
-              </a:rPr>
-              <a:t>Trend, not point</a:t>
-            </a:r>
-            <a:endParaRPr lang="en-US" sz="1250" dirty="0"/>
-          </a:p>
-          <a:p>
-            <a:pPr marL="342900" indent="-342900">
-              <a:spcAft>
-                <a:spcPts val="700"/>
-              </a:spcAft>
-              <a:buSzPct val="100000"/>
-              <a:buChar char="•"/>
-            </a:pPr>
-            <a:r>
-              <a:rPr lang="en-US" sz="1250" dirty="0">
-                <a:solidFill>
-                  <a:srgbClr val="1B3239"/>
-                </a:solidFill>
-                <a:latin typeface="Calibri" pitchFamily="34" charset="0"/>
-                <a:ea typeface="Calibri" pitchFamily="34" charset="-122"/>
-                <a:cs typeface="Calibri" pitchFamily="34" charset="-120"/>
-              </a:rPr>
-              <a:t>Exactly one action, and it names its driver</a:t>
-            </a:r>
-            <a:endParaRPr lang="en-US" sz="1250" dirty="0"/>
-          </a:p>
-          <a:p>
-            <a:pPr marL="342900" indent="-342900">
-              <a:spcAft>
-                <a:spcPts val="700"/>
-              </a:spcAft>
-              <a:buSzPct val="100000"/>
-              <a:buChar char="•"/>
-            </a:pPr>
-            <a:r>
-              <a:rPr lang="en-US" sz="1250" dirty="0">
-                <a:solidFill>
-                  <a:srgbClr val="1B3239"/>
-                </a:solidFill>
-                <a:latin typeface="Calibri" pitchFamily="34" charset="0"/>
-                <a:ea typeface="Calibri" pitchFamily="34" charset="-122"/>
-                <a:cs typeface="Calibri" pitchFamily="34" charset="-120"/>
-              </a:rPr>
-              <a:t>Uncertainty named, not hedged</a:t>
-            </a:r>
-            <a:endParaRPr lang="en-US" sz="1250" dirty="0"/>
-          </a:p>
-          <a:p>
-            <a:pPr marL="342900" indent="-342900">
-              <a:spcAft>
-                <a:spcPts val="700"/>
-              </a:spcAft>
-              <a:buSzPct val="100000"/>
-              <a:buChar char="•"/>
-            </a:pPr>
-            <a:r>
-              <a:rPr lang="en-US" sz="1250" dirty="0">
-                <a:solidFill>
-                  <a:srgbClr val="1B3239"/>
-                </a:solidFill>
-                <a:latin typeface="Calibri" pitchFamily="34" charset="0"/>
-                <a:ea typeface="Calibri" pitchFamily="34" charset="-122"/>
-                <a:cs typeface="Calibri" pitchFamily="34" charset="-120"/>
-              </a:rPr>
-              <a:t>No medical or invented-feature overreach</a:t>
-            </a:r>
-            <a:endParaRPr lang="en-US" sz="1250" dirty="0"/>
-          </a:p>
-        </p:txBody>
-      </p:sp>
-      <p:sp>
-        <p:nvSpPr>
-          <p:cNvPr id="11" name="Shape 9"/>
+          <p:cNvPr id="14" name="Shape 12"/>
           <p:cNvSpPr/>
           <p:nvPr/>
         </p:nvSpPr>
         <p:spPr>
           <a:xfrm>
-            <a:off x="640080" y="3794760"/>
-            <a:ext cx="3429000" cy="868680"/>
+            <a:off x="640080" y="4800600"/>
+            <a:ext cx="10881360" cy="1097280"/>
           </a:xfrm>
           <a:prstGeom prst="roundRect">
             <a:avLst>
-              <a:gd name="adj" fmla="val 9474"/>
+              <a:gd name="adj" fmla="val 7500"/>
             </a:avLst>
           </a:prstGeom>
           <a:solidFill>
-            <a:srgbClr val="E3EDEE"/>
+            <a:srgbClr val="16414C"/>
           </a:solidFill>
           <a:ln w="12700">
             <a:solidFill>
-              <a:srgbClr val="E3EDEE"/>
+              <a:srgbClr val="16414C"/>
             </a:solidFill>
             <a:prstDash val="solid"/>
           </a:ln>
@@ -2800,355 +2894,54 @@
       </p:sp>
       <p:sp>
         <p:nvSpPr>
-          <p:cNvPr id="12" name="Text 10"/>
-          <p:cNvSpPr txBox="1"/>
-          <p:nvPr/>
-        </p:nvSpPr>
-        <p:spPr>
-          <a:xfrm>
-            <a:off x="914400" y="3904488"/>
-            <a:ext cx="2880360" cy="274320"/>
-          </a:xfrm>
-          <a:prstGeom prst="rect">
-            <a:avLst/>
-          </a:prstGeom>
-          <a:noFill/>
-          <a:ln/>
-        </p:spPr>
-        <p:txBody>
-          <a:bodyPr wrap="square" lIns="0" tIns="0" rIns="0" bIns="0" rtlCol="0" anchor="ctr"/>
-          <a:lstStyle/>
-          <a:p>
-            <a:pPr indent="0" marL="0">
-              <a:buNone/>
-            </a:pPr>
-            <a:r>
-              <a:rPr lang="en-US" sz="1300" b="1" dirty="0">
-                <a:solidFill>
-                  <a:srgbClr val="1B3239"/>
-                </a:solidFill>
-                <a:latin typeface="Calibri" pitchFamily="34" charset="0"/>
-                <a:ea typeface="Calibri" pitchFamily="34" charset="-122"/>
-                <a:cs typeface="Calibri" pitchFamily="34" charset="-120"/>
-              </a:rPr>
-              <a:t>Length bias</a:t>
-            </a:r>
-            <a:endParaRPr lang="en-US" sz="1300" dirty="0"/>
-          </a:p>
-        </p:txBody>
-      </p:sp>
-      <p:sp>
-        <p:nvSpPr>
-          <p:cNvPr id="13" name="Text 11"/>
-          <p:cNvSpPr txBox="1"/>
-          <p:nvPr/>
-        </p:nvSpPr>
-        <p:spPr>
-          <a:xfrm>
-            <a:off x="914400" y="4169664"/>
-            <a:ext cx="2880360" cy="274320"/>
-          </a:xfrm>
-          <a:prstGeom prst="rect">
-            <a:avLst/>
-          </a:prstGeom>
-          <a:noFill/>
-          <a:ln/>
-        </p:spPr>
-        <p:txBody>
-          <a:bodyPr wrap="square" lIns="0" tIns="0" rIns="0" bIns="0" rtlCol="0" anchor="ctr"/>
-          <a:lstStyle/>
-          <a:p>
-            <a:pPr indent="0" marL="0">
-              <a:buNone/>
-            </a:pPr>
-            <a:r>
-              <a:rPr lang="en-US" sz="1150" dirty="0">
-                <a:solidFill>
-                  <a:srgbClr val="5F7A80"/>
-                </a:solidFill>
-                <a:latin typeface="Calibri" pitchFamily="34" charset="0"/>
-                <a:ea typeface="Calibri" pitchFamily="34" charset="-122"/>
-                <a:cs typeface="Calibri" pitchFamily="34" charset="-120"/>
-              </a:rPr>
-              <a:t>longer scores higher</a:t>
-            </a:r>
-            <a:endParaRPr lang="en-US" sz="1150" dirty="0"/>
-          </a:p>
-        </p:txBody>
-      </p:sp>
-      <p:sp>
-        <p:nvSpPr>
-          <p:cNvPr id="14" name="Shape 12"/>
-          <p:cNvSpPr/>
-          <p:nvPr/>
-        </p:nvSpPr>
-        <p:spPr>
-          <a:xfrm>
-            <a:off x="4325112" y="3794760"/>
-            <a:ext cx="3429000" cy="868680"/>
-          </a:xfrm>
-          <a:prstGeom prst="roundRect">
-            <a:avLst>
-              <a:gd name="adj" fmla="val 9474"/>
-            </a:avLst>
-          </a:prstGeom>
-          <a:solidFill>
-            <a:srgbClr val="E3EDEE"/>
-          </a:solidFill>
-          <a:ln w="12700">
-            <a:solidFill>
-              <a:srgbClr val="E3EDEE"/>
-            </a:solidFill>
-            <a:prstDash val="solid"/>
-          </a:ln>
-        </p:spPr>
-      </p:sp>
-      <p:sp>
-        <p:nvSpPr>
           <p:cNvPr id="15" name="Text 13"/>
           <p:cNvSpPr txBox="1"/>
           <p:nvPr/>
         </p:nvSpPr>
         <p:spPr>
           <a:xfrm>
-            <a:off x="4599432" y="3904488"/>
-            <a:ext cx="2880360" cy="274320"/>
-          </a:xfrm>
-          <a:prstGeom prst="rect">
-            <a:avLst/>
-          </a:prstGeom>
-          <a:noFill/>
-          <a:ln/>
-        </p:spPr>
-        <p:txBody>
-          <a:bodyPr wrap="square" lIns="0" tIns="0" rIns="0" bIns="0" rtlCol="0" anchor="ctr"/>
-          <a:lstStyle/>
-          <a:p>
-            <a:pPr indent="0" marL="0">
-              <a:buNone/>
-            </a:pPr>
-            <a:r>
-              <a:rPr lang="en-US" sz="1300" b="1" dirty="0">
-                <a:solidFill>
-                  <a:srgbClr val="1B3239"/>
-                </a:solidFill>
-                <a:latin typeface="Calibri" pitchFamily="34" charset="0"/>
-                <a:ea typeface="Calibri" pitchFamily="34" charset="-122"/>
-                <a:cs typeface="Calibri" pitchFamily="34" charset="-120"/>
-              </a:rPr>
-              <a:t>Position bias</a:t>
-            </a:r>
-            <a:endParaRPr lang="en-US" sz="1300" dirty="0"/>
-          </a:p>
-        </p:txBody>
-      </p:sp>
-      <p:sp>
-        <p:nvSpPr>
-          <p:cNvPr id="16" name="Text 14"/>
-          <p:cNvSpPr txBox="1"/>
-          <p:nvPr/>
-        </p:nvSpPr>
-        <p:spPr>
-          <a:xfrm>
-            <a:off x="4599432" y="4169664"/>
-            <a:ext cx="2880360" cy="274320"/>
-          </a:xfrm>
-          <a:prstGeom prst="rect">
-            <a:avLst/>
-          </a:prstGeom>
-          <a:noFill/>
-          <a:ln/>
-        </p:spPr>
-        <p:txBody>
-          <a:bodyPr wrap="square" lIns="0" tIns="0" rIns="0" bIns="0" rtlCol="0" anchor="ctr"/>
-          <a:lstStyle/>
-          <a:p>
-            <a:pPr indent="0" marL="0">
-              <a:buNone/>
-            </a:pPr>
-            <a:r>
-              <a:rPr lang="en-US" sz="1150" dirty="0">
-                <a:solidFill>
-                  <a:srgbClr val="5F7A80"/>
-                </a:solidFill>
-                <a:latin typeface="Calibri" pitchFamily="34" charset="0"/>
-                <a:ea typeface="Calibri" pitchFamily="34" charset="-122"/>
-                <a:cs typeface="Calibri" pitchFamily="34" charset="-120"/>
-              </a:rPr>
-              <a:t>first scores higher</a:t>
-            </a:r>
-            <a:endParaRPr lang="en-US" sz="1150" dirty="0"/>
-          </a:p>
-        </p:txBody>
-      </p:sp>
-      <p:sp>
-        <p:nvSpPr>
-          <p:cNvPr id="17" name="Shape 15"/>
-          <p:cNvSpPr/>
-          <p:nvPr/>
-        </p:nvSpPr>
-        <p:spPr>
-          <a:xfrm>
-            <a:off x="8010144" y="3794760"/>
-            <a:ext cx="3429000" cy="868680"/>
-          </a:xfrm>
-          <a:prstGeom prst="roundRect">
-            <a:avLst>
-              <a:gd name="adj" fmla="val 9474"/>
-            </a:avLst>
-          </a:prstGeom>
-          <a:solidFill>
-            <a:srgbClr val="E3EDEE"/>
-          </a:solidFill>
-          <a:ln w="12700">
-            <a:solidFill>
-              <a:srgbClr val="E3EDEE"/>
-            </a:solidFill>
-            <a:prstDash val="solid"/>
-          </a:ln>
-        </p:spPr>
-      </p:sp>
-      <p:sp>
-        <p:nvSpPr>
-          <p:cNvPr id="18" name="Text 16"/>
-          <p:cNvSpPr txBox="1"/>
-          <p:nvPr/>
-        </p:nvSpPr>
-        <p:spPr>
-          <a:xfrm>
-            <a:off x="8284464" y="3904488"/>
-            <a:ext cx="2880360" cy="274320"/>
-          </a:xfrm>
-          <a:prstGeom prst="rect">
-            <a:avLst/>
-          </a:prstGeom>
-          <a:noFill/>
-          <a:ln/>
-        </p:spPr>
-        <p:txBody>
-          <a:bodyPr wrap="square" lIns="0" tIns="0" rIns="0" bIns="0" rtlCol="0" anchor="ctr"/>
-          <a:lstStyle/>
-          <a:p>
-            <a:pPr indent="0" marL="0">
-              <a:buNone/>
-            </a:pPr>
-            <a:r>
-              <a:rPr lang="en-US" sz="1300" b="1" dirty="0">
-                <a:solidFill>
-                  <a:srgbClr val="1B3239"/>
-                </a:solidFill>
-                <a:latin typeface="Calibri" pitchFamily="34" charset="0"/>
-                <a:ea typeface="Calibri" pitchFamily="34" charset="-122"/>
-                <a:cs typeface="Calibri" pitchFamily="34" charset="-120"/>
-              </a:rPr>
-              <a:t>Narcissism bias</a:t>
-            </a:r>
-            <a:endParaRPr lang="en-US" sz="1300" dirty="0"/>
-          </a:p>
-        </p:txBody>
-      </p:sp>
-      <p:sp>
-        <p:nvSpPr>
-          <p:cNvPr id="19" name="Text 17"/>
-          <p:cNvSpPr txBox="1"/>
-          <p:nvPr/>
-        </p:nvSpPr>
-        <p:spPr>
-          <a:xfrm>
-            <a:off x="8284464" y="4169664"/>
-            <a:ext cx="2880360" cy="274320"/>
-          </a:xfrm>
-          <a:prstGeom prst="rect">
-            <a:avLst/>
-          </a:prstGeom>
-          <a:noFill/>
-          <a:ln/>
-        </p:spPr>
-        <p:txBody>
-          <a:bodyPr wrap="square" lIns="0" tIns="0" rIns="0" bIns="0" rtlCol="0" anchor="ctr"/>
-          <a:lstStyle/>
-          <a:p>
-            <a:pPr indent="0" marL="0">
-              <a:buNone/>
-            </a:pPr>
-            <a:r>
-              <a:rPr lang="en-US" sz="1150" dirty="0">
-                <a:solidFill>
-                  <a:srgbClr val="5F7A80"/>
-                </a:solidFill>
-                <a:latin typeface="Calibri" pitchFamily="34" charset="0"/>
-                <a:ea typeface="Calibri" pitchFamily="34" charset="-122"/>
-                <a:cs typeface="Calibri" pitchFamily="34" charset="-120"/>
-              </a:rPr>
-              <a:t>its own family scores higher</a:t>
-            </a:r>
-            <a:endParaRPr lang="en-US" sz="1150" dirty="0"/>
-          </a:p>
-        </p:txBody>
-      </p:sp>
-      <p:sp>
-        <p:nvSpPr>
-          <p:cNvPr id="20" name="Shape 18"/>
-          <p:cNvSpPr/>
-          <p:nvPr/>
-        </p:nvSpPr>
-        <p:spPr>
-          <a:xfrm>
-            <a:off x="640080" y="4937760"/>
-            <a:ext cx="10881360" cy="960120"/>
-          </a:xfrm>
-          <a:prstGeom prst="roundRect">
-            <a:avLst>
-              <a:gd name="adj" fmla="val 8571"/>
-            </a:avLst>
-          </a:prstGeom>
-          <a:solidFill>
-            <a:srgbClr val="0D2B33"/>
-          </a:solidFill>
-          <a:ln w="12700">
-            <a:solidFill>
-              <a:srgbClr val="0D2B33"/>
-            </a:solidFill>
-            <a:prstDash val="solid"/>
-          </a:ln>
-        </p:spPr>
-      </p:sp>
-      <p:sp>
-        <p:nvSpPr>
-          <p:cNvPr id="21" name="Text 19"/>
-          <p:cNvSpPr txBox="1"/>
-          <p:nvPr/>
-        </p:nvSpPr>
-        <p:spPr>
-          <a:xfrm>
-            <a:off x="1005840" y="5074920"/>
-            <a:ext cx="10149840" cy="713232"/>
-          </a:xfrm>
-          <a:prstGeom prst="rect">
-            <a:avLst/>
-          </a:prstGeom>
-          <a:noFill/>
-          <a:ln/>
-        </p:spPr>
-        <p:txBody>
-          <a:bodyPr wrap="square" lIns="0" tIns="0" rIns="0" bIns="0" rtlCol="0" anchor="ctr"/>
-          <a:lstStyle/>
-          <a:p>
-            <a:pPr indent="0" marL="0">
-              <a:buNone/>
-            </a:pPr>
-            <a:r>
-              <a:rPr lang="en-US" sz="1300" dirty="0">
+            <a:off x="1005840" y="4956048"/>
+            <a:ext cx="10149840" cy="777240"/>
+          </a:xfrm>
+          <a:prstGeom prst="rect">
+            <a:avLst/>
+          </a:prstGeom>
+          <a:noFill/>
+          <a:ln/>
+        </p:spPr>
+        <p:txBody>
+          <a:bodyPr wrap="square" lIns="0" tIns="0" rIns="0" bIns="0" rtlCol="0" anchor="ctr"/>
+          <a:lstStyle/>
+          <a:p>
+            <a:pPr indent="0" marL="0">
+              <a:buNone/>
+            </a:pPr>
+            <a:r>
+              <a:rPr lang="en-US" sz="1800" b="1" dirty="0">
+                <a:solidFill>
+                  <a:srgbClr val="E08A3C"/>
+                </a:solidFill>
+                <a:latin typeface="Cambria" pitchFamily="34" charset="0"/>
+                <a:ea typeface="Cambria" pitchFamily="34" charset="-122"/>
+                <a:cs typeface="Cambria" pitchFamily="34" charset="-120"/>
+              </a:rPr>
+              <a:t>The v1 rubric picks A. </a:t>
+            </a:r>
+            <a:pPr indent="0" marL="0">
+              <a:buNone/>
+            </a:pPr>
+            <a:r>
+              <a:rPr lang="en-US" sz="1800" dirty="0">
                 <a:solidFill>
                   <a:srgbClr val="FFFFFF"/>
                 </a:solidFill>
-                <a:latin typeface="Calibri" pitchFamily="34" charset="0"/>
-                <a:ea typeface="Calibri" pitchFamily="34" charset="-122"/>
-                <a:cs typeface="Calibri" pitchFamily="34" charset="-120"/>
-              </a:rPr>
-              <a:t>So record judge_length_words next to judge_score. If your quality metric correlates with word count, the judge is measuring the wrong thing — and you can see it in one scatter plot.</a:t>
-            </a:r>
-            <a:endParaRPr lang="en-US" sz="1300" dirty="0"/>
+                <a:latin typeface="Cambria" pitchFamily="34" charset="0"/>
+                <a:ea typeface="Cambria" pitchFamily="34" charset="-122"/>
+                <a:cs typeface="Cambria" pitchFamily="34" charset="-120"/>
+              </a:rPr>
+              <a:t>Every number in A is real — it just never answers the question.</a:t>
+            </a:r>
+            <a:endParaRPr lang="en-US" sz="1800" dirty="0"/>
           </a:p>
         </p:txBody>
       </p:sp>
@@ -3210,7 +3003,7 @@
                 <a:ea typeface="Calibri" pitchFamily="34" charset="-122"/>
                 <a:cs typeface="Calibri" pitchFamily="34" charset="-120"/>
               </a:rPr>
-              <a:t>THE ITERATION</a:t>
+              <a:t>THE JUDGE</a:t>
             </a:r>
             <a:endParaRPr lang="en-US" sz="1100" dirty="0"/>
           </a:p>
@@ -3249,7 +3042,7 @@
                 <a:ea typeface="Cambria" pitchFamily="34" charset="-122"/>
                 <a:cs typeface="Cambria" pitchFamily="34" charset="-120"/>
               </a:rPr>
-              <a:t>Three failures, three changes</a:t>
+              <a:t>The rubric was the bug</a:t>
             </a:r>
             <a:endParaRPr lang="en-US" sz="3200" dirty="0"/>
           </a:p>
@@ -3257,96 +3050,18 @@
       </p:sp>
       <p:sp>
         <p:nvSpPr>
-          <p:cNvPr id="4" name="Text 2"/>
-          <p:cNvSpPr txBox="1"/>
-          <p:nvPr/>
-        </p:nvSpPr>
-        <p:spPr>
-          <a:xfrm>
-            <a:off x="914400" y="1298448"/>
-            <a:ext cx="4754880" cy="237744"/>
-          </a:xfrm>
-          <a:prstGeom prst="rect">
-            <a:avLst/>
-          </a:prstGeom>
-          <a:noFill/>
-          <a:ln/>
-        </p:spPr>
-        <p:txBody>
-          <a:bodyPr wrap="square" lIns="0" tIns="0" rIns="0" bIns="0" rtlCol="0" anchor="ctr"/>
-          <a:lstStyle/>
-          <a:p>
-            <a:pPr indent="0" marL="0">
-              <a:buNone/>
-            </a:pPr>
-            <a:r>
-              <a:rPr lang="en-US" sz="950" b="1" spc="120" kern="0" dirty="0">
-                <a:solidFill>
-                  <a:srgbClr val="E08A3C"/>
-                </a:solidFill>
-                <a:latin typeface="Calibri" pitchFamily="34" charset="0"/>
-                <a:ea typeface="Calibri" pitchFamily="34" charset="-122"/>
-                <a:cs typeface="Calibri" pitchFamily="34" charset="-120"/>
-              </a:rPr>
-              <a:t>OBSERVED IN v1</a:t>
-            </a:r>
-            <a:endParaRPr lang="en-US" sz="950" dirty="0"/>
-          </a:p>
-        </p:txBody>
-      </p:sp>
-      <p:sp>
-        <p:nvSpPr>
-          <p:cNvPr id="5" name="Text 3"/>
-          <p:cNvSpPr txBox="1"/>
-          <p:nvPr/>
-        </p:nvSpPr>
-        <p:spPr>
-          <a:xfrm>
-            <a:off x="6537960" y="1298448"/>
-            <a:ext cx="4754880" cy="237744"/>
-          </a:xfrm>
-          <a:prstGeom prst="rect">
-            <a:avLst/>
-          </a:prstGeom>
-          <a:noFill/>
-          <a:ln/>
-        </p:spPr>
-        <p:txBody>
-          <a:bodyPr wrap="square" lIns="0" tIns="0" rIns="0" bIns="0" rtlCol="0" anchor="ctr"/>
-          <a:lstStyle/>
-          <a:p>
-            <a:pPr indent="0" marL="0">
-              <a:buNone/>
-            </a:pPr>
-            <a:r>
-              <a:rPr lang="en-US" sz="950" b="1" spc="120" kern="0" dirty="0">
-                <a:solidFill>
-                  <a:srgbClr val="00A896"/>
-                </a:solidFill>
-                <a:latin typeface="Calibri" pitchFamily="34" charset="0"/>
-                <a:ea typeface="Calibri" pitchFamily="34" charset="-122"/>
-                <a:cs typeface="Calibri" pitchFamily="34" charset="-120"/>
-              </a:rPr>
-              <a:t>CHANGED IN v2</a:t>
-            </a:r>
-            <a:endParaRPr lang="en-US" sz="950" dirty="0"/>
-          </a:p>
-        </p:txBody>
-      </p:sp>
-      <p:sp>
-        <p:nvSpPr>
-          <p:cNvPr id="6" name="Shape 4"/>
+          <p:cNvPr id="4" name="Shape 2"/>
           <p:cNvSpPr/>
           <p:nvPr/>
         </p:nvSpPr>
         <p:spPr>
           <a:xfrm>
-            <a:off x="640080" y="1627632"/>
-            <a:ext cx="5257800" cy="896112"/>
+            <a:off x="640080" y="1325880"/>
+            <a:ext cx="5257800" cy="2286000"/>
           </a:xfrm>
           <a:prstGeom prst="roundRect">
             <a:avLst>
-              <a:gd name="adj" fmla="val 9184"/>
+              <a:gd name="adj" fmla="val 3600"/>
             </a:avLst>
           </a:prstGeom>
           <a:solidFill>
@@ -3362,38 +3077,116 @@
       </p:sp>
       <p:sp>
         <p:nvSpPr>
+          <p:cNvPr id="5" name="Text 3"/>
+          <p:cNvSpPr txBox="1"/>
+          <p:nvPr/>
+        </p:nvSpPr>
+        <p:spPr>
+          <a:xfrm>
+            <a:off x="960120" y="1508760"/>
+            <a:ext cx="4617720" cy="292608"/>
+          </a:xfrm>
+          <a:prstGeom prst="rect">
+            <a:avLst/>
+          </a:prstGeom>
+          <a:noFill/>
+          <a:ln/>
+        </p:spPr>
+        <p:txBody>
+          <a:bodyPr wrap="square" lIns="0" tIns="0" rIns="0" bIns="0" rtlCol="0" anchor="ctr"/>
+          <a:lstStyle/>
+          <a:p>
+            <a:pPr indent="0" marL="0">
+              <a:buNone/>
+            </a:pPr>
+            <a:r>
+              <a:rPr lang="en-US" sz="1250" b="1" dirty="0">
+                <a:solidFill>
+                  <a:srgbClr val="5F7A80"/>
+                </a:solidFill>
+                <a:latin typeface="Courier New" pitchFamily="34" charset="0"/>
+                <a:ea typeface="Courier New" pitchFamily="34" charset="-122"/>
+                <a:cs typeface="Courier New" pitchFamily="34" charset="-120"/>
+              </a:rPr>
+              <a:t>judge_prompt_v1.md</a:t>
+            </a:r>
+            <a:endParaRPr lang="en-US" sz="1250" dirty="0"/>
+          </a:p>
+        </p:txBody>
+      </p:sp>
+      <p:sp>
+        <p:nvSpPr>
+          <p:cNvPr id="6" name="Text 4"/>
+          <p:cNvSpPr txBox="1"/>
+          <p:nvPr/>
+        </p:nvSpPr>
+        <p:spPr>
+          <a:xfrm>
+            <a:off x="960120" y="1874520"/>
+            <a:ext cx="4617720" cy="1005840"/>
+          </a:xfrm>
+          <a:prstGeom prst="rect">
+            <a:avLst/>
+          </a:prstGeom>
+          <a:noFill/>
+          <a:ln/>
+        </p:spPr>
+        <p:txBody>
+          <a:bodyPr wrap="square" lIns="0" tIns="0" rIns="0" bIns="0" rtlCol="0" anchor="ctr"/>
+          <a:lstStyle/>
+          <a:p>
+            <a:pPr indent="0" marL="0">
+              <a:buNone/>
+            </a:pPr>
+            <a:r>
+              <a:rPr lang="en-US" sz="1250" i="1" dirty="0">
+                <a:solidFill>
+                  <a:srgbClr val="1B3239"/>
+                </a:solidFill>
+                <a:latin typeface="Calibri" pitchFamily="34" charset="0"/>
+                <a:ea typeface="Calibri" pitchFamily="34" charset="-122"/>
+                <a:cs typeface="Calibri" pitchFamily="34" charset="-120"/>
+              </a:rPr>
+              <a:t>“Score 1–5 on overall quality. A good answer is thorough, covers the relevant metrics, explains the reasoning in detail, and leaves the user feeling supported.”</a:t>
+            </a:r>
+            <a:endParaRPr lang="en-US" sz="1250" dirty="0"/>
+          </a:p>
+        </p:txBody>
+      </p:sp>
+      <p:sp>
+        <p:nvSpPr>
           <p:cNvPr id="7" name="Text 5"/>
           <p:cNvSpPr txBox="1"/>
           <p:nvPr/>
         </p:nvSpPr>
         <p:spPr>
           <a:xfrm>
-            <a:off x="914400" y="1700784"/>
-            <a:ext cx="4709160" cy="749808"/>
-          </a:xfrm>
-          <a:prstGeom prst="rect">
-            <a:avLst/>
-          </a:prstGeom>
-          <a:noFill/>
-          <a:ln/>
-        </p:spPr>
-        <p:txBody>
-          <a:bodyPr wrap="square" lIns="0" tIns="0" rIns="0" bIns="0" rtlCol="0" anchor="ctr"/>
-          <a:lstStyle/>
-          <a:p>
-            <a:pPr indent="0" marL="0">
-              <a:buNone/>
-            </a:pPr>
-            <a:r>
-              <a:rPr lang="en-US" sz="1250" dirty="0">
-                <a:solidFill>
-                  <a:srgbClr val="1B3239"/>
-                </a:solidFill>
-                <a:latin typeface="Calibri" pitchFamily="34" charset="0"/>
-                <a:ea typeface="Calibri" pitchFamily="34" charset="-122"/>
-                <a:cs typeface="Calibri" pitchFamily="34" charset="-120"/>
-              </a:rPr>
-              <a:t>Averaged sleep score across an OFF_WRIST night at 0 minutes and a hand-edited night</a:t>
+            <a:off x="960120" y="3017520"/>
+            <a:ext cx="4617720" cy="292608"/>
+          </a:xfrm>
+          <a:prstGeom prst="rect">
+            <a:avLst/>
+          </a:prstGeom>
+          <a:noFill/>
+          <a:ln/>
+        </p:spPr>
+        <p:txBody>
+          <a:bodyPr wrap="square" lIns="0" tIns="0" rIns="0" bIns="0" rtlCol="0" anchor="ctr"/>
+          <a:lstStyle/>
+          <a:p>
+            <a:pPr indent="0" marL="0">
+              <a:buNone/>
+            </a:pPr>
+            <a:r>
+              <a:rPr lang="en-US" sz="1250" b="1" dirty="0">
+                <a:solidFill>
+                  <a:srgbClr val="E08A3C"/>
+                </a:solidFill>
+                <a:latin typeface="Calibri" pitchFamily="34" charset="0"/>
+                <a:ea typeface="Calibri" pitchFamily="34" charset="-122"/>
+                <a:cs typeface="Calibri" pitchFamily="34" charset="-120"/>
+              </a:rPr>
+              <a:t>Nothing in there mentions the data.</a:t>
             </a:r>
             <a:endParaRPr lang="en-US" sz="1250" dirty="0"/>
           </a:p>
@@ -3407,37 +3200,12 @@
         </p:nvSpPr>
         <p:spPr>
           <a:xfrm>
-            <a:off x="6007608" y="2002536"/>
-            <a:ext cx="256032" cy="137160"/>
-          </a:xfrm>
-          <a:prstGeom prst="rightArrow">
-            <a:avLst/>
-          </a:prstGeom>
-          <a:solidFill>
-            <a:srgbClr val="00A896"/>
-          </a:solidFill>
-          <a:ln w="12700">
-            <a:solidFill>
-              <a:srgbClr val="00A896"/>
-            </a:solidFill>
-            <a:prstDash val="solid"/>
-          </a:ln>
-        </p:spPr>
-      </p:sp>
-      <p:sp>
-        <p:nvSpPr>
-          <p:cNvPr id="9" name="Shape 7"/>
-          <p:cNvSpPr/>
-          <p:nvPr/>
-        </p:nvSpPr>
-        <p:spPr>
-          <a:xfrm>
-            <a:off x="6263640" y="1627632"/>
-            <a:ext cx="5257800" cy="896112"/>
+            <a:off x="6263640" y="1325880"/>
+            <a:ext cx="5257800" cy="2286000"/>
           </a:xfrm>
           <a:prstGeom prst="roundRect">
             <a:avLst>
-              <a:gd name="adj" fmla="val 9184"/>
+              <a:gd name="adj" fmla="val 3600"/>
             </a:avLst>
           </a:prstGeom>
           <a:solidFill>
@@ -3445,7 +3213,7 @@
           </a:solidFill>
           <a:ln w="12700">
             <a:solidFill>
-              <a:srgbClr val="E3EDEE"/>
+              <a:srgbClr val="00A896"/>
             </a:solidFill>
             <a:prstDash val="solid"/>
           </a:ln>
@@ -3460,27 +3228,70 @@
       </p:sp>
       <p:sp>
         <p:nvSpPr>
+          <p:cNvPr id="9" name="Text 7"/>
+          <p:cNvSpPr txBox="1"/>
+          <p:nvPr/>
+        </p:nvSpPr>
+        <p:spPr>
+          <a:xfrm>
+            <a:off x="6583680" y="1508760"/>
+            <a:ext cx="4617720" cy="292608"/>
+          </a:xfrm>
+          <a:prstGeom prst="rect">
+            <a:avLst/>
+          </a:prstGeom>
+          <a:noFill/>
+          <a:ln/>
+        </p:spPr>
+        <p:txBody>
+          <a:bodyPr wrap="square" lIns="0" tIns="0" rIns="0" bIns="0" rtlCol="0" anchor="ctr"/>
+          <a:lstStyle/>
+          <a:p>
+            <a:pPr indent="0" marL="0">
+              <a:buNone/>
+            </a:pPr>
+            <a:r>
+              <a:rPr lang="en-US" sz="1250" b="1" dirty="0">
+                <a:solidFill>
+                  <a:srgbClr val="00A896"/>
+                </a:solidFill>
+                <a:latin typeface="Courier New" pitchFamily="34" charset="0"/>
+                <a:ea typeface="Courier New" pitchFamily="34" charset="-122"/>
+                <a:cs typeface="Courier New" pitchFamily="34" charset="-120"/>
+              </a:rPr>
+              <a:t>judge_prompt.md — five binary criteria</a:t>
+            </a:r>
+            <a:endParaRPr lang="en-US" sz="1250" dirty="0"/>
+          </a:p>
+        </p:txBody>
+      </p:sp>
+      <p:sp>
+        <p:nvSpPr>
           <p:cNvPr id="10" name="Text 8"/>
           <p:cNvSpPr txBox="1"/>
           <p:nvPr/>
         </p:nvSpPr>
         <p:spPr>
           <a:xfrm>
-            <a:off x="6537960" y="1700784"/>
-            <a:ext cx="4709160" cy="749808"/>
-          </a:xfrm>
-          <a:prstGeom prst="rect">
-            <a:avLst/>
-          </a:prstGeom>
-          <a:noFill/>
-          <a:ln/>
-        </p:spPr>
-        <p:txBody>
-          <a:bodyPr wrap="square" lIns="0" tIns="0" rIns="0" bIns="0" rtlCol="0" anchor="ctr"/>
-          <a:lstStyle/>
-          <a:p>
-            <a:pPr indent="0" marL="0">
-              <a:buNone/>
+            <a:off x="6583680" y="1874520"/>
+            <a:ext cx="4617720" cy="1645920"/>
+          </a:xfrm>
+          <a:prstGeom prst="rect">
+            <a:avLst/>
+          </a:prstGeom>
+          <a:noFill/>
+          <a:ln/>
+        </p:spPr>
+        <p:txBody>
+          <a:bodyPr wrap="square" lIns="0" tIns="0" rIns="0" bIns="0" rtlCol="0" anchor="t"/>
+          <a:lstStyle/>
+          <a:p>
+            <a:pPr marL="342900" indent="-342900">
+              <a:spcAft>
+                <a:spcPts val="700"/>
+              </a:spcAft>
+              <a:buSzPct val="100000"/>
+              <a:buChar char="•"/>
             </a:pPr>
             <a:r>
               <a:rPr lang="en-US" sz="1250" dirty="0">
@@ -3491,7 +3302,91 @@
                 <a:ea typeface="Calibri" pitchFamily="34" charset="-122"/>
                 <a:cs typeface="Calibri" pitchFamily="34" charset="-120"/>
               </a:rPr>
-              <a:t>Rule 3 — read trustworthy and data_gaps, and name the uncertainty</a:t>
+              <a:t>Grounded — every number appears in tool_results</a:t>
+            </a:r>
+            <a:endParaRPr lang="en-US" sz="1250" dirty="0"/>
+          </a:p>
+          <a:p>
+            <a:pPr marL="342900" indent="-342900">
+              <a:spcAft>
+                <a:spcPts val="700"/>
+              </a:spcAft>
+              <a:buSzPct val="100000"/>
+              <a:buChar char="•"/>
+            </a:pPr>
+            <a:r>
+              <a:rPr lang="en-US" sz="1250" dirty="0">
+                <a:solidFill>
+                  <a:srgbClr val="1B3239"/>
+                </a:solidFill>
+                <a:latin typeface="Calibri" pitchFamily="34" charset="0"/>
+                <a:ea typeface="Calibri" pitchFamily="34" charset="-122"/>
+                <a:cs typeface="Calibri" pitchFamily="34" charset="-120"/>
+              </a:rPr>
+              <a:t>Trend, not point</a:t>
+            </a:r>
+            <a:endParaRPr lang="en-US" sz="1250" dirty="0"/>
+          </a:p>
+          <a:p>
+            <a:pPr marL="342900" indent="-342900">
+              <a:spcAft>
+                <a:spcPts val="700"/>
+              </a:spcAft>
+              <a:buSzPct val="100000"/>
+              <a:buChar char="•"/>
+            </a:pPr>
+            <a:r>
+              <a:rPr lang="en-US" sz="1250" dirty="0">
+                <a:solidFill>
+                  <a:srgbClr val="1B3239"/>
+                </a:solidFill>
+                <a:latin typeface="Calibri" pitchFamily="34" charset="0"/>
+                <a:ea typeface="Calibri" pitchFamily="34" charset="-122"/>
+                <a:cs typeface="Calibri" pitchFamily="34" charset="-120"/>
+              </a:rPr>
+              <a:t>Exactly one action, and it names its driver</a:t>
+            </a:r>
+            <a:endParaRPr lang="en-US" sz="1250" dirty="0"/>
+          </a:p>
+          <a:p>
+            <a:pPr marL="342900" indent="-342900">
+              <a:spcAft>
+                <a:spcPts val="700"/>
+              </a:spcAft>
+              <a:buSzPct val="100000"/>
+              <a:buChar char="•"/>
+            </a:pPr>
+            <a:r>
+              <a:rPr lang="en-US" sz="1250" dirty="0">
+                <a:solidFill>
+                  <a:srgbClr val="1B3239"/>
+                </a:solidFill>
+                <a:latin typeface="Calibri" pitchFamily="34" charset="0"/>
+                <a:ea typeface="Calibri" pitchFamily="34" charset="-122"/>
+                <a:cs typeface="Calibri" pitchFamily="34" charset="-120"/>
+              </a:rPr>
+              <a:t>Uncertainty named, not hedged</a:t>
+            </a:r>
+            <a:endParaRPr lang="en-US" sz="1250" dirty="0"/>
+          </a:p>
+          <a:p>
+            <a:pPr marL="342900" indent="-342900">
+              <a:spcAft>
+                <a:spcPts val="700"/>
+              </a:spcAft>
+              <a:buSzPct val="100000"/>
+              <a:buChar char="•"/>
+            </a:pPr>
+            <a:r>
+              <a:rPr lang="en-US" sz="1250" dirty="0">
+                <a:solidFill>
+                  <a:srgbClr val="1B3239"/>
+                </a:solidFill>
+                <a:latin typeface="Calibri" pitchFamily="34" charset="0"/>
+                <a:ea typeface="Calibri" pitchFamily="34" charset="-122"/>
+                <a:cs typeface="Calibri" pitchFamily="34" charset="-120"/>
+              </a:rPr>
+              <a:t>No medical or invented-feature overreach</a:t>
             </a:r>
             <a:endParaRPr lang="en-US" sz="1250" dirty="0"/>
           </a:p>
@@ -3505,107 +3400,16 @@
         </p:nvSpPr>
         <p:spPr>
           <a:xfrm>
-            <a:off x="640080" y="2651760"/>
-            <a:ext cx="5257800" cy="896112"/>
+            <a:off x="640080" y="3794760"/>
+            <a:ext cx="3429000" cy="868680"/>
           </a:xfrm>
           <a:prstGeom prst="roundRect">
             <a:avLst>
-              <a:gd name="adj" fmla="val 9184"/>
+              <a:gd name="adj" fmla="val 9474"/>
             </a:avLst>
           </a:prstGeom>
           <a:solidFill>
-            <a:srgbClr val="F1F6F6"/>
-          </a:solidFill>
-          <a:ln w="12700">
-            <a:solidFill>
-              <a:srgbClr val="F1F6F6"/>
-            </a:solidFill>
-            <a:prstDash val="solid"/>
-          </a:ln>
-        </p:spPr>
-      </p:sp>
-      <p:sp>
-        <p:nvSpPr>
-          <p:cNvPr id="12" name="Text 10"/>
-          <p:cNvSpPr txBox="1"/>
-          <p:nvPr/>
-        </p:nvSpPr>
-        <p:spPr>
-          <a:xfrm>
-            <a:off x="914400" y="2724912"/>
-            <a:ext cx="4709160" cy="749808"/>
-          </a:xfrm>
-          <a:prstGeom prst="rect">
-            <a:avLst/>
-          </a:prstGeom>
-          <a:noFill/>
-          <a:ln/>
-        </p:spPr>
-        <p:txBody>
-          <a:bodyPr wrap="square" lIns="0" tIns="0" rIns="0" bIns="0" rtlCol="0" anchor="ctr"/>
-          <a:lstStyle/>
-          <a:p>
-            <a:pPr indent="0" marL="0">
-              <a:buNone/>
-            </a:pPr>
-            <a:r>
-              <a:rPr lang="en-US" sz="1250" dirty="0">
-                <a:solidFill>
-                  <a:srgbClr val="1B3239"/>
-                </a:solidFill>
-                <a:latin typeface="Calibri" pitchFamily="34" charset="0"/>
-                <a:ea typeface="Calibri" pitchFamily="34" charset="-122"/>
-                <a:cs typeface="Calibri" pitchFamily="34" charset="-120"/>
-              </a:rPr>
-              <a:t>“Listen to your body” — plausible, ungrounded, no single action</a:t>
-            </a:r>
-            <a:endParaRPr lang="en-US" sz="1250" dirty="0"/>
-          </a:p>
-        </p:txBody>
-      </p:sp>
-      <p:sp>
-        <p:nvSpPr>
-          <p:cNvPr id="13" name="Shape 11"/>
-          <p:cNvSpPr/>
-          <p:nvPr/>
-        </p:nvSpPr>
-        <p:spPr>
-          <a:xfrm>
-            <a:off x="6007608" y="3026664"/>
-            <a:ext cx="256032" cy="137160"/>
-          </a:xfrm>
-          <a:prstGeom prst="rightArrow">
-            <a:avLst/>
-          </a:prstGeom>
-          <a:solidFill>
-            <a:srgbClr val="00A896"/>
-          </a:solidFill>
-          <a:ln w="12700">
-            <a:solidFill>
-              <a:srgbClr val="00A896"/>
-            </a:solidFill>
-            <a:prstDash val="solid"/>
-          </a:ln>
-        </p:spPr>
-      </p:sp>
-      <p:sp>
-        <p:nvSpPr>
-          <p:cNvPr id="14" name="Shape 12"/>
-          <p:cNvSpPr/>
-          <p:nvPr/>
-        </p:nvSpPr>
-        <p:spPr>
-          <a:xfrm>
-            <a:off x="6263640" y="2651760"/>
-            <a:ext cx="5257800" cy="896112"/>
-          </a:xfrm>
-          <a:prstGeom prst="roundRect">
-            <a:avLst>
-              <a:gd name="adj" fmla="val 9184"/>
-            </a:avLst>
-          </a:prstGeom>
-          <a:solidFill>
-            <a:srgbClr val="FFFFFF"/>
+            <a:srgbClr val="E3EDEE"/>
           </a:solidFill>
           <a:ln w="12700">
             <a:solidFill>
@@ -3613,41 +3417,34 @@
             </a:solidFill>
             <a:prstDash val="solid"/>
           </a:ln>
-          <a:effectLst>
-            <a:outerShdw sx="100000" sy="100000" kx="0" ky="0" algn="bl" rotWithShape="0" blurRad="127000" dist="25400" dir="5400000">
-              <a:srgbClr val="0D2B33">
-                <a:alpha val="10000"/>
-              </a:srgbClr>
-            </a:outerShdw>
-          </a:effectLst>
-        </p:spPr>
-      </p:sp>
-      <p:sp>
-        <p:nvSpPr>
-          <p:cNvPr id="15" name="Text 13"/>
-          <p:cNvSpPr txBox="1"/>
-          <p:nvPr/>
-        </p:nvSpPr>
-        <p:spPr>
-          <a:xfrm>
-            <a:off x="6537960" y="2724912"/>
-            <a:ext cx="4709160" cy="749808"/>
-          </a:xfrm>
-          <a:prstGeom prst="rect">
-            <a:avLst/>
-          </a:prstGeom>
-          <a:noFill/>
-          <a:ln/>
-        </p:spPr>
-        <p:txBody>
-          <a:bodyPr wrap="square" lIns="0" tIns="0" rIns="0" bIns="0" rtlCol="0" anchor="ctr"/>
-          <a:lstStyle/>
-          <a:p>
-            <a:pPr indent="0" marL="0">
-              <a:buNone/>
-            </a:pPr>
-            <a:r>
-              <a:rPr lang="en-US" sz="1250" dirty="0">
+        </p:spPr>
+      </p:sp>
+      <p:sp>
+        <p:nvSpPr>
+          <p:cNvPr id="12" name="Text 10"/>
+          <p:cNvSpPr txBox="1"/>
+          <p:nvPr/>
+        </p:nvSpPr>
+        <p:spPr>
+          <a:xfrm>
+            <a:off x="914400" y="3904488"/>
+            <a:ext cx="2880360" cy="274320"/>
+          </a:xfrm>
+          <a:prstGeom prst="rect">
+            <a:avLst/>
+          </a:prstGeom>
+          <a:noFill/>
+          <a:ln/>
+        </p:spPr>
+        <p:txBody>
+          <a:bodyPr wrap="square" lIns="0" tIns="0" rIns="0" bIns="0" rtlCol="0" anchor="ctr"/>
+          <a:lstStyle/>
+          <a:p>
+            <a:pPr indent="0" marL="0">
+              <a:buNone/>
+            </a:pPr>
+            <a:r>
+              <a:rPr lang="en-US" sz="1300" b="1" dirty="0">
                 <a:solidFill>
                   <a:srgbClr val="1B3239"/>
                 </a:solidFill>
@@ -3655,121 +3452,69 @@
                 <a:ea typeface="Calibri" pitchFamily="34" charset="-122"/>
                 <a:cs typeface="Calibri" pitchFamily="34" charset="-120"/>
               </a:rPr>
-              <a:t>The readiness rubric, plus Rule 4 — exactly one action, and name its driver</a:t>
-            </a:r>
-            <a:endParaRPr lang="en-US" sz="1250" dirty="0"/>
-          </a:p>
-        </p:txBody>
-      </p:sp>
-      <p:sp>
-        <p:nvSpPr>
-          <p:cNvPr id="16" name="Shape 14"/>
+              <a:t>Length bias</a:t>
+            </a:r>
+            <a:endParaRPr lang="en-US" sz="1300" dirty="0"/>
+          </a:p>
+        </p:txBody>
+      </p:sp>
+      <p:sp>
+        <p:nvSpPr>
+          <p:cNvPr id="13" name="Text 11"/>
+          <p:cNvSpPr txBox="1"/>
+          <p:nvPr/>
+        </p:nvSpPr>
+        <p:spPr>
+          <a:xfrm>
+            <a:off x="914400" y="4169664"/>
+            <a:ext cx="2880360" cy="274320"/>
+          </a:xfrm>
+          <a:prstGeom prst="rect">
+            <a:avLst/>
+          </a:prstGeom>
+          <a:noFill/>
+          <a:ln/>
+        </p:spPr>
+        <p:txBody>
+          <a:bodyPr wrap="square" lIns="0" tIns="0" rIns="0" bIns="0" rtlCol="0" anchor="ctr"/>
+          <a:lstStyle/>
+          <a:p>
+            <a:pPr indent="0" marL="0">
+              <a:buNone/>
+            </a:pPr>
+            <a:r>
+              <a:rPr lang="en-US" sz="1150" dirty="0">
+                <a:solidFill>
+                  <a:srgbClr val="5F7A80"/>
+                </a:solidFill>
+                <a:latin typeface="Calibri" pitchFamily="34" charset="0"/>
+                <a:ea typeface="Calibri" pitchFamily="34" charset="-122"/>
+                <a:cs typeface="Calibri" pitchFamily="34" charset="-120"/>
+              </a:rPr>
+              <a:t>longer scores higher</a:t>
+            </a:r>
+            <a:endParaRPr lang="en-US" sz="1150" dirty="0"/>
+          </a:p>
+        </p:txBody>
+      </p:sp>
+      <p:sp>
+        <p:nvSpPr>
+          <p:cNvPr id="14" name="Shape 12"/>
           <p:cNvSpPr/>
           <p:nvPr/>
         </p:nvSpPr>
         <p:spPr>
           <a:xfrm>
-            <a:off x="640080" y="3675888"/>
-            <a:ext cx="5257800" cy="896112"/>
+            <a:off x="4325112" y="3794760"/>
+            <a:ext cx="3429000" cy="868680"/>
           </a:xfrm>
           <a:prstGeom prst="roundRect">
             <a:avLst>
-              <a:gd name="adj" fmla="val 9184"/>
+              <a:gd name="adj" fmla="val 9474"/>
             </a:avLst>
           </a:prstGeom>
           <a:solidFill>
-            <a:srgbClr val="F1F6F6"/>
-          </a:solidFill>
-          <a:ln w="12700">
-            <a:solidFill>
-              <a:srgbClr val="F1F6F6"/>
-            </a:solidFill>
-            <a:prstDash val="solid"/>
-          </a:ln>
-        </p:spPr>
-      </p:sp>
-      <p:sp>
-        <p:nvSpPr>
-          <p:cNvPr id="17" name="Text 15"/>
-          <p:cNvSpPr txBox="1"/>
-          <p:nvPr/>
-        </p:nvSpPr>
-        <p:spPr>
-          <a:xfrm>
-            <a:off x="914400" y="3749040"/>
-            <a:ext cx="4709160" cy="749808"/>
-          </a:xfrm>
-          <a:prstGeom prst="rect">
-            <a:avLst/>
-          </a:prstGeom>
-          <a:noFill/>
-          <a:ln/>
-        </p:spPr>
-        <p:txBody>
-          <a:bodyPr wrap="square" lIns="0" tIns="0" rIns="0" bIns="0" rtlCol="0" anchor="ctr"/>
-          <a:lstStyle/>
-          <a:p>
-            <a:pPr indent="0" marL="0">
-              <a:buNone/>
-            </a:pPr>
-            <a:r>
-              <a:rPr lang="en-US" sz="1250" dirty="0">
-                <a:solidFill>
-                  <a:srgbClr val="1B3239"/>
-                </a:solidFill>
-                <a:latin typeface="Calibri" pitchFamily="34" charset="0"/>
-                <a:ea typeface="Calibri" pitchFamily="34" charset="-122"/>
-                <a:cs typeface="Calibri" pitchFamily="34" charset="-120"/>
-              </a:rPr>
-              <a:t>Coached on chest tightness</a:t>
-            </a:r>
-            <a:endParaRPr lang="en-US" sz="1250" dirty="0"/>
-          </a:p>
-        </p:txBody>
-      </p:sp>
-      <p:sp>
-        <p:nvSpPr>
-          <p:cNvPr id="18" name="Shape 16"/>
-          <p:cNvSpPr/>
-          <p:nvPr/>
-        </p:nvSpPr>
-        <p:spPr>
-          <a:xfrm>
-            <a:off x="6007608" y="4050792"/>
-            <a:ext cx="256032" cy="137160"/>
-          </a:xfrm>
-          <a:prstGeom prst="rightArrow">
-            <a:avLst/>
-          </a:prstGeom>
-          <a:solidFill>
-            <a:srgbClr val="00A896"/>
-          </a:solidFill>
-          <a:ln w="12700">
-            <a:solidFill>
-              <a:srgbClr val="00A896"/>
-            </a:solidFill>
-            <a:prstDash val="solid"/>
-          </a:ln>
-        </p:spPr>
-      </p:sp>
-      <p:sp>
-        <p:nvSpPr>
-          <p:cNvPr id="19" name="Shape 17"/>
-          <p:cNvSpPr/>
-          <p:nvPr/>
-        </p:nvSpPr>
-        <p:spPr>
-          <a:xfrm>
-            <a:off x="6263640" y="3675888"/>
-            <a:ext cx="5257800" cy="896112"/>
-          </a:xfrm>
-          <a:prstGeom prst="roundRect">
-            <a:avLst>
-              <a:gd name="adj" fmla="val 9184"/>
-            </a:avLst>
-          </a:prstGeom>
-          <a:solidFill>
-            <a:srgbClr val="FFFFFF"/>
+            <a:srgbClr val="E3EDEE"/>
           </a:solidFill>
           <a:ln w="12700">
             <a:solidFill>
@@ -3777,41 +3522,34 @@
             </a:solidFill>
             <a:prstDash val="solid"/>
           </a:ln>
-          <a:effectLst>
-            <a:outerShdw sx="100000" sy="100000" kx="0" ky="0" algn="bl" rotWithShape="0" blurRad="127000" dist="25400" dir="5400000">
-              <a:srgbClr val="0D2B33">
-                <a:alpha val="10000"/>
-              </a:srgbClr>
-            </a:outerShdw>
-          </a:effectLst>
-        </p:spPr>
-      </p:sp>
-      <p:sp>
-        <p:nvSpPr>
-          <p:cNvPr id="20" name="Text 18"/>
-          <p:cNvSpPr txBox="1"/>
-          <p:nvPr/>
-        </p:nvSpPr>
-        <p:spPr>
-          <a:xfrm>
-            <a:off x="6537960" y="3749040"/>
-            <a:ext cx="4709160" cy="749808"/>
-          </a:xfrm>
-          <a:prstGeom prst="rect">
-            <a:avLst/>
-          </a:prstGeom>
-          <a:noFill/>
-          <a:ln/>
-        </p:spPr>
-        <p:txBody>
-          <a:bodyPr wrap="square" lIns="0" tIns="0" rIns="0" bIns="0" rtlCol="0" anchor="ctr"/>
-          <a:lstStyle/>
-          <a:p>
-            <a:pPr indent="0" marL="0">
-              <a:buNone/>
-            </a:pPr>
-            <a:r>
-              <a:rPr lang="en-US" sz="1250" dirty="0">
+        </p:spPr>
+      </p:sp>
+      <p:sp>
+        <p:nvSpPr>
+          <p:cNvPr id="15" name="Text 13"/>
+          <p:cNvSpPr txBox="1"/>
+          <p:nvPr/>
+        </p:nvSpPr>
+        <p:spPr>
+          <a:xfrm>
+            <a:off x="4599432" y="3904488"/>
+            <a:ext cx="2880360" cy="274320"/>
+          </a:xfrm>
+          <a:prstGeom prst="rect">
+            <a:avLst/>
+          </a:prstGeom>
+          <a:noFill/>
+          <a:ln/>
+        </p:spPr>
+        <p:txBody>
+          <a:bodyPr wrap="square" lIns="0" tIns="0" rIns="0" bIns="0" rtlCol="0" anchor="ctr"/>
+          <a:lstStyle/>
+          <a:p>
+            <a:pPr indent="0" marL="0">
+              <a:buNone/>
+            </a:pPr>
+            <a:r>
+              <a:rPr lang="en-US" sz="1300" b="1" dirty="0">
                 <a:solidFill>
                   <a:srgbClr val="1B3239"/>
                 </a:solidFill>
@@ -3819,26 +3557,170 @@
                 <a:ea typeface="Calibri" pitchFamily="34" charset="-122"/>
                 <a:cs typeface="Calibri" pitchFamily="34" charset="-120"/>
               </a:rPr>
-              <a:t>Rule 5 — escalate, and give no training guidance at all</a:t>
-            </a:r>
-            <a:endParaRPr lang="en-US" sz="1250" dirty="0"/>
-          </a:p>
-        </p:txBody>
-      </p:sp>
-      <p:sp>
-        <p:nvSpPr>
-          <p:cNvPr id="21" name="Shape 19"/>
+              <a:t>Position bias</a:t>
+            </a:r>
+            <a:endParaRPr lang="en-US" sz="1300" dirty="0"/>
+          </a:p>
+        </p:txBody>
+      </p:sp>
+      <p:sp>
+        <p:nvSpPr>
+          <p:cNvPr id="16" name="Text 14"/>
+          <p:cNvSpPr txBox="1"/>
+          <p:nvPr/>
+        </p:nvSpPr>
+        <p:spPr>
+          <a:xfrm>
+            <a:off x="4599432" y="4169664"/>
+            <a:ext cx="2880360" cy="274320"/>
+          </a:xfrm>
+          <a:prstGeom prst="rect">
+            <a:avLst/>
+          </a:prstGeom>
+          <a:noFill/>
+          <a:ln/>
+        </p:spPr>
+        <p:txBody>
+          <a:bodyPr wrap="square" lIns="0" tIns="0" rIns="0" bIns="0" rtlCol="0" anchor="ctr"/>
+          <a:lstStyle/>
+          <a:p>
+            <a:pPr indent="0" marL="0">
+              <a:buNone/>
+            </a:pPr>
+            <a:r>
+              <a:rPr lang="en-US" sz="1150" dirty="0">
+                <a:solidFill>
+                  <a:srgbClr val="5F7A80"/>
+                </a:solidFill>
+                <a:latin typeface="Calibri" pitchFamily="34" charset="0"/>
+                <a:ea typeface="Calibri" pitchFamily="34" charset="-122"/>
+                <a:cs typeface="Calibri" pitchFamily="34" charset="-120"/>
+              </a:rPr>
+              <a:t>first scores higher</a:t>
+            </a:r>
+            <a:endParaRPr lang="en-US" sz="1150" dirty="0"/>
+          </a:p>
+        </p:txBody>
+      </p:sp>
+      <p:sp>
+        <p:nvSpPr>
+          <p:cNvPr id="17" name="Shape 15"/>
           <p:cNvSpPr/>
           <p:nvPr/>
         </p:nvSpPr>
         <p:spPr>
           <a:xfrm>
-            <a:off x="640080" y="4846320"/>
-            <a:ext cx="10881360" cy="1051560"/>
+            <a:off x="8010144" y="3794760"/>
+            <a:ext cx="3429000" cy="868680"/>
           </a:xfrm>
           <a:prstGeom prst="roundRect">
             <a:avLst>
-              <a:gd name="adj" fmla="val 7826"/>
+              <a:gd name="adj" fmla="val 9474"/>
+            </a:avLst>
+          </a:prstGeom>
+          <a:solidFill>
+            <a:srgbClr val="E3EDEE"/>
+          </a:solidFill>
+          <a:ln w="12700">
+            <a:solidFill>
+              <a:srgbClr val="E3EDEE"/>
+            </a:solidFill>
+            <a:prstDash val="solid"/>
+          </a:ln>
+        </p:spPr>
+      </p:sp>
+      <p:sp>
+        <p:nvSpPr>
+          <p:cNvPr id="18" name="Text 16"/>
+          <p:cNvSpPr txBox="1"/>
+          <p:nvPr/>
+        </p:nvSpPr>
+        <p:spPr>
+          <a:xfrm>
+            <a:off x="8284464" y="3904488"/>
+            <a:ext cx="2880360" cy="274320"/>
+          </a:xfrm>
+          <a:prstGeom prst="rect">
+            <a:avLst/>
+          </a:prstGeom>
+          <a:noFill/>
+          <a:ln/>
+        </p:spPr>
+        <p:txBody>
+          <a:bodyPr wrap="square" lIns="0" tIns="0" rIns="0" bIns="0" rtlCol="0" anchor="ctr"/>
+          <a:lstStyle/>
+          <a:p>
+            <a:pPr indent="0" marL="0">
+              <a:buNone/>
+            </a:pPr>
+            <a:r>
+              <a:rPr lang="en-US" sz="1300" b="1" dirty="0">
+                <a:solidFill>
+                  <a:srgbClr val="1B3239"/>
+                </a:solidFill>
+                <a:latin typeface="Calibri" pitchFamily="34" charset="0"/>
+                <a:ea typeface="Calibri" pitchFamily="34" charset="-122"/>
+                <a:cs typeface="Calibri" pitchFamily="34" charset="-120"/>
+              </a:rPr>
+              <a:t>Narcissism bias</a:t>
+            </a:r>
+            <a:endParaRPr lang="en-US" sz="1300" dirty="0"/>
+          </a:p>
+        </p:txBody>
+      </p:sp>
+      <p:sp>
+        <p:nvSpPr>
+          <p:cNvPr id="19" name="Text 17"/>
+          <p:cNvSpPr txBox="1"/>
+          <p:nvPr/>
+        </p:nvSpPr>
+        <p:spPr>
+          <a:xfrm>
+            <a:off x="8284464" y="4169664"/>
+            <a:ext cx="2880360" cy="274320"/>
+          </a:xfrm>
+          <a:prstGeom prst="rect">
+            <a:avLst/>
+          </a:prstGeom>
+          <a:noFill/>
+          <a:ln/>
+        </p:spPr>
+        <p:txBody>
+          <a:bodyPr wrap="square" lIns="0" tIns="0" rIns="0" bIns="0" rtlCol="0" anchor="ctr"/>
+          <a:lstStyle/>
+          <a:p>
+            <a:pPr indent="0" marL="0">
+              <a:buNone/>
+            </a:pPr>
+            <a:r>
+              <a:rPr lang="en-US" sz="1150" dirty="0">
+                <a:solidFill>
+                  <a:srgbClr val="5F7A80"/>
+                </a:solidFill>
+                <a:latin typeface="Calibri" pitchFamily="34" charset="0"/>
+                <a:ea typeface="Calibri" pitchFamily="34" charset="-122"/>
+                <a:cs typeface="Calibri" pitchFamily="34" charset="-120"/>
+              </a:rPr>
+              <a:t>its own family scores higher</a:t>
+            </a:r>
+            <a:endParaRPr lang="en-US" sz="1150" dirty="0"/>
+          </a:p>
+        </p:txBody>
+      </p:sp>
+      <p:sp>
+        <p:nvSpPr>
+          <p:cNvPr id="20" name="Shape 18"/>
+          <p:cNvSpPr/>
+          <p:nvPr/>
+        </p:nvSpPr>
+        <p:spPr>
+          <a:xfrm>
+            <a:off x="640080" y="4937760"/>
+            <a:ext cx="10881360" cy="960120"/>
+          </a:xfrm>
+          <a:prstGeom prst="roundRect">
+            <a:avLst>
+              <a:gd name="adj" fmla="val 8571"/>
             </a:avLst>
           </a:prstGeom>
           <a:solidFill>
@@ -3854,469 +3736,40 @@
       </p:sp>
       <p:sp>
         <p:nvSpPr>
-          <p:cNvPr id="22" name="Text 20"/>
-          <p:cNvSpPr txBox="1"/>
-          <p:nvPr/>
-        </p:nvSpPr>
-        <p:spPr>
-          <a:xfrm>
-            <a:off x="960120" y="4983480"/>
-            <a:ext cx="1691640" cy="256032"/>
-          </a:xfrm>
-          <a:prstGeom prst="rect">
-            <a:avLst/>
-          </a:prstGeom>
-          <a:noFill/>
-          <a:ln/>
-        </p:spPr>
-        <p:txBody>
-          <a:bodyPr wrap="square" lIns="0" tIns="0" rIns="0" bIns="0" rtlCol="0" anchor="ctr"/>
-          <a:lstStyle/>
-          <a:p>
-            <a:pPr indent="0" marL="0">
-              <a:buNone/>
-            </a:pPr>
-            <a:r>
-              <a:rPr lang="en-US" sz="1050" dirty="0">
-                <a:solidFill>
-                  <a:srgbClr val="9FB8BD"/>
-                </a:solidFill>
-                <a:latin typeface="Calibri" pitchFamily="34" charset="0"/>
-                <a:ea typeface="Calibri" pitchFamily="34" charset="-122"/>
-                <a:cs typeface="Calibri" pitchFamily="34" charset="-120"/>
-              </a:rPr>
-              <a:t>tool_correct</a:t>
-            </a:r>
-            <a:endParaRPr lang="en-US" sz="1050" dirty="0"/>
-          </a:p>
-        </p:txBody>
-      </p:sp>
-      <p:sp>
-        <p:nvSpPr>
-          <p:cNvPr id="23" name="Text 21"/>
-          <p:cNvSpPr txBox="1"/>
-          <p:nvPr/>
-        </p:nvSpPr>
-        <p:spPr>
-          <a:xfrm>
-            <a:off x="960120" y="5257800"/>
-            <a:ext cx="1691640" cy="329184"/>
-          </a:xfrm>
-          <a:prstGeom prst="rect">
-            <a:avLst/>
-          </a:prstGeom>
-          <a:noFill/>
-          <a:ln/>
-        </p:spPr>
-        <p:txBody>
-          <a:bodyPr wrap="square" lIns="0" tIns="0" rIns="0" bIns="0" rtlCol="0" anchor="ctr"/>
-          <a:lstStyle/>
-          <a:p>
-            <a:pPr indent="0" marL="0">
-              <a:buNone/>
-            </a:pPr>
-            <a:r>
-              <a:rPr lang="en-US" sz="1400" b="1" dirty="0">
-                <a:solidFill>
-                  <a:srgbClr val="00A896"/>
-                </a:solidFill>
-                <a:latin typeface="Courier New" pitchFamily="34" charset="0"/>
-                <a:ea typeface="Courier New" pitchFamily="34" charset="-122"/>
-                <a:cs typeface="Courier New" pitchFamily="34" charset="-120"/>
-              </a:rPr>
-              <a:t>v1 → v2</a:t>
-            </a:r>
-            <a:endParaRPr lang="en-US" sz="1400" dirty="0"/>
-          </a:p>
-        </p:txBody>
-      </p:sp>
-      <p:sp>
-        <p:nvSpPr>
-          <p:cNvPr id="24" name="Text 22"/>
-          <p:cNvSpPr txBox="1"/>
-          <p:nvPr/>
-        </p:nvSpPr>
-        <p:spPr>
-          <a:xfrm>
-            <a:off x="2734056" y="4983480"/>
-            <a:ext cx="1691640" cy="256032"/>
-          </a:xfrm>
-          <a:prstGeom prst="rect">
-            <a:avLst/>
-          </a:prstGeom>
-          <a:noFill/>
-          <a:ln/>
-        </p:spPr>
-        <p:txBody>
-          <a:bodyPr wrap="square" lIns="0" tIns="0" rIns="0" bIns="0" rtlCol="0" anchor="ctr"/>
-          <a:lstStyle/>
-          <a:p>
-            <a:pPr indent="0" marL="0">
-              <a:buNone/>
-            </a:pPr>
-            <a:r>
-              <a:rPr lang="en-US" sz="1050" dirty="0">
-                <a:solidFill>
-                  <a:srgbClr val="9FB8BD"/>
-                </a:solidFill>
-                <a:latin typeface="Calibri" pitchFamily="34" charset="0"/>
-                <a:ea typeface="Calibri" pitchFamily="34" charset="-122"/>
-                <a:cs typeface="Calibri" pitchFamily="34" charset="-120"/>
-              </a:rPr>
-              <a:t>value_match</a:t>
-            </a:r>
-            <a:endParaRPr lang="en-US" sz="1050" dirty="0"/>
-          </a:p>
-        </p:txBody>
-      </p:sp>
-      <p:sp>
-        <p:nvSpPr>
-          <p:cNvPr id="25" name="Text 23"/>
-          <p:cNvSpPr txBox="1"/>
-          <p:nvPr/>
-        </p:nvSpPr>
-        <p:spPr>
-          <a:xfrm>
-            <a:off x="2734056" y="5257800"/>
-            <a:ext cx="1691640" cy="329184"/>
-          </a:xfrm>
-          <a:prstGeom prst="rect">
-            <a:avLst/>
-          </a:prstGeom>
-          <a:noFill/>
-          <a:ln/>
-        </p:spPr>
-        <p:txBody>
-          <a:bodyPr wrap="square" lIns="0" tIns="0" rIns="0" bIns="0" rtlCol="0" anchor="ctr"/>
-          <a:lstStyle/>
-          <a:p>
-            <a:pPr indent="0" marL="0">
-              <a:buNone/>
-            </a:pPr>
-            <a:r>
-              <a:rPr lang="en-US" sz="1400" b="1" dirty="0">
-                <a:solidFill>
-                  <a:srgbClr val="00A896"/>
-                </a:solidFill>
-                <a:latin typeface="Courier New" pitchFamily="34" charset="0"/>
-                <a:ea typeface="Courier New" pitchFamily="34" charset="-122"/>
-                <a:cs typeface="Courier New" pitchFamily="34" charset="-120"/>
-              </a:rPr>
-              <a:t>v1 → v2</a:t>
-            </a:r>
-            <a:endParaRPr lang="en-US" sz="1400" dirty="0"/>
-          </a:p>
-        </p:txBody>
-      </p:sp>
-      <p:sp>
-        <p:nvSpPr>
-          <p:cNvPr id="26" name="Text 24"/>
-          <p:cNvSpPr txBox="1"/>
-          <p:nvPr/>
-        </p:nvSpPr>
-        <p:spPr>
-          <a:xfrm>
-            <a:off x="4507992" y="4983480"/>
-            <a:ext cx="1691640" cy="256032"/>
-          </a:xfrm>
-          <a:prstGeom prst="rect">
-            <a:avLst/>
-          </a:prstGeom>
-          <a:noFill/>
-          <a:ln/>
-        </p:spPr>
-        <p:txBody>
-          <a:bodyPr wrap="square" lIns="0" tIns="0" rIns="0" bIns="0" rtlCol="0" anchor="ctr"/>
-          <a:lstStyle/>
-          <a:p>
-            <a:pPr indent="0" marL="0">
-              <a:buNone/>
-            </a:pPr>
-            <a:r>
-              <a:rPr lang="en-US" sz="1050" dirty="0">
-                <a:solidFill>
-                  <a:srgbClr val="9FB8BD"/>
-                </a:solidFill>
-                <a:latin typeface="Calibri" pitchFamily="34" charset="0"/>
-                <a:ea typeface="Calibri" pitchFamily="34" charset="-122"/>
-                <a:cs typeface="Calibri" pitchFamily="34" charset="-120"/>
-              </a:rPr>
-              <a:t>judge_score</a:t>
-            </a:r>
-            <a:endParaRPr lang="en-US" sz="1050" dirty="0"/>
-          </a:p>
-        </p:txBody>
-      </p:sp>
-      <p:sp>
-        <p:nvSpPr>
-          <p:cNvPr id="27" name="Text 25"/>
-          <p:cNvSpPr txBox="1"/>
-          <p:nvPr/>
-        </p:nvSpPr>
-        <p:spPr>
-          <a:xfrm>
-            <a:off x="4507992" y="5257800"/>
-            <a:ext cx="1691640" cy="329184"/>
-          </a:xfrm>
-          <a:prstGeom prst="rect">
-            <a:avLst/>
-          </a:prstGeom>
-          <a:noFill/>
-          <a:ln/>
-        </p:spPr>
-        <p:txBody>
-          <a:bodyPr wrap="square" lIns="0" tIns="0" rIns="0" bIns="0" rtlCol="0" anchor="ctr"/>
-          <a:lstStyle/>
-          <a:p>
-            <a:pPr indent="0" marL="0">
-              <a:buNone/>
-            </a:pPr>
-            <a:r>
-              <a:rPr lang="en-US" sz="1400" b="1" dirty="0">
-                <a:solidFill>
-                  <a:srgbClr val="00A896"/>
-                </a:solidFill>
-                <a:latin typeface="Courier New" pitchFamily="34" charset="0"/>
-                <a:ea typeface="Courier New" pitchFamily="34" charset="-122"/>
-                <a:cs typeface="Courier New" pitchFamily="34" charset="-120"/>
-              </a:rPr>
-              <a:t>v1 → v2</a:t>
-            </a:r>
-            <a:endParaRPr lang="en-US" sz="1400" dirty="0"/>
-          </a:p>
-        </p:txBody>
-      </p:sp>
-      <p:sp>
-        <p:nvSpPr>
-          <p:cNvPr id="28" name="Text 26"/>
-          <p:cNvSpPr txBox="1"/>
-          <p:nvPr/>
-        </p:nvSpPr>
-        <p:spPr>
-          <a:xfrm>
-            <a:off x="6281928" y="4983480"/>
-            <a:ext cx="1691640" cy="256032"/>
-          </a:xfrm>
-          <a:prstGeom prst="rect">
-            <a:avLst/>
-          </a:prstGeom>
-          <a:noFill/>
-          <a:ln/>
-        </p:spPr>
-        <p:txBody>
-          <a:bodyPr wrap="square" lIns="0" tIns="0" rIns="0" bIns="0" rtlCol="0" anchor="ctr"/>
-          <a:lstStyle/>
-          <a:p>
-            <a:pPr indent="0" marL="0">
-              <a:buNone/>
-            </a:pPr>
-            <a:r>
-              <a:rPr lang="en-US" sz="1050" dirty="0">
-                <a:solidFill>
-                  <a:srgbClr val="9FB8BD"/>
-                </a:solidFill>
-                <a:latin typeface="Calibri" pitchFamily="34" charset="0"/>
-                <a:ea typeface="Calibri" pitchFamily="34" charset="-122"/>
-                <a:cs typeface="Calibri" pitchFamily="34" charset="-120"/>
-              </a:rPr>
-              <a:t>escalated</a:t>
-            </a:r>
-            <a:endParaRPr lang="en-US" sz="1050" dirty="0"/>
-          </a:p>
-        </p:txBody>
-      </p:sp>
-      <p:sp>
-        <p:nvSpPr>
-          <p:cNvPr id="29" name="Text 27"/>
-          <p:cNvSpPr txBox="1"/>
-          <p:nvPr/>
-        </p:nvSpPr>
-        <p:spPr>
-          <a:xfrm>
-            <a:off x="6281928" y="5257800"/>
-            <a:ext cx="1691640" cy="329184"/>
-          </a:xfrm>
-          <a:prstGeom prst="rect">
-            <a:avLst/>
-          </a:prstGeom>
-          <a:noFill/>
-          <a:ln/>
-        </p:spPr>
-        <p:txBody>
-          <a:bodyPr wrap="square" lIns="0" tIns="0" rIns="0" bIns="0" rtlCol="0" anchor="ctr"/>
-          <a:lstStyle/>
-          <a:p>
-            <a:pPr indent="0" marL="0">
-              <a:buNone/>
-            </a:pPr>
-            <a:r>
-              <a:rPr lang="en-US" sz="1400" b="1" dirty="0">
-                <a:solidFill>
-                  <a:srgbClr val="00A896"/>
-                </a:solidFill>
-                <a:latin typeface="Courier New" pitchFamily="34" charset="0"/>
-                <a:ea typeface="Courier New" pitchFamily="34" charset="-122"/>
-                <a:cs typeface="Courier New" pitchFamily="34" charset="-120"/>
-              </a:rPr>
-              <a:t>v1 → v2</a:t>
-            </a:r>
-            <a:endParaRPr lang="en-US" sz="1400" dirty="0"/>
-          </a:p>
-        </p:txBody>
-      </p:sp>
-      <p:sp>
-        <p:nvSpPr>
-          <p:cNvPr id="30" name="Text 28"/>
-          <p:cNvSpPr txBox="1"/>
-          <p:nvPr/>
-        </p:nvSpPr>
-        <p:spPr>
-          <a:xfrm>
-            <a:off x="8055864" y="4983480"/>
-            <a:ext cx="1691640" cy="256032"/>
-          </a:xfrm>
-          <a:prstGeom prst="rect">
-            <a:avLst/>
-          </a:prstGeom>
-          <a:noFill/>
-          <a:ln/>
-        </p:spPr>
-        <p:txBody>
-          <a:bodyPr wrap="square" lIns="0" tIns="0" rIns="0" bIns="0" rtlCol="0" anchor="ctr"/>
-          <a:lstStyle/>
-          <a:p>
-            <a:pPr indent="0" marL="0">
-              <a:buNone/>
-            </a:pPr>
-            <a:r>
-              <a:rPr lang="en-US" sz="1050" dirty="0">
-                <a:solidFill>
-                  <a:srgbClr val="9FB8BD"/>
-                </a:solidFill>
-                <a:latin typeface="Calibri" pitchFamily="34" charset="0"/>
-                <a:ea typeface="Calibri" pitchFamily="34" charset="-122"/>
-                <a:cs typeface="Calibri" pitchFamily="34" charset="-120"/>
-              </a:rPr>
-              <a:t>cost / run</a:t>
-            </a:r>
-            <a:endParaRPr lang="en-US" sz="1050" dirty="0"/>
-          </a:p>
-        </p:txBody>
-      </p:sp>
-      <p:sp>
-        <p:nvSpPr>
-          <p:cNvPr id="31" name="Text 29"/>
-          <p:cNvSpPr txBox="1"/>
-          <p:nvPr/>
-        </p:nvSpPr>
-        <p:spPr>
-          <a:xfrm>
-            <a:off x="8055864" y="5257800"/>
-            <a:ext cx="1691640" cy="329184"/>
-          </a:xfrm>
-          <a:prstGeom prst="rect">
-            <a:avLst/>
-          </a:prstGeom>
-          <a:noFill/>
-          <a:ln/>
-        </p:spPr>
-        <p:txBody>
-          <a:bodyPr wrap="square" lIns="0" tIns="0" rIns="0" bIns="0" rtlCol="0" anchor="ctr"/>
-          <a:lstStyle/>
-          <a:p>
-            <a:pPr indent="0" marL="0">
-              <a:buNone/>
-            </a:pPr>
-            <a:r>
-              <a:rPr lang="en-US" sz="1400" b="1" dirty="0">
-                <a:solidFill>
-                  <a:srgbClr val="00A896"/>
-                </a:solidFill>
-                <a:latin typeface="Courier New" pitchFamily="34" charset="0"/>
-                <a:ea typeface="Courier New" pitchFamily="34" charset="-122"/>
-                <a:cs typeface="Courier New" pitchFamily="34" charset="-120"/>
-              </a:rPr>
-              <a:t>v1 → v2</a:t>
-            </a:r>
-            <a:endParaRPr lang="en-US" sz="1400" dirty="0"/>
-          </a:p>
-        </p:txBody>
-      </p:sp>
-      <p:sp>
-        <p:nvSpPr>
-          <p:cNvPr id="32" name="Text 30"/>
-          <p:cNvSpPr txBox="1"/>
-          <p:nvPr/>
-        </p:nvSpPr>
-        <p:spPr>
-          <a:xfrm>
-            <a:off x="9829800" y="4983480"/>
-            <a:ext cx="1691640" cy="256032"/>
-          </a:xfrm>
-          <a:prstGeom prst="rect">
-            <a:avLst/>
-          </a:prstGeom>
-          <a:noFill/>
-          <a:ln/>
-        </p:spPr>
-        <p:txBody>
-          <a:bodyPr wrap="square" lIns="0" tIns="0" rIns="0" bIns="0" rtlCol="0" anchor="ctr"/>
-          <a:lstStyle/>
-          <a:p>
-            <a:pPr indent="0" marL="0">
-              <a:buNone/>
-            </a:pPr>
-            <a:r>
-              <a:rPr lang="en-US" sz="1050" dirty="0">
-                <a:solidFill>
-                  <a:srgbClr val="9FB8BD"/>
-                </a:solidFill>
-                <a:latin typeface="Calibri" pitchFamily="34" charset="0"/>
-                <a:ea typeface="Calibri" pitchFamily="34" charset="-122"/>
-                <a:cs typeface="Calibri" pitchFamily="34" charset="-120"/>
-              </a:rPr>
-              <a:t>p50 latency</a:t>
-            </a:r>
-            <a:endParaRPr lang="en-US" sz="1050" dirty="0"/>
-          </a:p>
-        </p:txBody>
-      </p:sp>
-      <p:sp>
-        <p:nvSpPr>
-          <p:cNvPr id="33" name="Text 31"/>
-          <p:cNvSpPr txBox="1"/>
-          <p:nvPr/>
-        </p:nvSpPr>
-        <p:spPr>
-          <a:xfrm>
-            <a:off x="9829800" y="5257800"/>
-            <a:ext cx="1691640" cy="329184"/>
-          </a:xfrm>
-          <a:prstGeom prst="rect">
-            <a:avLst/>
-          </a:prstGeom>
-          <a:noFill/>
-          <a:ln/>
-        </p:spPr>
-        <p:txBody>
-          <a:bodyPr wrap="square" lIns="0" tIns="0" rIns="0" bIns="0" rtlCol="0" anchor="ctr"/>
-          <a:lstStyle/>
-          <a:p>
-            <a:pPr indent="0" marL="0">
-              <a:buNone/>
-            </a:pPr>
-            <a:r>
-              <a:rPr lang="en-US" sz="1400" b="1" dirty="0">
-                <a:solidFill>
-                  <a:srgbClr val="00A896"/>
-                </a:solidFill>
-                <a:latin typeface="Courier New" pitchFamily="34" charset="0"/>
-                <a:ea typeface="Courier New" pitchFamily="34" charset="-122"/>
-                <a:cs typeface="Courier New" pitchFamily="34" charset="-120"/>
-              </a:rPr>
-              <a:t>v1 → v2</a:t>
-            </a:r>
-            <a:endParaRPr lang="en-US" sz="1400" dirty="0"/>
+          <p:cNvPr id="21" name="Text 19"/>
+          <p:cNvSpPr txBox="1"/>
+          <p:nvPr/>
+        </p:nvSpPr>
+        <p:spPr>
+          <a:xfrm>
+            <a:off x="1005840" y="5074920"/>
+            <a:ext cx="10149840" cy="713232"/>
+          </a:xfrm>
+          <a:prstGeom prst="rect">
+            <a:avLst/>
+          </a:prstGeom>
+          <a:noFill/>
+          <a:ln/>
+        </p:spPr>
+        <p:txBody>
+          <a:bodyPr wrap="square" lIns="0" tIns="0" rIns="0" bIns="0" rtlCol="0" anchor="ctr"/>
+          <a:lstStyle/>
+          <a:p>
+            <a:pPr indent="0" marL="0">
+              <a:buNone/>
+            </a:pPr>
+            <a:r>
+              <a:rPr lang="en-US" sz="1300" dirty="0">
+                <a:solidFill>
+                  <a:srgbClr val="FFFFFF"/>
+                </a:solidFill>
+                <a:latin typeface="Calibri" pitchFamily="34" charset="0"/>
+                <a:ea typeface="Calibri" pitchFamily="34" charset="-122"/>
+                <a:cs typeface="Calibri" pitchFamily="34" charset="-120"/>
+              </a:rPr>
+              <a:t>So record judge_length_words next to judge_score. If your quality metric correlates with word count, the judge is measuring the wrong thing — and you can see it in one scatter plot.</a:t>
+            </a:r>
+            <a:endParaRPr lang="en-US" sz="1300" dirty="0"/>
           </a:p>
         </p:txBody>
       </p:sp>
@@ -4378,7 +3831,7 @@
                 <a:ea typeface="Calibri" pitchFamily="34" charset="-122"/>
                 <a:cs typeface="Calibri" pitchFamily="34" charset="-120"/>
               </a:rPr>
-              <a:t>HONESTY</a:t>
+              <a:t>THE ITERATION</a:t>
             </a:r>
             <a:endParaRPr lang="en-US" sz="1100" dirty="0"/>
           </a:p>
@@ -4417,7 +3870,7 @@
                 <a:ea typeface="Cambria" pitchFamily="34" charset="-122"/>
                 <a:cs typeface="Cambria" pitchFamily="34" charset="-120"/>
               </a:rPr>
-              <a:t>What did not move, and why</a:t>
+              <a:t>Every change traces to a failure you watched</a:t>
             </a:r>
             <a:endParaRPr lang="en-US" sz="3200" dirty="0"/>
           </a:p>
@@ -4425,18 +3878,96 @@
       </p:sp>
       <p:sp>
         <p:nvSpPr>
-          <p:cNvPr id="4" name="Shape 2"/>
+          <p:cNvPr id="4" name="Text 2"/>
+          <p:cNvSpPr txBox="1"/>
+          <p:nvPr/>
+        </p:nvSpPr>
+        <p:spPr>
+          <a:xfrm>
+            <a:off x="914400" y="1280160"/>
+            <a:ext cx="4754880" cy="237744"/>
+          </a:xfrm>
+          <a:prstGeom prst="rect">
+            <a:avLst/>
+          </a:prstGeom>
+          <a:noFill/>
+          <a:ln/>
+        </p:spPr>
+        <p:txBody>
+          <a:bodyPr wrap="square" lIns="0" tIns="0" rIns="0" bIns="0" rtlCol="0" anchor="ctr"/>
+          <a:lstStyle/>
+          <a:p>
+            <a:pPr indent="0" marL="0">
+              <a:buNone/>
+            </a:pPr>
+            <a:r>
+              <a:rPr lang="en-US" sz="950" b="1" spc="120" kern="0" dirty="0">
+                <a:solidFill>
+                  <a:srgbClr val="E08A3C"/>
+                </a:solidFill>
+                <a:latin typeface="Calibri" pitchFamily="34" charset="0"/>
+                <a:ea typeface="Calibri" pitchFamily="34" charset="-122"/>
+                <a:cs typeface="Calibri" pitchFamily="34" charset="-120"/>
+              </a:rPr>
+              <a:t>OBSERVED IN THE v1 RUN</a:t>
+            </a:r>
+            <a:endParaRPr lang="en-US" sz="950" dirty="0"/>
+          </a:p>
+        </p:txBody>
+      </p:sp>
+      <p:sp>
+        <p:nvSpPr>
+          <p:cNvPr id="5" name="Text 3"/>
+          <p:cNvSpPr txBox="1"/>
+          <p:nvPr/>
+        </p:nvSpPr>
+        <p:spPr>
+          <a:xfrm>
+            <a:off x="6537960" y="1280160"/>
+            <a:ext cx="4754880" cy="237744"/>
+          </a:xfrm>
+          <a:prstGeom prst="rect">
+            <a:avLst/>
+          </a:prstGeom>
+          <a:noFill/>
+          <a:ln/>
+        </p:spPr>
+        <p:txBody>
+          <a:bodyPr wrap="square" lIns="0" tIns="0" rIns="0" bIns="0" rtlCol="0" anchor="ctr"/>
+          <a:lstStyle/>
+          <a:p>
+            <a:pPr indent="0" marL="0">
+              <a:buNone/>
+            </a:pPr>
+            <a:r>
+              <a:rPr lang="en-US" sz="950" b="1" spc="120" kern="0" dirty="0">
+                <a:solidFill>
+                  <a:srgbClr val="00A896"/>
+                </a:solidFill>
+                <a:latin typeface="Calibri" pitchFamily="34" charset="0"/>
+                <a:ea typeface="Calibri" pitchFamily="34" charset="-122"/>
+                <a:cs typeface="Calibri" pitchFamily="34" charset="-120"/>
+              </a:rPr>
+              <a:t>CHANGED IN v2</a:t>
+            </a:r>
+            <a:endParaRPr lang="en-US" sz="950" dirty="0"/>
+          </a:p>
+        </p:txBody>
+      </p:sp>
+      <p:sp>
+        <p:nvSpPr>
+          <p:cNvPr id="6" name="Shape 4"/>
           <p:cNvSpPr/>
           <p:nvPr/>
         </p:nvSpPr>
         <p:spPr>
           <a:xfrm>
-            <a:off x="640080" y="1371600"/>
-            <a:ext cx="10881360" cy="1188720"/>
+            <a:off x="640080" y="1572768"/>
+            <a:ext cx="5257800" cy="548640"/>
           </a:xfrm>
           <a:prstGeom prst="roundRect">
             <a:avLst>
-              <a:gd name="adj" fmla="val 6923"/>
+              <a:gd name="adj" fmla="val 15000"/>
             </a:avLst>
           </a:prstGeom>
           <a:solidFill>
@@ -4452,16 +3983,875 @@
       </p:sp>
       <p:sp>
         <p:nvSpPr>
-          <p:cNvPr id="5" name="Shape 3"/>
+          <p:cNvPr id="7" name="Text 5"/>
+          <p:cNvSpPr txBox="1"/>
+          <p:nvPr/>
+        </p:nvSpPr>
+        <p:spPr>
+          <a:xfrm>
+            <a:off x="914400" y="1572768"/>
+            <a:ext cx="4709160" cy="548640"/>
+          </a:xfrm>
+          <a:prstGeom prst="rect">
+            <a:avLst/>
+          </a:prstGeom>
+          <a:noFill/>
+          <a:ln/>
+        </p:spPr>
+        <p:txBody>
+          <a:bodyPr wrap="square" lIns="0" tIns="0" rIns="0" bIns="0" rtlCol="0" anchor="ctr"/>
+          <a:lstStyle/>
+          <a:p>
+            <a:pPr indent="0" marL="0">
+              <a:buNone/>
+            </a:pPr>
+            <a:r>
+              <a:rPr lang="en-US" sz="1150" dirty="0">
+                <a:solidFill>
+                  <a:srgbClr val="1B3239"/>
+                </a:solidFill>
+                <a:latin typeface="Calibri" pitchFamily="34" charset="0"/>
+                <a:ea typeface="Calibri" pitchFamily="34" charset="-122"/>
+                <a:cs typeface="Calibri" pitchFamily="34" charset="-120"/>
+              </a:rPr>
+              <a:t>Asked about tomorrow, answered about today</a:t>
+            </a:r>
+            <a:endParaRPr lang="en-US" sz="1150" dirty="0"/>
+          </a:p>
+        </p:txBody>
+      </p:sp>
+      <p:sp>
+        <p:nvSpPr>
+          <p:cNvPr id="8" name="Shape 6"/>
           <p:cNvSpPr/>
           <p:nvPr/>
         </p:nvSpPr>
         <p:spPr>
           <a:xfrm>
-            <a:off x="960120" y="1737360"/>
-            <a:ext cx="457200" cy="457200"/>
-          </a:xfrm>
-          <a:prstGeom prst="ellipse">
+            <a:off x="6007608" y="1783080"/>
+            <a:ext cx="237744" cy="128016"/>
+          </a:xfrm>
+          <a:prstGeom prst="rightArrow">
+            <a:avLst/>
+          </a:prstGeom>
+          <a:solidFill>
+            <a:srgbClr val="00A896"/>
+          </a:solidFill>
+          <a:ln w="12700">
+            <a:solidFill>
+              <a:srgbClr val="00A896"/>
+            </a:solidFill>
+            <a:prstDash val="solid"/>
+          </a:ln>
+        </p:spPr>
+      </p:sp>
+      <p:sp>
+        <p:nvSpPr>
+          <p:cNvPr id="9" name="Shape 7"/>
+          <p:cNvSpPr/>
+          <p:nvPr/>
+        </p:nvSpPr>
+        <p:spPr>
+          <a:xfrm>
+            <a:off x="6263640" y="1572768"/>
+            <a:ext cx="5257800" cy="548640"/>
+          </a:xfrm>
+          <a:prstGeom prst="roundRect">
+            <a:avLst>
+              <a:gd name="adj" fmla="val 15000"/>
+            </a:avLst>
+          </a:prstGeom>
+          <a:solidFill>
+            <a:srgbClr val="FFFFFF"/>
+          </a:solidFill>
+          <a:ln w="12700">
+            <a:solidFill>
+              <a:srgbClr val="E3EDEE"/>
+            </a:solidFill>
+            <a:prstDash val="solid"/>
+          </a:ln>
+          <a:effectLst>
+            <a:outerShdw sx="100000" sy="100000" kx="0" ky="0" algn="bl" rotWithShape="0" blurRad="127000" dist="25400" dir="5400000">
+              <a:srgbClr val="0D2B33">
+                <a:alpha val="10000"/>
+              </a:srgbClr>
+            </a:outerShdw>
+          </a:effectLst>
+        </p:spPr>
+      </p:sp>
+      <p:sp>
+        <p:nvSpPr>
+          <p:cNvPr id="10" name="Text 8"/>
+          <p:cNvSpPr txBox="1"/>
+          <p:nvPr/>
+        </p:nvSpPr>
+        <p:spPr>
+          <a:xfrm>
+            <a:off x="6537960" y="1572768"/>
+            <a:ext cx="4709160" cy="548640"/>
+          </a:xfrm>
+          <a:prstGeom prst="rect">
+            <a:avLst/>
+          </a:prstGeom>
+          <a:noFill/>
+          <a:ln/>
+        </p:spPr>
+        <p:txBody>
+          <a:bodyPr wrap="square" lIns="0" tIns="0" rIns="0" bIns="0" rtlCol="0" anchor="ctr"/>
+          <a:lstStyle/>
+          <a:p>
+            <a:pPr indent="0" marL="0">
+              <a:buNone/>
+            </a:pPr>
+            <a:r>
+              <a:rPr lang="en-US" sz="1150" dirty="0">
+                <a:solidFill>
+                  <a:srgbClr val="1B3239"/>
+                </a:solidFill>
+                <a:latin typeface="Calibri" pitchFamily="34" charset="0"/>
+                <a:ea typeface="Calibri" pitchFamily="34" charset="-122"/>
+                <a:cs typeface="Calibri" pitchFamily="34" charset="-120"/>
+              </a:rPr>
+              <a:t>The readiness rubric — reason recovery hours against the day in question</a:t>
+            </a:r>
+            <a:endParaRPr lang="en-US" sz="1150" dirty="0"/>
+          </a:p>
+        </p:txBody>
+      </p:sp>
+      <p:sp>
+        <p:nvSpPr>
+          <p:cNvPr id="11" name="Shape 9"/>
+          <p:cNvSpPr/>
+          <p:nvPr/>
+        </p:nvSpPr>
+        <p:spPr>
+          <a:xfrm>
+            <a:off x="640080" y="2212848"/>
+            <a:ext cx="5257800" cy="548640"/>
+          </a:xfrm>
+          <a:prstGeom prst="roundRect">
+            <a:avLst>
+              <a:gd name="adj" fmla="val 15000"/>
+            </a:avLst>
+          </a:prstGeom>
+          <a:solidFill>
+            <a:srgbClr val="F1F6F6"/>
+          </a:solidFill>
+          <a:ln w="12700">
+            <a:solidFill>
+              <a:srgbClr val="F1F6F6"/>
+            </a:solidFill>
+            <a:prstDash val="solid"/>
+          </a:ln>
+        </p:spPr>
+      </p:sp>
+      <p:sp>
+        <p:nvSpPr>
+          <p:cNvPr id="12" name="Text 10"/>
+          <p:cNvSpPr txBox="1"/>
+          <p:nvPr/>
+        </p:nvSpPr>
+        <p:spPr>
+          <a:xfrm>
+            <a:off x="914400" y="2212848"/>
+            <a:ext cx="4709160" cy="548640"/>
+          </a:xfrm>
+          <a:prstGeom prst="rect">
+            <a:avLst/>
+          </a:prstGeom>
+          <a:noFill/>
+          <a:ln/>
+        </p:spPr>
+        <p:txBody>
+          <a:bodyPr wrap="square" lIns="0" tIns="0" rIns="0" bIns="0" rtlCol="0" anchor="ctr"/>
+          <a:lstStyle/>
+          <a:p>
+            <a:pPr indent="0" marL="0">
+              <a:buNone/>
+            </a:pPr>
+            <a:r>
+              <a:rPr lang="en-US" sz="1150" dirty="0">
+                <a:solidFill>
+                  <a:srgbClr val="1B3239"/>
+                </a:solidFill>
+                <a:latin typeface="Calibri" pitchFamily="34" charset="0"/>
+                <a:ea typeface="Calibri" pitchFamily="34" charset="-122"/>
+                <a:cs typeface="Calibri" pitchFamily="34" charset="-120"/>
+              </a:rPr>
+              <a:t>Three alternatives, no decision</a:t>
+            </a:r>
+            <a:endParaRPr lang="en-US" sz="1150" dirty="0"/>
+          </a:p>
+        </p:txBody>
+      </p:sp>
+      <p:sp>
+        <p:nvSpPr>
+          <p:cNvPr id="13" name="Shape 11"/>
+          <p:cNvSpPr/>
+          <p:nvPr/>
+        </p:nvSpPr>
+        <p:spPr>
+          <a:xfrm>
+            <a:off x="6007608" y="2423160"/>
+            <a:ext cx="237744" cy="128016"/>
+          </a:xfrm>
+          <a:prstGeom prst="rightArrow">
+            <a:avLst/>
+          </a:prstGeom>
+          <a:solidFill>
+            <a:srgbClr val="00A896"/>
+          </a:solidFill>
+          <a:ln w="12700">
+            <a:solidFill>
+              <a:srgbClr val="00A896"/>
+            </a:solidFill>
+            <a:prstDash val="solid"/>
+          </a:ln>
+        </p:spPr>
+      </p:sp>
+      <p:sp>
+        <p:nvSpPr>
+          <p:cNvPr id="14" name="Shape 12"/>
+          <p:cNvSpPr/>
+          <p:nvPr/>
+        </p:nvSpPr>
+        <p:spPr>
+          <a:xfrm>
+            <a:off x="6263640" y="2212848"/>
+            <a:ext cx="5257800" cy="548640"/>
+          </a:xfrm>
+          <a:prstGeom prst="roundRect">
+            <a:avLst>
+              <a:gd name="adj" fmla="val 15000"/>
+            </a:avLst>
+          </a:prstGeom>
+          <a:solidFill>
+            <a:srgbClr val="FFFFFF"/>
+          </a:solidFill>
+          <a:ln w="12700">
+            <a:solidFill>
+              <a:srgbClr val="E3EDEE"/>
+            </a:solidFill>
+            <a:prstDash val="solid"/>
+          </a:ln>
+          <a:effectLst>
+            <a:outerShdw sx="100000" sy="100000" kx="0" ky="0" algn="bl" rotWithShape="0" blurRad="127000" dist="25400" dir="5400000">
+              <a:srgbClr val="0D2B33">
+                <a:alpha val="10000"/>
+              </a:srgbClr>
+            </a:outerShdw>
+          </a:effectLst>
+        </p:spPr>
+      </p:sp>
+      <p:sp>
+        <p:nvSpPr>
+          <p:cNvPr id="15" name="Text 13"/>
+          <p:cNvSpPr txBox="1"/>
+          <p:nvPr/>
+        </p:nvSpPr>
+        <p:spPr>
+          <a:xfrm>
+            <a:off x="6537960" y="2212848"/>
+            <a:ext cx="4709160" cy="548640"/>
+          </a:xfrm>
+          <a:prstGeom prst="rect">
+            <a:avLst/>
+          </a:prstGeom>
+          <a:noFill/>
+          <a:ln/>
+        </p:spPr>
+        <p:txBody>
+          <a:bodyPr wrap="square" lIns="0" tIns="0" rIns="0" bIns="0" rtlCol="0" anchor="ctr"/>
+          <a:lstStyle/>
+          <a:p>
+            <a:pPr indent="0" marL="0">
+              <a:buNone/>
+            </a:pPr>
+            <a:r>
+              <a:rPr lang="en-US" sz="1150" dirty="0">
+                <a:solidFill>
+                  <a:srgbClr val="1B3239"/>
+                </a:solidFill>
+                <a:latin typeface="Calibri" pitchFamily="34" charset="0"/>
+                <a:ea typeface="Calibri" pitchFamily="34" charset="-122"/>
+                <a:cs typeface="Calibri" pitchFamily="34" charset="-120"/>
+              </a:rPr>
+              <a:t>Rule 4 — exactly one action, and name its driver</a:t>
+            </a:r>
+            <a:endParaRPr lang="en-US" sz="1150" dirty="0"/>
+          </a:p>
+        </p:txBody>
+      </p:sp>
+      <p:sp>
+        <p:nvSpPr>
+          <p:cNvPr id="16" name="Shape 14"/>
+          <p:cNvSpPr/>
+          <p:nvPr/>
+        </p:nvSpPr>
+        <p:spPr>
+          <a:xfrm>
+            <a:off x="640080" y="2852928"/>
+            <a:ext cx="5257800" cy="548640"/>
+          </a:xfrm>
+          <a:prstGeom prst="roundRect">
+            <a:avLst>
+              <a:gd name="adj" fmla="val 15000"/>
+            </a:avLst>
+          </a:prstGeom>
+          <a:solidFill>
+            <a:srgbClr val="F1F6F6"/>
+          </a:solidFill>
+          <a:ln w="12700">
+            <a:solidFill>
+              <a:srgbClr val="F1F6F6"/>
+            </a:solidFill>
+            <a:prstDash val="solid"/>
+          </a:ln>
+        </p:spPr>
+      </p:sp>
+      <p:sp>
+        <p:nvSpPr>
+          <p:cNvPr id="17" name="Text 15"/>
+          <p:cNvSpPr txBox="1"/>
+          <p:nvPr/>
+        </p:nvSpPr>
+        <p:spPr>
+          <a:xfrm>
+            <a:off x="914400" y="2852928"/>
+            <a:ext cx="4709160" cy="548640"/>
+          </a:xfrm>
+          <a:prstGeom prst="rect">
+            <a:avLst/>
+          </a:prstGeom>
+          <a:noFill/>
+          <a:ln/>
+        </p:spPr>
+        <p:txBody>
+          <a:bodyPr wrap="square" lIns="0" tIns="0" rIns="0" bIns="0" rtlCol="0" anchor="ctr"/>
+          <a:lstStyle/>
+          <a:p>
+            <a:pPr indent="0" marL="0">
+              <a:buNone/>
+            </a:pPr>
+            <a:r>
+              <a:rPr lang="en-US" sz="1150" dirty="0">
+                <a:solidFill>
+                  <a:srgbClr val="1B3239"/>
+                </a:solidFill>
+                <a:latin typeface="Calibri" pitchFamily="34" charset="0"/>
+                <a:ea typeface="Calibri" pitchFamily="34" charset="-122"/>
+                <a:cs typeface="Calibri" pitchFamily="34" charset="-120"/>
+              </a:rPr>
+              <a:t>No readiness rating at all</a:t>
+            </a:r>
+            <a:endParaRPr lang="en-US" sz="1150" dirty="0"/>
+          </a:p>
+        </p:txBody>
+      </p:sp>
+      <p:sp>
+        <p:nvSpPr>
+          <p:cNvPr id="18" name="Shape 16"/>
+          <p:cNvSpPr/>
+          <p:nvPr/>
+        </p:nvSpPr>
+        <p:spPr>
+          <a:xfrm>
+            <a:off x="6007608" y="3063240"/>
+            <a:ext cx="237744" cy="128016"/>
+          </a:xfrm>
+          <a:prstGeom prst="rightArrow">
+            <a:avLst/>
+          </a:prstGeom>
+          <a:solidFill>
+            <a:srgbClr val="00A896"/>
+          </a:solidFill>
+          <a:ln w="12700">
+            <a:solidFill>
+              <a:srgbClr val="00A896"/>
+            </a:solidFill>
+            <a:prstDash val="solid"/>
+          </a:ln>
+        </p:spPr>
+      </p:sp>
+      <p:sp>
+        <p:nvSpPr>
+          <p:cNvPr id="19" name="Shape 17"/>
+          <p:cNvSpPr/>
+          <p:nvPr/>
+        </p:nvSpPr>
+        <p:spPr>
+          <a:xfrm>
+            <a:off x="6263640" y="2852928"/>
+            <a:ext cx="5257800" cy="548640"/>
+          </a:xfrm>
+          <a:prstGeom prst="roundRect">
+            <a:avLst>
+              <a:gd name="adj" fmla="val 15000"/>
+            </a:avLst>
+          </a:prstGeom>
+          <a:solidFill>
+            <a:srgbClr val="FFFFFF"/>
+          </a:solidFill>
+          <a:ln w="12700">
+            <a:solidFill>
+              <a:srgbClr val="E3EDEE"/>
+            </a:solidFill>
+            <a:prstDash val="solid"/>
+          </a:ln>
+          <a:effectLst>
+            <a:outerShdw sx="100000" sy="100000" kx="0" ky="0" algn="bl" rotWithShape="0" blurRad="127000" dist="25400" dir="5400000">
+              <a:srgbClr val="0D2B33">
+                <a:alpha val="10000"/>
+              </a:srgbClr>
+            </a:outerShdw>
+          </a:effectLst>
+        </p:spPr>
+      </p:sp>
+      <p:sp>
+        <p:nvSpPr>
+          <p:cNvPr id="20" name="Text 18"/>
+          <p:cNvSpPr txBox="1"/>
+          <p:nvPr/>
+        </p:nvSpPr>
+        <p:spPr>
+          <a:xfrm>
+            <a:off x="6537960" y="2852928"/>
+            <a:ext cx="4709160" cy="548640"/>
+          </a:xfrm>
+          <a:prstGeom prst="rect">
+            <a:avLst/>
+          </a:prstGeom>
+          <a:noFill/>
+          <a:ln/>
+        </p:spPr>
+        <p:txBody>
+          <a:bodyPr wrap="square" lIns="0" tIns="0" rIns="0" bIns="0" rtlCol="0" anchor="ctr"/>
+          <a:lstStyle/>
+          <a:p>
+            <a:pPr indent="0" marL="0">
+              <a:buNone/>
+            </a:pPr>
+            <a:r>
+              <a:rPr lang="en-US" sz="1150" dirty="0">
+                <a:solidFill>
+                  <a:srgbClr val="1B3239"/>
+                </a:solidFill>
+                <a:latin typeface="Calibri" pitchFamily="34" charset="0"/>
+                <a:ea typeface="Calibri" pitchFamily="34" charset="-122"/>
+                <a:cs typeface="Calibri" pitchFamily="34" charset="-120"/>
+              </a:rPr>
+              <a:t>The rubric's Green / Amber / Red verdict</a:t>
+            </a:r>
+            <a:endParaRPr lang="en-US" sz="1150" dirty="0"/>
+          </a:p>
+        </p:txBody>
+      </p:sp>
+      <p:sp>
+        <p:nvSpPr>
+          <p:cNvPr id="21" name="Shape 19"/>
+          <p:cNvSpPr/>
+          <p:nvPr/>
+        </p:nvSpPr>
+        <p:spPr>
+          <a:xfrm>
+            <a:off x="640080" y="3493008"/>
+            <a:ext cx="5257800" cy="548640"/>
+          </a:xfrm>
+          <a:prstGeom prst="roundRect">
+            <a:avLst>
+              <a:gd name="adj" fmla="val 15000"/>
+            </a:avLst>
+          </a:prstGeom>
+          <a:solidFill>
+            <a:srgbClr val="F1F6F6"/>
+          </a:solidFill>
+          <a:ln w="12700">
+            <a:solidFill>
+              <a:srgbClr val="F1F6F6"/>
+            </a:solidFill>
+            <a:prstDash val="solid"/>
+          </a:ln>
+        </p:spPr>
+      </p:sp>
+      <p:sp>
+        <p:nvSpPr>
+          <p:cNvPr id="22" name="Text 20"/>
+          <p:cNvSpPr txBox="1"/>
+          <p:nvPr/>
+        </p:nvSpPr>
+        <p:spPr>
+          <a:xfrm>
+            <a:off x="914400" y="3493008"/>
+            <a:ext cx="4709160" cy="548640"/>
+          </a:xfrm>
+          <a:prstGeom prst="rect">
+            <a:avLst/>
+          </a:prstGeom>
+          <a:noFill/>
+          <a:ln/>
+        </p:spPr>
+        <p:txBody>
+          <a:bodyPr wrap="square" lIns="0" tIns="0" rIns="0" bIns="0" rtlCol="0" anchor="ctr"/>
+          <a:lstStyle/>
+          <a:p>
+            <a:pPr indent="0" marL="0">
+              <a:buNone/>
+            </a:pPr>
+            <a:r>
+              <a:rPr lang="en-US" sz="1150" dirty="0">
+                <a:solidFill>
+                  <a:srgbClr val="1B3239"/>
+                </a:solidFill>
+                <a:latin typeface="Calibri" pitchFamily="34" charset="0"/>
+                <a:ea typeface="Calibri" pitchFamily="34" charset="-122"/>
+                <a:cs typeface="Calibri" pitchFamily="34" charset="-120"/>
+              </a:rPr>
+              <a:t>Never named the untrustworthy night</a:t>
+            </a:r>
+            <a:endParaRPr lang="en-US" sz="1150" dirty="0"/>
+          </a:p>
+        </p:txBody>
+      </p:sp>
+      <p:sp>
+        <p:nvSpPr>
+          <p:cNvPr id="23" name="Shape 21"/>
+          <p:cNvSpPr/>
+          <p:nvPr/>
+        </p:nvSpPr>
+        <p:spPr>
+          <a:xfrm>
+            <a:off x="6007608" y="3703320"/>
+            <a:ext cx="237744" cy="128016"/>
+          </a:xfrm>
+          <a:prstGeom prst="rightArrow">
+            <a:avLst/>
+          </a:prstGeom>
+          <a:solidFill>
+            <a:srgbClr val="00A896"/>
+          </a:solidFill>
+          <a:ln w="12700">
+            <a:solidFill>
+              <a:srgbClr val="00A896"/>
+            </a:solidFill>
+            <a:prstDash val="solid"/>
+          </a:ln>
+        </p:spPr>
+      </p:sp>
+      <p:sp>
+        <p:nvSpPr>
+          <p:cNvPr id="24" name="Shape 22"/>
+          <p:cNvSpPr/>
+          <p:nvPr/>
+        </p:nvSpPr>
+        <p:spPr>
+          <a:xfrm>
+            <a:off x="6263640" y="3493008"/>
+            <a:ext cx="5257800" cy="548640"/>
+          </a:xfrm>
+          <a:prstGeom prst="roundRect">
+            <a:avLst>
+              <a:gd name="adj" fmla="val 15000"/>
+            </a:avLst>
+          </a:prstGeom>
+          <a:solidFill>
+            <a:srgbClr val="FFFFFF"/>
+          </a:solidFill>
+          <a:ln w="12700">
+            <a:solidFill>
+              <a:srgbClr val="E3EDEE"/>
+            </a:solidFill>
+            <a:prstDash val="solid"/>
+          </a:ln>
+          <a:effectLst>
+            <a:outerShdw sx="100000" sy="100000" kx="0" ky="0" algn="bl" rotWithShape="0" blurRad="127000" dist="25400" dir="5400000">
+              <a:srgbClr val="0D2B33">
+                <a:alpha val="10000"/>
+              </a:srgbClr>
+            </a:outerShdw>
+          </a:effectLst>
+        </p:spPr>
+      </p:sp>
+      <p:sp>
+        <p:nvSpPr>
+          <p:cNvPr id="25" name="Text 23"/>
+          <p:cNvSpPr txBox="1"/>
+          <p:nvPr/>
+        </p:nvSpPr>
+        <p:spPr>
+          <a:xfrm>
+            <a:off x="6537960" y="3493008"/>
+            <a:ext cx="4709160" cy="548640"/>
+          </a:xfrm>
+          <a:prstGeom prst="rect">
+            <a:avLst/>
+          </a:prstGeom>
+          <a:noFill/>
+          <a:ln/>
+        </p:spPr>
+        <p:txBody>
+          <a:bodyPr wrap="square" lIns="0" tIns="0" rIns="0" bIns="0" rtlCol="0" anchor="ctr"/>
+          <a:lstStyle/>
+          <a:p>
+            <a:pPr indent="0" marL="0">
+              <a:buNone/>
+            </a:pPr>
+            <a:r>
+              <a:rPr lang="en-US" sz="1150" dirty="0">
+                <a:solidFill>
+                  <a:srgbClr val="1B3239"/>
+                </a:solidFill>
+                <a:latin typeface="Calibri" pitchFamily="34" charset="0"/>
+                <a:ea typeface="Calibri" pitchFamily="34" charset="-122"/>
+                <a:cs typeface="Calibri" pitchFamily="34" charset="-120"/>
+              </a:rPr>
+              <a:t>Rule 3 — read trustworthy and data_gaps</a:t>
+            </a:r>
+            <a:endParaRPr lang="en-US" sz="1150" dirty="0"/>
+          </a:p>
+        </p:txBody>
+      </p:sp>
+      <p:sp>
+        <p:nvSpPr>
+          <p:cNvPr id="26" name="Shape 24"/>
+          <p:cNvSpPr/>
+          <p:nvPr/>
+        </p:nvSpPr>
+        <p:spPr>
+          <a:xfrm>
+            <a:off x="640080" y="4133088"/>
+            <a:ext cx="5257800" cy="548640"/>
+          </a:xfrm>
+          <a:prstGeom prst="roundRect">
+            <a:avLst>
+              <a:gd name="adj" fmla="val 15000"/>
+            </a:avLst>
+          </a:prstGeom>
+          <a:solidFill>
+            <a:srgbClr val="F1F6F6"/>
+          </a:solidFill>
+          <a:ln w="12700">
+            <a:solidFill>
+              <a:srgbClr val="F1F6F6"/>
+            </a:solidFill>
+            <a:prstDash val="solid"/>
+          </a:ln>
+        </p:spPr>
+      </p:sp>
+      <p:sp>
+        <p:nvSpPr>
+          <p:cNvPr id="27" name="Text 25"/>
+          <p:cNvSpPr txBox="1"/>
+          <p:nvPr/>
+        </p:nvSpPr>
+        <p:spPr>
+          <a:xfrm>
+            <a:off x="914400" y="4133088"/>
+            <a:ext cx="4709160" cy="548640"/>
+          </a:xfrm>
+          <a:prstGeom prst="rect">
+            <a:avLst/>
+          </a:prstGeom>
+          <a:noFill/>
+          <a:ln/>
+        </p:spPr>
+        <p:txBody>
+          <a:bodyPr wrap="square" lIns="0" tIns="0" rIns="0" bIns="0" rtlCol="0" anchor="ctr"/>
+          <a:lstStyle/>
+          <a:p>
+            <a:pPr indent="0" marL="0">
+              <a:buNone/>
+            </a:pPr>
+            <a:r>
+              <a:rPr lang="en-US" sz="1150" dirty="0">
+                <a:solidFill>
+                  <a:srgbClr val="1B3239"/>
+                </a:solidFill>
+                <a:latin typeface="Calibri" pitchFamily="34" charset="0"/>
+                <a:ea typeface="Calibri" pitchFamily="34" charset="-122"/>
+                <a:cs typeface="Calibri" pitchFamily="34" charset="-120"/>
+              </a:rPr>
+              <a:t>Coached on chest tightness</a:t>
+            </a:r>
+            <a:endParaRPr lang="en-US" sz="1150" dirty="0"/>
+          </a:p>
+        </p:txBody>
+      </p:sp>
+      <p:sp>
+        <p:nvSpPr>
+          <p:cNvPr id="28" name="Shape 26"/>
+          <p:cNvSpPr/>
+          <p:nvPr/>
+        </p:nvSpPr>
+        <p:spPr>
+          <a:xfrm>
+            <a:off x="6007608" y="4343400"/>
+            <a:ext cx="237744" cy="128016"/>
+          </a:xfrm>
+          <a:prstGeom prst="rightArrow">
+            <a:avLst/>
+          </a:prstGeom>
+          <a:solidFill>
+            <a:srgbClr val="00A896"/>
+          </a:solidFill>
+          <a:ln w="12700">
+            <a:solidFill>
+              <a:srgbClr val="00A896"/>
+            </a:solidFill>
+            <a:prstDash val="solid"/>
+          </a:ln>
+        </p:spPr>
+      </p:sp>
+      <p:sp>
+        <p:nvSpPr>
+          <p:cNvPr id="29" name="Shape 27"/>
+          <p:cNvSpPr/>
+          <p:nvPr/>
+        </p:nvSpPr>
+        <p:spPr>
+          <a:xfrm>
+            <a:off x="6263640" y="4133088"/>
+            <a:ext cx="5257800" cy="548640"/>
+          </a:xfrm>
+          <a:prstGeom prst="roundRect">
+            <a:avLst>
+              <a:gd name="adj" fmla="val 15000"/>
+            </a:avLst>
+          </a:prstGeom>
+          <a:solidFill>
+            <a:srgbClr val="FFFFFF"/>
+          </a:solidFill>
+          <a:ln w="12700">
+            <a:solidFill>
+              <a:srgbClr val="E3EDEE"/>
+            </a:solidFill>
+            <a:prstDash val="solid"/>
+          </a:ln>
+          <a:effectLst>
+            <a:outerShdw sx="100000" sy="100000" kx="0" ky="0" algn="bl" rotWithShape="0" blurRad="127000" dist="25400" dir="5400000">
+              <a:srgbClr val="0D2B33">
+                <a:alpha val="10000"/>
+              </a:srgbClr>
+            </a:outerShdw>
+          </a:effectLst>
+        </p:spPr>
+      </p:sp>
+      <p:sp>
+        <p:nvSpPr>
+          <p:cNvPr id="30" name="Text 28"/>
+          <p:cNvSpPr txBox="1"/>
+          <p:nvPr/>
+        </p:nvSpPr>
+        <p:spPr>
+          <a:xfrm>
+            <a:off x="6537960" y="4133088"/>
+            <a:ext cx="4709160" cy="548640"/>
+          </a:xfrm>
+          <a:prstGeom prst="rect">
+            <a:avLst/>
+          </a:prstGeom>
+          <a:noFill/>
+          <a:ln/>
+        </p:spPr>
+        <p:txBody>
+          <a:bodyPr wrap="square" lIns="0" tIns="0" rIns="0" bIns="0" rtlCol="0" anchor="ctr"/>
+          <a:lstStyle/>
+          <a:p>
+            <a:pPr indent="0" marL="0">
+              <a:buNone/>
+            </a:pPr>
+            <a:r>
+              <a:rPr lang="en-US" sz="1150" dirty="0">
+                <a:solidFill>
+                  <a:srgbClr val="1B3239"/>
+                </a:solidFill>
+                <a:latin typeface="Calibri" pitchFamily="34" charset="0"/>
+                <a:ea typeface="Calibri" pitchFamily="34" charset="-122"/>
+                <a:cs typeface="Calibri" pitchFamily="34" charset="-120"/>
+              </a:rPr>
+              <a:t>Rule 5 — escalate, no training guidance at all</a:t>
+            </a:r>
+            <a:endParaRPr lang="en-US" sz="1150" dirty="0"/>
+          </a:p>
+        </p:txBody>
+      </p:sp>
+      <p:sp>
+        <p:nvSpPr>
+          <p:cNvPr id="31" name="Shape 29"/>
+          <p:cNvSpPr/>
+          <p:nvPr/>
+        </p:nvSpPr>
+        <p:spPr>
+          <a:xfrm>
+            <a:off x="640080" y="4773168"/>
+            <a:ext cx="5257800" cy="548640"/>
+          </a:xfrm>
+          <a:prstGeom prst="roundRect">
+            <a:avLst>
+              <a:gd name="adj" fmla="val 15000"/>
+            </a:avLst>
+          </a:prstGeom>
+          <a:solidFill>
+            <a:srgbClr val="E3EDEE"/>
+          </a:solidFill>
+          <a:ln w="12700">
+            <a:solidFill>
+              <a:srgbClr val="E3EDEE"/>
+            </a:solidFill>
+            <a:prstDash val="solid"/>
+          </a:ln>
+        </p:spPr>
+      </p:sp>
+      <p:sp>
+        <p:nvSpPr>
+          <p:cNvPr id="32" name="Text 30"/>
+          <p:cNvSpPr txBox="1"/>
+          <p:nvPr/>
+        </p:nvSpPr>
+        <p:spPr>
+          <a:xfrm>
+            <a:off x="914400" y="4773168"/>
+            <a:ext cx="4709160" cy="548640"/>
+          </a:xfrm>
+          <a:prstGeom prst="rect">
+            <a:avLst/>
+          </a:prstGeom>
+          <a:noFill/>
+          <a:ln/>
+        </p:spPr>
+        <p:txBody>
+          <a:bodyPr wrap="square" lIns="0" tIns="0" rIns="0" bIns="0" rtlCol="0" anchor="ctr"/>
+          <a:lstStyle/>
+          <a:p>
+            <a:pPr indent="0" marL="0">
+              <a:buNone/>
+            </a:pPr>
+            <a:r>
+              <a:rPr lang="en-US" sz="1150" b="1" dirty="0">
+                <a:solidFill>
+                  <a:srgbClr val="1B3239"/>
+                </a:solidFill>
+                <a:latin typeface="Calibri" pitchFamily="34" charset="0"/>
+                <a:ea typeface="Calibri" pitchFamily="34" charset="-122"/>
+                <a:cs typeface="Calibri" pitchFamily="34" charset="-120"/>
+              </a:rPr>
+              <a:t>Retried a 422 three times</a:t>
+            </a:r>
+            <a:endParaRPr lang="en-US" sz="1150" dirty="0"/>
+          </a:p>
+        </p:txBody>
+      </p:sp>
+      <p:sp>
+        <p:nvSpPr>
+          <p:cNvPr id="33" name="Shape 31"/>
+          <p:cNvSpPr/>
+          <p:nvPr/>
+        </p:nvSpPr>
+        <p:spPr>
+          <a:xfrm>
+            <a:off x="6007608" y="4983480"/>
+            <a:ext cx="237744" cy="128016"/>
+          </a:xfrm>
+          <a:prstGeom prst="rightArrow">
             <a:avLst/>
           </a:prstGeom>
           <a:solidFill>
@@ -4477,164 +4867,22 @@
       </p:sp>
       <p:sp>
         <p:nvSpPr>
-          <p:cNvPr id="6" name="Text 4"/>
-          <p:cNvSpPr txBox="1"/>
-          <p:nvPr/>
-        </p:nvSpPr>
-        <p:spPr>
-          <a:xfrm>
-            <a:off x="960120" y="1737360"/>
-            <a:ext cx="457200" cy="457200"/>
-          </a:xfrm>
-          <a:prstGeom prst="rect">
-            <a:avLst/>
-          </a:prstGeom>
-          <a:noFill/>
-          <a:ln/>
-        </p:spPr>
-        <p:txBody>
-          <a:bodyPr wrap="square" lIns="0" tIns="0" rIns="0" bIns="0" rtlCol="0" anchor="ctr"/>
-          <a:lstStyle/>
-          <a:p>
-            <a:pPr algn="ctr" indent="0" marL="0">
-              <a:buNone/>
-            </a:pPr>
-            <a:r>
-              <a:rPr lang="en-US" sz="1500" b="1" dirty="0">
-                <a:solidFill>
-                  <a:srgbClr val="FFFFFF"/>
-                </a:solidFill>
-                <a:latin typeface="Cambria" pitchFamily="34" charset="0"/>
-                <a:ea typeface="Cambria" pitchFamily="34" charset="-122"/>
-                <a:cs typeface="Cambria" pitchFamily="34" charset="-120"/>
-              </a:rPr>
-              <a:t>1</a:t>
-            </a:r>
-            <a:endParaRPr lang="en-US" sz="1500" dirty="0"/>
-          </a:p>
-        </p:txBody>
-      </p:sp>
-      <p:sp>
-        <p:nvSpPr>
-          <p:cNvPr id="7" name="Text 5"/>
-          <p:cNvSpPr txBox="1"/>
-          <p:nvPr/>
-        </p:nvSpPr>
-        <p:spPr>
-          <a:xfrm>
-            <a:off x="1600200" y="1536192"/>
-            <a:ext cx="9601200" cy="310896"/>
-          </a:xfrm>
-          <a:prstGeom prst="rect">
-            <a:avLst/>
-          </a:prstGeom>
-          <a:noFill/>
-          <a:ln/>
-        </p:spPr>
-        <p:txBody>
-          <a:bodyPr wrap="square" lIns="0" tIns="0" rIns="0" bIns="0" rtlCol="0" anchor="ctr"/>
-          <a:lstStyle/>
-          <a:p>
-            <a:pPr indent="0" marL="0">
-              <a:buNone/>
-            </a:pPr>
-            <a:r>
-              <a:rPr lang="en-US" sz="1450" b="1" dirty="0">
-                <a:solidFill>
-                  <a:srgbClr val="1B3239"/>
-                </a:solidFill>
-                <a:latin typeface="Calibri" pitchFamily="34" charset="0"/>
-                <a:ea typeface="Calibri" pitchFamily="34" charset="-122"/>
-                <a:cs typeface="Calibri" pitchFamily="34" charset="-120"/>
-              </a:rPr>
-              <a:t>Bucket A barely budges</a:t>
-            </a:r>
-            <a:endParaRPr lang="en-US" sz="1450" dirty="0"/>
-          </a:p>
-        </p:txBody>
-      </p:sp>
-      <p:sp>
-        <p:nvSpPr>
-          <p:cNvPr id="8" name="Text 6"/>
-          <p:cNvSpPr txBox="1"/>
-          <p:nvPr/>
-        </p:nvSpPr>
-        <p:spPr>
-          <a:xfrm>
-            <a:off x="1600200" y="1874520"/>
-            <a:ext cx="9601200" cy="566928"/>
-          </a:xfrm>
-          <a:prstGeom prst="rect">
-            <a:avLst/>
-          </a:prstGeom>
-          <a:noFill/>
-          <a:ln/>
-        </p:spPr>
-        <p:txBody>
-          <a:bodyPr wrap="square" lIns="0" tIns="0" rIns="0" bIns="0" rtlCol="0" anchor="ctr"/>
-          <a:lstStyle/>
-          <a:p>
-            <a:pPr indent="0" marL="0">
-              <a:buNone/>
-            </a:pPr>
-            <a:r>
-              <a:rPr lang="en-US" sz="1250" dirty="0">
-                <a:solidFill>
-                  <a:srgbClr val="5F7A80"/>
-                </a:solidFill>
-                <a:latin typeface="Calibri" pitchFamily="34" charset="0"/>
-                <a:ea typeface="Calibri" pitchFamily="34" charset="-122"/>
-                <a:cs typeface="Calibri" pitchFamily="34" charset="-120"/>
-              </a:rPr>
-              <a:t>It was already passing. Prompt work does not fix retrieval that already works — and if bucket A ever does move, suspect the loader, not the prompt.</a:t>
-            </a:r>
-            <a:endParaRPr lang="en-US" sz="1250" dirty="0"/>
-          </a:p>
-        </p:txBody>
-      </p:sp>
-      <p:sp>
-        <p:nvSpPr>
-          <p:cNvPr id="9" name="Shape 7"/>
+          <p:cNvPr id="34" name="Shape 32"/>
           <p:cNvSpPr/>
           <p:nvPr/>
         </p:nvSpPr>
         <p:spPr>
           <a:xfrm>
-            <a:off x="640080" y="2743200"/>
-            <a:ext cx="10881360" cy="1188720"/>
+            <a:off x="6263640" y="4773168"/>
+            <a:ext cx="5257800" cy="548640"/>
           </a:xfrm>
           <a:prstGeom prst="roundRect">
             <a:avLst>
-              <a:gd name="adj" fmla="val 6923"/>
+              <a:gd name="adj" fmla="val 15000"/>
             </a:avLst>
           </a:prstGeom>
           <a:solidFill>
-            <a:srgbClr val="F1F6F6"/>
-          </a:solidFill>
-          <a:ln w="12700">
-            <a:solidFill>
-              <a:srgbClr val="F1F6F6"/>
-            </a:solidFill>
-            <a:prstDash val="solid"/>
-          </a:ln>
-        </p:spPr>
-      </p:sp>
-      <p:sp>
-        <p:nvSpPr>
-          <p:cNvPr id="10" name="Shape 8"/>
-          <p:cNvSpPr/>
-          <p:nvPr/>
-        </p:nvSpPr>
-        <p:spPr>
-          <a:xfrm>
-            <a:off x="960120" y="3108960"/>
-            <a:ext cx="457200" cy="457200"/>
-          </a:xfrm>
-          <a:prstGeom prst="ellipse">
-            <a:avLst/>
-          </a:prstGeom>
-          <a:solidFill>
-            <a:srgbClr val="E08A3C"/>
+            <a:srgbClr val="FFFFFF"/>
           </a:solidFill>
           <a:ln w="12700">
             <a:solidFill>
@@ -4642,73 +4890,55 @@
             </a:solidFill>
             <a:prstDash val="solid"/>
           </a:ln>
-        </p:spPr>
-      </p:sp>
-      <p:sp>
-        <p:nvSpPr>
-          <p:cNvPr id="11" name="Text 9"/>
-          <p:cNvSpPr txBox="1"/>
-          <p:nvPr/>
-        </p:nvSpPr>
-        <p:spPr>
-          <a:xfrm>
-            <a:off x="960120" y="3108960"/>
-            <a:ext cx="457200" cy="457200"/>
-          </a:xfrm>
-          <a:prstGeom prst="rect">
-            <a:avLst/>
-          </a:prstGeom>
-          <a:noFill/>
-          <a:ln/>
-        </p:spPr>
-        <p:txBody>
-          <a:bodyPr wrap="square" lIns="0" tIns="0" rIns="0" bIns="0" rtlCol="0" anchor="ctr"/>
-          <a:lstStyle/>
-          <a:p>
-            <a:pPr algn="ctr" indent="0" marL="0">
-              <a:buNone/>
-            </a:pPr>
-            <a:r>
-              <a:rPr lang="en-US" sz="1500" b="1" dirty="0">
-                <a:solidFill>
-                  <a:srgbClr val="FFFFFF"/>
-                </a:solidFill>
-                <a:latin typeface="Cambria" pitchFamily="34" charset="0"/>
-                <a:ea typeface="Cambria" pitchFamily="34" charset="-122"/>
-                <a:cs typeface="Cambria" pitchFamily="34" charset="-120"/>
-              </a:rPr>
-              <a:t>2</a:t>
-            </a:r>
-            <a:endParaRPr lang="en-US" sz="1500" dirty="0"/>
-          </a:p>
-        </p:txBody>
-      </p:sp>
-      <p:sp>
-        <p:nvSpPr>
-          <p:cNvPr id="12" name="Text 10"/>
-          <p:cNvSpPr txBox="1"/>
-          <p:nvPr/>
-        </p:nvSpPr>
-        <p:spPr>
-          <a:xfrm>
-            <a:off x="1600200" y="2907792"/>
-            <a:ext cx="9601200" cy="310896"/>
-          </a:xfrm>
-          <a:prstGeom prst="rect">
-            <a:avLst/>
-          </a:prstGeom>
-          <a:noFill/>
-          <a:ln/>
-        </p:spPr>
-        <p:txBody>
-          <a:bodyPr wrap="square" lIns="0" tIns="0" rIns="0" bIns="0" rtlCol="0" anchor="ctr"/>
-          <a:lstStyle/>
-          <a:p>
-            <a:pPr indent="0" marL="0">
-              <a:buNone/>
-            </a:pPr>
-            <a:r>
-              <a:rPr lang="en-US" sz="1450" b="1" dirty="0">
+          <a:effectLst>
+            <a:outerShdw sx="100000" sy="100000" kx="0" ky="0" algn="bl" rotWithShape="0" blurRad="127000" dist="25400" dir="5400000">
+              <a:srgbClr val="0D2B33">
+                <a:alpha val="10000"/>
+              </a:srgbClr>
+            </a:outerShdw>
+          </a:effectLst>
+        </p:spPr>
+      </p:sp>
+      <p:sp>
+        <p:nvSpPr>
+          <p:cNvPr id="35" name="Text 33"/>
+          <p:cNvSpPr txBox="1"/>
+          <p:nvPr/>
+        </p:nvSpPr>
+        <p:spPr>
+          <a:xfrm>
+            <a:off x="6537960" y="4773168"/>
+            <a:ext cx="4709160" cy="548640"/>
+          </a:xfrm>
+          <a:prstGeom prst="rect">
+            <a:avLst/>
+          </a:prstGeom>
+          <a:noFill/>
+          <a:ln/>
+        </p:spPr>
+        <p:txBody>
+          <a:bodyPr wrap="square" lIns="0" tIns="0" rIns="0" bIns="0" rtlCol="0" anchor="ctr"/>
+          <a:lstStyle/>
+          <a:p>
+            <a:pPr indent="0" marL="0">
+              <a:buNone/>
+            </a:pPr>
+            <a:r>
+              <a:rPr lang="en-US" sz="1150" b="1" dirty="0">
+                <a:solidFill>
+                  <a:srgbClr val="E08A3C"/>
+                </a:solidFill>
+                <a:latin typeface="Calibri" pitchFamily="34" charset="0"/>
+                <a:ea typeface="Calibri" pitchFamily="34" charset="-122"/>
+                <a:cs typeface="Calibri" pitchFamily="34" charset="-120"/>
+              </a:rPr>
+              <a:t>Not a prompt change at all</a:t>
+            </a:r>
+            <a:pPr indent="0" marL="0">
+              <a:buNone/>
+            </a:pPr>
+            <a:r>
+              <a:rPr lang="en-US" sz="1150" dirty="0">
                 <a:solidFill>
                   <a:srgbClr val="1B3239"/>
                 </a:solidFill>
@@ -4716,73 +4946,34 @@
                 <a:ea typeface="Calibri" pitchFamily="34" charset="-122"/>
                 <a:cs typeface="Calibri" pitchFamily="34" charset="-120"/>
               </a:rPr>
-              <a:t>Judged scores rise, then plateau near 4</a:t>
-            </a:r>
-            <a:endParaRPr lang="en-US" sz="1450" dirty="0"/>
-          </a:p>
-        </p:txBody>
-      </p:sp>
-      <p:sp>
-        <p:nvSpPr>
-          <p:cNvPr id="13" name="Text 11"/>
-          <p:cNvSpPr txBox="1"/>
-          <p:nvPr/>
-        </p:nvSpPr>
-        <p:spPr>
-          <a:xfrm>
-            <a:off x="1600200" y="3246120"/>
-            <a:ext cx="9601200" cy="566928"/>
-          </a:xfrm>
-          <a:prstGeom prst="rect">
-            <a:avLst/>
-          </a:prstGeom>
-          <a:noFill/>
-          <a:ln/>
-        </p:spPr>
-        <p:txBody>
-          <a:bodyPr wrap="square" lIns="0" tIns="0" rIns="0" bIns="0" rtlCol="0" anchor="ctr"/>
-          <a:lstStyle/>
-          <a:p>
-            <a:pPr indent="0" marL="0">
-              <a:buNone/>
-            </a:pPr>
-            <a:r>
-              <a:rPr lang="en-US" sz="1250" dirty="0">
-                <a:solidFill>
-                  <a:srgbClr val="5F7A80"/>
-                </a:solidFill>
-                <a:latin typeface="Calibri" pitchFamily="34" charset="0"/>
-                <a:ea typeface="Calibri" pitchFamily="34" charset="-122"/>
-                <a:cs typeface="Calibri" pitchFamily="34" charset="-120"/>
-              </a:rPr>
-              <a:t>What is left are the cases where the honest answer is “the data cannot tell you that.” The rubric rewards it. Models resist it.</a:t>
-            </a:r>
-            <a:endParaRPr lang="en-US" sz="1250" dirty="0"/>
-          </a:p>
-        </p:txBody>
-      </p:sp>
-      <p:sp>
-        <p:nvSpPr>
-          <p:cNvPr id="14" name="Shape 12"/>
+              <a:t> — the tool cap, and Never Error</a:t>
+            </a:r>
+            <a:endParaRPr lang="en-US" sz="1150" dirty="0"/>
+          </a:p>
+        </p:txBody>
+      </p:sp>
+      <p:sp>
+        <p:nvSpPr>
+          <p:cNvPr id="36" name="Shape 34"/>
           <p:cNvSpPr/>
           <p:nvPr/>
         </p:nvSpPr>
         <p:spPr>
           <a:xfrm>
-            <a:off x="640080" y="4114800"/>
-            <a:ext cx="10881360" cy="1188720"/>
+            <a:off x="640080" y="5532120"/>
+            <a:ext cx="10881360" cy="868680"/>
           </a:xfrm>
           <a:prstGeom prst="roundRect">
             <a:avLst>
-              <a:gd name="adj" fmla="val 6923"/>
+              <a:gd name="adj" fmla="val 9474"/>
             </a:avLst>
           </a:prstGeom>
           <a:solidFill>
-            <a:srgbClr val="E3EDEE"/>
+            <a:srgbClr val="0D2B33"/>
           </a:solidFill>
           <a:ln w="12700">
             <a:solidFill>
-              <a:srgbClr val="E3EDEE"/>
+              <a:srgbClr val="0D2B33"/>
             </a:solidFill>
             <a:prstDash val="solid"/>
           </a:ln>
@@ -4790,182 +4981,469 @@
       </p:sp>
       <p:sp>
         <p:nvSpPr>
-          <p:cNvPr id="15" name="Shape 13"/>
-          <p:cNvSpPr/>
-          <p:nvPr/>
-        </p:nvSpPr>
-        <p:spPr>
-          <a:xfrm>
-            <a:off x="960120" y="4480560"/>
-            <a:ext cx="457200" cy="457200"/>
-          </a:xfrm>
-          <a:prstGeom prst="ellipse">
-            <a:avLst/>
-          </a:prstGeom>
-          <a:solidFill>
-            <a:srgbClr val="C4455A"/>
-          </a:solidFill>
-          <a:ln w="12700">
-            <a:solidFill>
-              <a:srgbClr val="C4455A"/>
-            </a:solidFill>
-            <a:prstDash val="solid"/>
-          </a:ln>
-        </p:spPr>
-      </p:sp>
-      <p:sp>
-        <p:nvSpPr>
-          <p:cNvPr id="16" name="Text 14"/>
-          <p:cNvSpPr txBox="1"/>
-          <p:nvPr/>
-        </p:nvSpPr>
-        <p:spPr>
-          <a:xfrm>
-            <a:off x="960120" y="4480560"/>
-            <a:ext cx="457200" cy="457200"/>
-          </a:xfrm>
-          <a:prstGeom prst="rect">
-            <a:avLst/>
-          </a:prstGeom>
-          <a:noFill/>
-          <a:ln/>
-        </p:spPr>
-        <p:txBody>
-          <a:bodyPr wrap="square" lIns="0" tIns="0" rIns="0" bIns="0" rtlCol="0" anchor="ctr"/>
-          <a:lstStyle/>
-          <a:p>
-            <a:pPr algn="ctr" indent="0" marL="0">
-              <a:buNone/>
-            </a:pPr>
-            <a:r>
-              <a:rPr lang="en-US" sz="1500" b="1" dirty="0">
-                <a:solidFill>
-                  <a:srgbClr val="FFFFFF"/>
-                </a:solidFill>
-                <a:latin typeface="Cambria" pitchFamily="34" charset="0"/>
-                <a:ea typeface="Cambria" pitchFamily="34" charset="-122"/>
-                <a:cs typeface="Cambria" pitchFamily="34" charset="-120"/>
-              </a:rPr>
-              <a:t>3</a:t>
-            </a:r>
-            <a:endParaRPr lang="en-US" sz="1500" dirty="0"/>
-          </a:p>
-        </p:txBody>
-      </p:sp>
-      <p:sp>
-        <p:nvSpPr>
-          <p:cNvPr id="17" name="Text 15"/>
-          <p:cNvSpPr txBox="1"/>
-          <p:nvPr/>
-        </p:nvSpPr>
-        <p:spPr>
-          <a:xfrm>
-            <a:off x="1600200" y="4279392"/>
-            <a:ext cx="9601200" cy="310896"/>
-          </a:xfrm>
-          <a:prstGeom prst="rect">
-            <a:avLst/>
-          </a:prstGeom>
-          <a:noFill/>
-          <a:ln/>
-        </p:spPr>
-        <p:txBody>
-          <a:bodyPr wrap="square" lIns="0" tIns="0" rIns="0" bIns="0" rtlCol="0" anchor="ctr"/>
-          <a:lstStyle/>
-          <a:p>
-            <a:pPr indent="0" marL="0">
-              <a:buNone/>
-            </a:pPr>
-            <a:r>
-              <a:rPr lang="en-US" sz="1450" b="1" dirty="0">
-                <a:solidFill>
-                  <a:srgbClr val="1B3239"/>
-                </a:solidFill>
-                <a:latin typeface="Calibri" pitchFamily="34" charset="0"/>
-                <a:ea typeface="Calibri" pitchFamily="34" charset="-122"/>
-                <a:cs typeface="Calibri" pitchFamily="34" charset="-120"/>
-              </a:rPr>
-              <a:t>Thirty cases give direction, not significance</a:t>
-            </a:r>
-            <a:endParaRPr lang="en-US" sz="1450" dirty="0"/>
-          </a:p>
-        </p:txBody>
-      </p:sp>
-      <p:sp>
-        <p:nvSpPr>
-          <p:cNvPr id="18" name="Text 16"/>
-          <p:cNvSpPr txBox="1"/>
-          <p:nvPr/>
-        </p:nvSpPr>
-        <p:spPr>
-          <a:xfrm>
-            <a:off x="1600200" y="4617720"/>
-            <a:ext cx="9601200" cy="566928"/>
-          </a:xfrm>
-          <a:prstGeom prst="rect">
-            <a:avLst/>
-          </a:prstGeom>
-          <a:noFill/>
-          <a:ln/>
-        </p:spPr>
-        <p:txBody>
-          <a:bodyPr wrap="square" lIns="0" tIns="0" rIns="0" bIns="0" rtlCol="0" anchor="ctr"/>
-          <a:lstStyle/>
-          <a:p>
-            <a:pPr indent="0" marL="0">
-              <a:buNone/>
-            </a:pPr>
-            <a:r>
-              <a:rPr lang="en-US" sz="1250" dirty="0">
-                <a:solidFill>
-                  <a:srgbClr val="5F7A80"/>
-                </a:solidFill>
-                <a:latin typeface="Calibri" pitchFamily="34" charset="0"/>
-                <a:ea typeface="Calibri" pitchFamily="34" charset="-122"/>
-                <a:cs typeface="Calibri" pitchFamily="34" charset="-120"/>
-              </a:rPr>
-              <a:t>One point of judge score across twelve cases is noise. Treat the harness as a compass, and be suspicious of anyone who reports it to two decimal places.</a:t>
-            </a:r>
-            <a:endParaRPr lang="en-US" sz="1250" dirty="0"/>
-          </a:p>
-        </p:txBody>
-      </p:sp>
-      <p:sp>
-        <p:nvSpPr>
-          <p:cNvPr id="19" name="Text 17"/>
-          <p:cNvSpPr txBox="1"/>
-          <p:nvPr/>
-        </p:nvSpPr>
-        <p:spPr>
-          <a:xfrm>
-            <a:off x="640080" y="5623560"/>
-            <a:ext cx="10881360" cy="365760"/>
-          </a:xfrm>
-          <a:prstGeom prst="rect">
-            <a:avLst/>
-          </a:prstGeom>
-          <a:noFill/>
-          <a:ln/>
-        </p:spPr>
-        <p:txBody>
-          <a:bodyPr wrap="square" lIns="0" tIns="0" rIns="0" bIns="0" rtlCol="0" anchor="ctr"/>
-          <a:lstStyle/>
-          <a:p>
-            <a:pPr algn="l" indent="0" marL="0">
-              <a:buNone/>
-            </a:pPr>
-            <a:r>
-              <a:rPr lang="en-US" sz="1200" i="1" dirty="0">
-                <a:solidFill>
-                  <a:srgbClr val="5F7A80"/>
-                </a:solidFill>
-                <a:latin typeface="Calibri" pitchFamily="34" charset="0"/>
-                <a:ea typeface="Calibri" pitchFamily="34" charset="-122"/>
-                <a:cs typeface="Calibri" pitchFamily="34" charset="-120"/>
-              </a:rPr>
-              <a:t>Say this part out loud. An eval deck that only shows wins is a sales deck.</a:t>
-            </a:r>
-            <a:endParaRPr lang="en-US" sz="1200" dirty="0"/>
+          <p:cNvPr id="37" name="Text 35"/>
+          <p:cNvSpPr txBox="1"/>
+          <p:nvPr/>
+        </p:nvSpPr>
+        <p:spPr>
+          <a:xfrm>
+            <a:off x="960120" y="5632704"/>
+            <a:ext cx="1691640" cy="237744"/>
+          </a:xfrm>
+          <a:prstGeom prst="rect">
+            <a:avLst/>
+          </a:prstGeom>
+          <a:noFill/>
+          <a:ln/>
+        </p:spPr>
+        <p:txBody>
+          <a:bodyPr wrap="square" lIns="0" tIns="0" rIns="0" bIns="0" rtlCol="0" anchor="ctr"/>
+          <a:lstStyle/>
+          <a:p>
+            <a:pPr indent="0" marL="0">
+              <a:buNone/>
+            </a:pPr>
+            <a:r>
+              <a:rPr lang="en-US" sz="1000" dirty="0">
+                <a:solidFill>
+                  <a:srgbClr val="9FB8BD"/>
+                </a:solidFill>
+                <a:latin typeface="Calibri" pitchFamily="34" charset="0"/>
+                <a:ea typeface="Calibri" pitchFamily="34" charset="-122"/>
+                <a:cs typeface="Calibri" pitchFamily="34" charset="-120"/>
+              </a:rPr>
+              <a:t>tool_correct</a:t>
+            </a:r>
+            <a:endParaRPr lang="en-US" sz="1000" dirty="0"/>
+          </a:p>
+        </p:txBody>
+      </p:sp>
+      <p:sp>
+        <p:nvSpPr>
+          <p:cNvPr id="38" name="Text 36"/>
+          <p:cNvSpPr txBox="1"/>
+          <p:nvPr/>
+        </p:nvSpPr>
+        <p:spPr>
+          <a:xfrm>
+            <a:off x="960120" y="5888736"/>
+            <a:ext cx="1691640" cy="310896"/>
+          </a:xfrm>
+          <a:prstGeom prst="rect">
+            <a:avLst/>
+          </a:prstGeom>
+          <a:noFill/>
+          <a:ln/>
+        </p:spPr>
+        <p:txBody>
+          <a:bodyPr wrap="square" lIns="0" tIns="0" rIns="0" bIns="0" rtlCol="0" anchor="ctr"/>
+          <a:lstStyle/>
+          <a:p>
+            <a:pPr indent="0" marL="0">
+              <a:buNone/>
+            </a:pPr>
+            <a:r>
+              <a:rPr lang="en-US" sz="1300" b="1" dirty="0">
+                <a:solidFill>
+                  <a:srgbClr val="00A896"/>
+                </a:solidFill>
+                <a:latin typeface="Courier New" pitchFamily="34" charset="0"/>
+                <a:ea typeface="Courier New" pitchFamily="34" charset="-122"/>
+                <a:cs typeface="Courier New" pitchFamily="34" charset="-120"/>
+              </a:rPr>
+              <a:t>v1 → v2</a:t>
+            </a:r>
+            <a:endParaRPr lang="en-US" sz="1300" dirty="0"/>
+          </a:p>
+        </p:txBody>
+      </p:sp>
+      <p:sp>
+        <p:nvSpPr>
+          <p:cNvPr id="39" name="Text 37"/>
+          <p:cNvSpPr txBox="1"/>
+          <p:nvPr/>
+        </p:nvSpPr>
+        <p:spPr>
+          <a:xfrm>
+            <a:off x="2734056" y="5632704"/>
+            <a:ext cx="1691640" cy="237744"/>
+          </a:xfrm>
+          <a:prstGeom prst="rect">
+            <a:avLst/>
+          </a:prstGeom>
+          <a:noFill/>
+          <a:ln/>
+        </p:spPr>
+        <p:txBody>
+          <a:bodyPr wrap="square" lIns="0" tIns="0" rIns="0" bIns="0" rtlCol="0" anchor="ctr"/>
+          <a:lstStyle/>
+          <a:p>
+            <a:pPr indent="0" marL="0">
+              <a:buNone/>
+            </a:pPr>
+            <a:r>
+              <a:rPr lang="en-US" sz="1000" dirty="0">
+                <a:solidFill>
+                  <a:srgbClr val="9FB8BD"/>
+                </a:solidFill>
+                <a:latin typeface="Calibri" pitchFamily="34" charset="0"/>
+                <a:ea typeface="Calibri" pitchFamily="34" charset="-122"/>
+                <a:cs typeface="Calibri" pitchFamily="34" charset="-120"/>
+              </a:rPr>
+              <a:t>value_match</a:t>
+            </a:r>
+            <a:endParaRPr lang="en-US" sz="1000" dirty="0"/>
+          </a:p>
+        </p:txBody>
+      </p:sp>
+      <p:sp>
+        <p:nvSpPr>
+          <p:cNvPr id="40" name="Text 38"/>
+          <p:cNvSpPr txBox="1"/>
+          <p:nvPr/>
+        </p:nvSpPr>
+        <p:spPr>
+          <a:xfrm>
+            <a:off x="2734056" y="5888736"/>
+            <a:ext cx="1691640" cy="310896"/>
+          </a:xfrm>
+          <a:prstGeom prst="rect">
+            <a:avLst/>
+          </a:prstGeom>
+          <a:noFill/>
+          <a:ln/>
+        </p:spPr>
+        <p:txBody>
+          <a:bodyPr wrap="square" lIns="0" tIns="0" rIns="0" bIns="0" rtlCol="0" anchor="ctr"/>
+          <a:lstStyle/>
+          <a:p>
+            <a:pPr indent="0" marL="0">
+              <a:buNone/>
+            </a:pPr>
+            <a:r>
+              <a:rPr lang="en-US" sz="1300" b="1" dirty="0">
+                <a:solidFill>
+                  <a:srgbClr val="00A896"/>
+                </a:solidFill>
+                <a:latin typeface="Courier New" pitchFamily="34" charset="0"/>
+                <a:ea typeface="Courier New" pitchFamily="34" charset="-122"/>
+                <a:cs typeface="Courier New" pitchFamily="34" charset="-120"/>
+              </a:rPr>
+              <a:t>v1 → v2</a:t>
+            </a:r>
+            <a:endParaRPr lang="en-US" sz="1300" dirty="0"/>
+          </a:p>
+        </p:txBody>
+      </p:sp>
+      <p:sp>
+        <p:nvSpPr>
+          <p:cNvPr id="41" name="Text 39"/>
+          <p:cNvSpPr txBox="1"/>
+          <p:nvPr/>
+        </p:nvSpPr>
+        <p:spPr>
+          <a:xfrm>
+            <a:off x="4507992" y="5632704"/>
+            <a:ext cx="1691640" cy="237744"/>
+          </a:xfrm>
+          <a:prstGeom prst="rect">
+            <a:avLst/>
+          </a:prstGeom>
+          <a:noFill/>
+          <a:ln/>
+        </p:spPr>
+        <p:txBody>
+          <a:bodyPr wrap="square" lIns="0" tIns="0" rIns="0" bIns="0" rtlCol="0" anchor="ctr"/>
+          <a:lstStyle/>
+          <a:p>
+            <a:pPr indent="0" marL="0">
+              <a:buNone/>
+            </a:pPr>
+            <a:r>
+              <a:rPr lang="en-US" sz="1000" dirty="0">
+                <a:solidFill>
+                  <a:srgbClr val="9FB8BD"/>
+                </a:solidFill>
+                <a:latin typeface="Calibri" pitchFamily="34" charset="0"/>
+                <a:ea typeface="Calibri" pitchFamily="34" charset="-122"/>
+                <a:cs typeface="Calibri" pitchFamily="34" charset="-120"/>
+              </a:rPr>
+              <a:t>judge_score</a:t>
+            </a:r>
+            <a:endParaRPr lang="en-US" sz="1000" dirty="0"/>
+          </a:p>
+        </p:txBody>
+      </p:sp>
+      <p:sp>
+        <p:nvSpPr>
+          <p:cNvPr id="42" name="Text 40"/>
+          <p:cNvSpPr txBox="1"/>
+          <p:nvPr/>
+        </p:nvSpPr>
+        <p:spPr>
+          <a:xfrm>
+            <a:off x="4507992" y="5888736"/>
+            <a:ext cx="1691640" cy="310896"/>
+          </a:xfrm>
+          <a:prstGeom prst="rect">
+            <a:avLst/>
+          </a:prstGeom>
+          <a:noFill/>
+          <a:ln/>
+        </p:spPr>
+        <p:txBody>
+          <a:bodyPr wrap="square" lIns="0" tIns="0" rIns="0" bIns="0" rtlCol="0" anchor="ctr"/>
+          <a:lstStyle/>
+          <a:p>
+            <a:pPr indent="0" marL="0">
+              <a:buNone/>
+            </a:pPr>
+            <a:r>
+              <a:rPr lang="en-US" sz="1300" b="1" dirty="0">
+                <a:solidFill>
+                  <a:srgbClr val="00A896"/>
+                </a:solidFill>
+                <a:latin typeface="Courier New" pitchFamily="34" charset="0"/>
+                <a:ea typeface="Courier New" pitchFamily="34" charset="-122"/>
+                <a:cs typeface="Courier New" pitchFamily="34" charset="-120"/>
+              </a:rPr>
+              <a:t>v1 → v2</a:t>
+            </a:r>
+            <a:endParaRPr lang="en-US" sz="1300" dirty="0"/>
+          </a:p>
+        </p:txBody>
+      </p:sp>
+      <p:sp>
+        <p:nvSpPr>
+          <p:cNvPr id="43" name="Text 41"/>
+          <p:cNvSpPr txBox="1"/>
+          <p:nvPr/>
+        </p:nvSpPr>
+        <p:spPr>
+          <a:xfrm>
+            <a:off x="6281928" y="5632704"/>
+            <a:ext cx="1691640" cy="237744"/>
+          </a:xfrm>
+          <a:prstGeom prst="rect">
+            <a:avLst/>
+          </a:prstGeom>
+          <a:noFill/>
+          <a:ln/>
+        </p:spPr>
+        <p:txBody>
+          <a:bodyPr wrap="square" lIns="0" tIns="0" rIns="0" bIns="0" rtlCol="0" anchor="ctr"/>
+          <a:lstStyle/>
+          <a:p>
+            <a:pPr indent="0" marL="0">
+              <a:buNone/>
+            </a:pPr>
+            <a:r>
+              <a:rPr lang="en-US" sz="1000" dirty="0">
+                <a:solidFill>
+                  <a:srgbClr val="9FB8BD"/>
+                </a:solidFill>
+                <a:latin typeface="Calibri" pitchFamily="34" charset="0"/>
+                <a:ea typeface="Calibri" pitchFamily="34" charset="-122"/>
+                <a:cs typeface="Calibri" pitchFamily="34" charset="-120"/>
+              </a:rPr>
+              <a:t>escalated</a:t>
+            </a:r>
+            <a:endParaRPr lang="en-US" sz="1000" dirty="0"/>
+          </a:p>
+        </p:txBody>
+      </p:sp>
+      <p:sp>
+        <p:nvSpPr>
+          <p:cNvPr id="44" name="Text 42"/>
+          <p:cNvSpPr txBox="1"/>
+          <p:nvPr/>
+        </p:nvSpPr>
+        <p:spPr>
+          <a:xfrm>
+            <a:off x="6281928" y="5888736"/>
+            <a:ext cx="1691640" cy="310896"/>
+          </a:xfrm>
+          <a:prstGeom prst="rect">
+            <a:avLst/>
+          </a:prstGeom>
+          <a:noFill/>
+          <a:ln/>
+        </p:spPr>
+        <p:txBody>
+          <a:bodyPr wrap="square" lIns="0" tIns="0" rIns="0" bIns="0" rtlCol="0" anchor="ctr"/>
+          <a:lstStyle/>
+          <a:p>
+            <a:pPr indent="0" marL="0">
+              <a:buNone/>
+            </a:pPr>
+            <a:r>
+              <a:rPr lang="en-US" sz="1300" b="1" dirty="0">
+                <a:solidFill>
+                  <a:srgbClr val="00A896"/>
+                </a:solidFill>
+                <a:latin typeface="Courier New" pitchFamily="34" charset="0"/>
+                <a:ea typeface="Courier New" pitchFamily="34" charset="-122"/>
+                <a:cs typeface="Courier New" pitchFamily="34" charset="-120"/>
+              </a:rPr>
+              <a:t>v1 → v2</a:t>
+            </a:r>
+            <a:endParaRPr lang="en-US" sz="1300" dirty="0"/>
+          </a:p>
+        </p:txBody>
+      </p:sp>
+      <p:sp>
+        <p:nvSpPr>
+          <p:cNvPr id="45" name="Text 43"/>
+          <p:cNvSpPr txBox="1"/>
+          <p:nvPr/>
+        </p:nvSpPr>
+        <p:spPr>
+          <a:xfrm>
+            <a:off x="8055864" y="5632704"/>
+            <a:ext cx="1691640" cy="237744"/>
+          </a:xfrm>
+          <a:prstGeom prst="rect">
+            <a:avLst/>
+          </a:prstGeom>
+          <a:noFill/>
+          <a:ln/>
+        </p:spPr>
+        <p:txBody>
+          <a:bodyPr wrap="square" lIns="0" tIns="0" rIns="0" bIns="0" rtlCol="0" anchor="ctr"/>
+          <a:lstStyle/>
+          <a:p>
+            <a:pPr indent="0" marL="0">
+              <a:buNone/>
+            </a:pPr>
+            <a:r>
+              <a:rPr lang="en-US" sz="1000" dirty="0">
+                <a:solidFill>
+                  <a:srgbClr val="9FB8BD"/>
+                </a:solidFill>
+                <a:latin typeface="Calibri" pitchFamily="34" charset="0"/>
+                <a:ea typeface="Calibri" pitchFamily="34" charset="-122"/>
+                <a:cs typeface="Calibri" pitchFamily="34" charset="-120"/>
+              </a:rPr>
+              <a:t>cost / run</a:t>
+            </a:r>
+            <a:endParaRPr lang="en-US" sz="1000" dirty="0"/>
+          </a:p>
+        </p:txBody>
+      </p:sp>
+      <p:sp>
+        <p:nvSpPr>
+          <p:cNvPr id="46" name="Text 44"/>
+          <p:cNvSpPr txBox="1"/>
+          <p:nvPr/>
+        </p:nvSpPr>
+        <p:spPr>
+          <a:xfrm>
+            <a:off x="8055864" y="5888736"/>
+            <a:ext cx="1691640" cy="310896"/>
+          </a:xfrm>
+          <a:prstGeom prst="rect">
+            <a:avLst/>
+          </a:prstGeom>
+          <a:noFill/>
+          <a:ln/>
+        </p:spPr>
+        <p:txBody>
+          <a:bodyPr wrap="square" lIns="0" tIns="0" rIns="0" bIns="0" rtlCol="0" anchor="ctr"/>
+          <a:lstStyle/>
+          <a:p>
+            <a:pPr indent="0" marL="0">
+              <a:buNone/>
+            </a:pPr>
+            <a:r>
+              <a:rPr lang="en-US" sz="1300" b="1" dirty="0">
+                <a:solidFill>
+                  <a:srgbClr val="00A896"/>
+                </a:solidFill>
+                <a:latin typeface="Courier New" pitchFamily="34" charset="0"/>
+                <a:ea typeface="Courier New" pitchFamily="34" charset="-122"/>
+                <a:cs typeface="Courier New" pitchFamily="34" charset="-120"/>
+              </a:rPr>
+              <a:t>v1 → v2</a:t>
+            </a:r>
+            <a:endParaRPr lang="en-US" sz="1300" dirty="0"/>
+          </a:p>
+        </p:txBody>
+      </p:sp>
+      <p:sp>
+        <p:nvSpPr>
+          <p:cNvPr id="47" name="Text 45"/>
+          <p:cNvSpPr txBox="1"/>
+          <p:nvPr/>
+        </p:nvSpPr>
+        <p:spPr>
+          <a:xfrm>
+            <a:off x="9829800" y="5632704"/>
+            <a:ext cx="1691640" cy="237744"/>
+          </a:xfrm>
+          <a:prstGeom prst="rect">
+            <a:avLst/>
+          </a:prstGeom>
+          <a:noFill/>
+          <a:ln/>
+        </p:spPr>
+        <p:txBody>
+          <a:bodyPr wrap="square" lIns="0" tIns="0" rIns="0" bIns="0" rtlCol="0" anchor="ctr"/>
+          <a:lstStyle/>
+          <a:p>
+            <a:pPr indent="0" marL="0">
+              <a:buNone/>
+            </a:pPr>
+            <a:r>
+              <a:rPr lang="en-US" sz="1000" dirty="0">
+                <a:solidFill>
+                  <a:srgbClr val="9FB8BD"/>
+                </a:solidFill>
+                <a:latin typeface="Calibri" pitchFamily="34" charset="0"/>
+                <a:ea typeface="Calibri" pitchFamily="34" charset="-122"/>
+                <a:cs typeface="Calibri" pitchFamily="34" charset="-120"/>
+              </a:rPr>
+              <a:t>p50 latency</a:t>
+            </a:r>
+            <a:endParaRPr lang="en-US" sz="1000" dirty="0"/>
+          </a:p>
+        </p:txBody>
+      </p:sp>
+      <p:sp>
+        <p:nvSpPr>
+          <p:cNvPr id="48" name="Text 46"/>
+          <p:cNvSpPr txBox="1"/>
+          <p:nvPr/>
+        </p:nvSpPr>
+        <p:spPr>
+          <a:xfrm>
+            <a:off x="9829800" y="5888736"/>
+            <a:ext cx="1691640" cy="310896"/>
+          </a:xfrm>
+          <a:prstGeom prst="rect">
+            <a:avLst/>
+          </a:prstGeom>
+          <a:noFill/>
+          <a:ln/>
+        </p:spPr>
+        <p:txBody>
+          <a:bodyPr wrap="square" lIns="0" tIns="0" rIns="0" bIns="0" rtlCol="0" anchor="ctr"/>
+          <a:lstStyle/>
+          <a:p>
+            <a:pPr indent="0" marL="0">
+              <a:buNone/>
+            </a:pPr>
+            <a:r>
+              <a:rPr lang="en-US" sz="1300" b="1" dirty="0">
+                <a:solidFill>
+                  <a:srgbClr val="00A896"/>
+                </a:solidFill>
+                <a:latin typeface="Courier New" pitchFamily="34" charset="0"/>
+                <a:ea typeface="Courier New" pitchFamily="34" charset="-122"/>
+                <a:cs typeface="Courier New" pitchFamily="34" charset="-120"/>
+              </a:rPr>
+              <a:t>v1 → v2</a:t>
+            </a:r>
+            <a:endParaRPr lang="en-US" sz="1300" dirty="0"/>
           </a:p>
         </p:txBody>
       </p:sp>
@@ -5027,7 +5505,7 @@
                 <a:ea typeface="Calibri" pitchFamily="34" charset="-122"/>
                 <a:cs typeface="Calibri" pitchFamily="34" charset="-120"/>
               </a:rPr>
-              <a:t>CHALLENGES &amp; LEARNINGS</a:t>
+              <a:t>HONESTY</a:t>
             </a:r>
             <a:endParaRPr lang="en-US" sz="1100" dirty="0"/>
           </a:p>
@@ -5066,7 +5544,7 @@
                 <a:ea typeface="Cambria" pitchFamily="34" charset="-122"/>
                 <a:cs typeface="Cambria" pitchFamily="34" charset="-120"/>
               </a:rPr>
-              <a:t>Four things the happy path never showed me</a:t>
+              <a:t>What did not move, and why</a:t>
             </a:r>
             <a:endParaRPr lang="en-US" sz="3200" dirty="0"/>
           </a:p>
@@ -5081,11 +5559,11 @@
         <p:spPr>
           <a:xfrm>
             <a:off x="640080" y="1325880"/>
-            <a:ext cx="5257800" cy="1874520"/>
+            <a:ext cx="10881360" cy="1024128"/>
           </a:xfrm>
           <a:prstGeom prst="roundRect">
             <a:avLst>
-              <a:gd name="adj" fmla="val 4390"/>
+              <a:gd name="adj" fmla="val 8036"/>
             </a:avLst>
           </a:prstGeom>
           <a:solidFill>
@@ -5107,8 +5585,177 @@
         </p:nvSpPr>
         <p:spPr>
           <a:xfrm>
-            <a:off x="960120" y="1581912"/>
-            <a:ext cx="402336" cy="402336"/>
+            <a:off x="960120" y="1609344"/>
+            <a:ext cx="457200" cy="457200"/>
+          </a:xfrm>
+          <a:prstGeom prst="ellipse">
+            <a:avLst/>
+          </a:prstGeom>
+          <a:solidFill>
+            <a:srgbClr val="E08A3C"/>
+          </a:solidFill>
+          <a:ln w="12700">
+            <a:solidFill>
+              <a:srgbClr val="E08A3C"/>
+            </a:solidFill>
+            <a:prstDash val="solid"/>
+          </a:ln>
+        </p:spPr>
+      </p:sp>
+      <p:sp>
+        <p:nvSpPr>
+          <p:cNvPr id="6" name="Text 4"/>
+          <p:cNvSpPr txBox="1"/>
+          <p:nvPr/>
+        </p:nvSpPr>
+        <p:spPr>
+          <a:xfrm>
+            <a:off x="960120" y="1609344"/>
+            <a:ext cx="457200" cy="457200"/>
+          </a:xfrm>
+          <a:prstGeom prst="rect">
+            <a:avLst/>
+          </a:prstGeom>
+          <a:noFill/>
+          <a:ln/>
+        </p:spPr>
+        <p:txBody>
+          <a:bodyPr wrap="square" lIns="0" tIns="0" rIns="0" bIns="0" rtlCol="0" anchor="ctr"/>
+          <a:lstStyle/>
+          <a:p>
+            <a:pPr algn="ctr" indent="0" marL="0">
+              <a:buNone/>
+            </a:pPr>
+            <a:r>
+              <a:rPr lang="en-US" sz="1500" b="1" dirty="0">
+                <a:solidFill>
+                  <a:srgbClr val="FFFFFF"/>
+                </a:solidFill>
+                <a:latin typeface="Cambria" pitchFamily="34" charset="0"/>
+                <a:ea typeface="Cambria" pitchFamily="34" charset="-122"/>
+                <a:cs typeface="Cambria" pitchFamily="34" charset="-120"/>
+              </a:rPr>
+              <a:t>1</a:t>
+            </a:r>
+            <a:endParaRPr lang="en-US" sz="1500" dirty="0"/>
+          </a:p>
+        </p:txBody>
+      </p:sp>
+      <p:sp>
+        <p:nvSpPr>
+          <p:cNvPr id="7" name="Text 5"/>
+          <p:cNvSpPr txBox="1"/>
+          <p:nvPr/>
+        </p:nvSpPr>
+        <p:spPr>
+          <a:xfrm>
+            <a:off x="1600200" y="1453896"/>
+            <a:ext cx="9601200" cy="310896"/>
+          </a:xfrm>
+          <a:prstGeom prst="rect">
+            <a:avLst/>
+          </a:prstGeom>
+          <a:noFill/>
+          <a:ln/>
+        </p:spPr>
+        <p:txBody>
+          <a:bodyPr wrap="square" lIns="0" tIns="0" rIns="0" bIns="0" rtlCol="0" anchor="ctr"/>
+          <a:lstStyle/>
+          <a:p>
+            <a:pPr indent="0" marL="0">
+              <a:buNone/>
+            </a:pPr>
+            <a:r>
+              <a:rPr lang="en-US" sz="1400" b="1" dirty="0">
+                <a:solidFill>
+                  <a:srgbClr val="1B3239"/>
+                </a:solidFill>
+                <a:latin typeface="Calibri" pitchFamily="34" charset="0"/>
+                <a:ea typeface="Calibri" pitchFamily="34" charset="-122"/>
+                <a:cs typeface="Calibri" pitchFamily="34" charset="-120"/>
+              </a:rPr>
+              <a:t>Bucket A barely budges</a:t>
+            </a:r>
+            <a:endParaRPr lang="en-US" sz="1400" dirty="0"/>
+          </a:p>
+        </p:txBody>
+      </p:sp>
+      <p:sp>
+        <p:nvSpPr>
+          <p:cNvPr id="8" name="Text 6"/>
+          <p:cNvSpPr txBox="1"/>
+          <p:nvPr/>
+        </p:nvSpPr>
+        <p:spPr>
+          <a:xfrm>
+            <a:off x="1600200" y="1764792"/>
+            <a:ext cx="9601200" cy="530352"/>
+          </a:xfrm>
+          <a:prstGeom prst="rect">
+            <a:avLst/>
+          </a:prstGeom>
+          <a:noFill/>
+          <a:ln/>
+        </p:spPr>
+        <p:txBody>
+          <a:bodyPr wrap="square" lIns="0" tIns="0" rIns="0" bIns="0" rtlCol="0" anchor="ctr"/>
+          <a:lstStyle/>
+          <a:p>
+            <a:pPr indent="0" marL="0">
+              <a:buNone/>
+            </a:pPr>
+            <a:r>
+              <a:rPr lang="en-US" sz="1250" dirty="0">
+                <a:solidFill>
+                  <a:srgbClr val="5F7A80"/>
+                </a:solidFill>
+                <a:latin typeface="Calibri" pitchFamily="34" charset="0"/>
+                <a:ea typeface="Calibri" pitchFamily="34" charset="-122"/>
+                <a:cs typeface="Calibri" pitchFamily="34" charset="-120"/>
+              </a:rPr>
+              <a:t>It was already passing. Prompt work does not fix retrieval that already works — and if bucket A ever does move, suspect the loader, not the prompt.</a:t>
+            </a:r>
+            <a:endParaRPr lang="en-US" sz="1250" dirty="0"/>
+          </a:p>
+        </p:txBody>
+      </p:sp>
+      <p:sp>
+        <p:nvSpPr>
+          <p:cNvPr id="9" name="Shape 7"/>
+          <p:cNvSpPr/>
+          <p:nvPr/>
+        </p:nvSpPr>
+        <p:spPr>
+          <a:xfrm>
+            <a:off x="640080" y="2496312"/>
+            <a:ext cx="10881360" cy="1024128"/>
+          </a:xfrm>
+          <a:prstGeom prst="roundRect">
+            <a:avLst>
+              <a:gd name="adj" fmla="val 8036"/>
+            </a:avLst>
+          </a:prstGeom>
+          <a:solidFill>
+            <a:srgbClr val="F1F6F6"/>
+          </a:solidFill>
+          <a:ln w="12700">
+            <a:solidFill>
+              <a:srgbClr val="F1F6F6"/>
+            </a:solidFill>
+            <a:prstDash val="solid"/>
+          </a:ln>
+        </p:spPr>
+      </p:sp>
+      <p:sp>
+        <p:nvSpPr>
+          <p:cNvPr id="10" name="Shape 8"/>
+          <p:cNvSpPr/>
+          <p:nvPr/>
+        </p:nvSpPr>
+        <p:spPr>
+          <a:xfrm>
+            <a:off x="960120" y="2779776"/>
+            <a:ext cx="457200" cy="457200"/>
           </a:xfrm>
           <a:prstGeom prst="ellipse">
             <a:avLst/>
@@ -5126,14 +5773,14 @@
       </p:sp>
       <p:sp>
         <p:nvSpPr>
-          <p:cNvPr id="6" name="Text 4"/>
-          <p:cNvSpPr txBox="1"/>
-          <p:nvPr/>
-        </p:nvSpPr>
-        <p:spPr>
-          <a:xfrm>
-            <a:off x="960120" y="1581912"/>
-            <a:ext cx="402336" cy="402336"/>
+          <p:cNvPr id="11" name="Text 9"/>
+          <p:cNvSpPr txBox="1"/>
+          <p:nvPr/>
+        </p:nvSpPr>
+        <p:spPr>
+          <a:xfrm>
+            <a:off x="960120" y="2779776"/>
+            <a:ext cx="457200" cy="457200"/>
           </a:xfrm>
           <a:prstGeom prst="rect">
             <a:avLst/>
@@ -5157,7 +5804,7 @@
                 <a:ea typeface="Cambria" pitchFamily="34" charset="-122"/>
                 <a:cs typeface="Cambria" pitchFamily="34" charset="-120"/>
               </a:rPr>
-              <a:t>1</a:t>
+              <a:t>2</a:t>
             </a:r>
             <a:endParaRPr lang="en-US" sz="1500" dirty="0"/>
           </a:p>
@@ -5165,14 +5812,14 @@
       </p:sp>
       <p:sp>
         <p:nvSpPr>
-          <p:cNvPr id="7" name="Text 5"/>
-          <p:cNvSpPr txBox="1"/>
-          <p:nvPr/>
-        </p:nvSpPr>
-        <p:spPr>
-          <a:xfrm>
-            <a:off x="1508760" y="1600200"/>
-            <a:ext cx="4114800" cy="329184"/>
+          <p:cNvPr id="12" name="Text 10"/>
+          <p:cNvSpPr txBox="1"/>
+          <p:nvPr/>
+        </p:nvSpPr>
+        <p:spPr>
+          <a:xfrm>
+            <a:off x="1600200" y="2624328"/>
+            <a:ext cx="9601200" cy="310896"/>
           </a:xfrm>
           <a:prstGeom prst="rect">
             <a:avLst/>
@@ -5196,7 +5843,7 @@
                 <a:ea typeface="Calibri" pitchFamily="34" charset="-122"/>
                 <a:cs typeface="Calibri" pitchFamily="34" charset="-120"/>
               </a:rPr>
-              <a:t>Calories were kilojoules</a:t>
+              <a:t>Grounding never improved, because it was never broken</a:t>
             </a:r>
             <a:endParaRPr lang="en-US" sz="1400" dirty="0"/>
           </a:p>
@@ -5204,30 +5851,30 @@
       </p:sp>
       <p:sp>
         <p:nvSpPr>
-          <p:cNvPr id="8" name="Text 6"/>
-          <p:cNvSpPr txBox="1"/>
-          <p:nvPr/>
-        </p:nvSpPr>
-        <p:spPr>
-          <a:xfrm>
-            <a:off x="960120" y="2075688"/>
-            <a:ext cx="4663440" cy="868680"/>
-          </a:xfrm>
-          <a:prstGeom prst="rect">
-            <a:avLst/>
-          </a:prstGeom>
-          <a:noFill/>
-          <a:ln/>
-        </p:spPr>
-        <p:txBody>
-          <a:bodyPr wrap="square" lIns="0" tIns="0" rIns="0" bIns="0" rtlCol="0" anchor="ctr"/>
-          <a:lstStyle/>
-          <a:p>
-            <a:pPr indent="0" marL="0">
-              <a:buNone/>
-            </a:pPr>
-            <a:r>
-              <a:rPr lang="en-US" sz="1200" dirty="0">
+          <p:cNvPr id="13" name="Text 11"/>
+          <p:cNvSpPr txBox="1"/>
+          <p:nvPr/>
+        </p:nvSpPr>
+        <p:spPr>
+          <a:xfrm>
+            <a:off x="1600200" y="2935224"/>
+            <a:ext cx="9601200" cy="530352"/>
+          </a:xfrm>
+          <a:prstGeom prst="rect">
+            <a:avLst/>
+          </a:prstGeom>
+          <a:noFill/>
+          <a:ln/>
+        </p:spPr>
+        <p:txBody>
+          <a:bodyPr wrap="square" lIns="0" tIns="0" rIns="0" bIns="0" rtlCol="0" anchor="ctr"/>
+          <a:lstStyle/>
+          <a:p>
+            <a:pPr indent="0" marL="0">
+              <a:buNone/>
+            </a:pPr>
+            <a:r>
+              <a:rPr lang="en-US" sz="1250" dirty="0">
                 <a:solidFill>
                   <a:srgbClr val="5F7A80"/>
                 </a:solidFill>
@@ -5235,26 +5882,26 @@
                 <a:ea typeface="Calibri" pitchFamily="34" charset="-122"/>
                 <a:cs typeface="Calibri" pitchFamily="34" charset="-120"/>
               </a:rPr>
-              <a:t>A 10 km run logged 3,636.9. Divide by 4.184 and it is 869 kcal — absurd before, plausible after. Every downstream number was quietly wrong.</a:t>
-            </a:r>
-            <a:endParaRPr lang="en-US" sz="1200" dirty="0"/>
-          </a:p>
-        </p:txBody>
-      </p:sp>
-      <p:sp>
-        <p:nvSpPr>
-          <p:cNvPr id="9" name="Shape 7"/>
+              <a:t>Had I written this deck from assumptions instead of from traces, “stop making up numbers” would have been the headline fix — and it would have moved nothing.</a:t>
+            </a:r>
+            <a:endParaRPr lang="en-US" sz="1250" dirty="0"/>
+          </a:p>
+        </p:txBody>
+      </p:sp>
+      <p:sp>
+        <p:nvSpPr>
+          <p:cNvPr id="14" name="Shape 12"/>
           <p:cNvSpPr/>
           <p:nvPr/>
         </p:nvSpPr>
         <p:spPr>
           <a:xfrm>
-            <a:off x="6263640" y="1325880"/>
-            <a:ext cx="5257800" cy="1874520"/>
+            <a:off x="640080" y="3666744"/>
+            <a:ext cx="10881360" cy="1024128"/>
           </a:xfrm>
           <a:prstGeom prst="roundRect">
             <a:avLst>
-              <a:gd name="adj" fmla="val 4390"/>
+              <a:gd name="adj" fmla="val 8036"/>
             </a:avLst>
           </a:prstGeom>
           <a:solidFill>
@@ -5270,14 +5917,14 @@
       </p:sp>
       <p:sp>
         <p:nvSpPr>
-          <p:cNvPr id="10" name="Shape 8"/>
+          <p:cNvPr id="15" name="Shape 13"/>
           <p:cNvSpPr/>
           <p:nvPr/>
         </p:nvSpPr>
         <p:spPr>
           <a:xfrm>
-            <a:off x="6583680" y="1581912"/>
-            <a:ext cx="402336" cy="402336"/>
+            <a:off x="960120" y="3950208"/>
+            <a:ext cx="457200" cy="457200"/>
           </a:xfrm>
           <a:prstGeom prst="ellipse">
             <a:avLst/>
@@ -5295,14 +5942,14 @@
       </p:sp>
       <p:sp>
         <p:nvSpPr>
-          <p:cNvPr id="11" name="Text 9"/>
-          <p:cNvSpPr txBox="1"/>
-          <p:nvPr/>
-        </p:nvSpPr>
-        <p:spPr>
-          <a:xfrm>
-            <a:off x="6583680" y="1581912"/>
-            <a:ext cx="402336" cy="402336"/>
+          <p:cNvPr id="16" name="Text 14"/>
+          <p:cNvSpPr txBox="1"/>
+          <p:nvPr/>
+        </p:nvSpPr>
+        <p:spPr>
+          <a:xfrm>
+            <a:off x="960120" y="3950208"/>
+            <a:ext cx="457200" cy="457200"/>
           </a:xfrm>
           <a:prstGeom prst="rect">
             <a:avLst/>
@@ -5326,7 +5973,7 @@
                 <a:ea typeface="Cambria" pitchFamily="34" charset="-122"/>
                 <a:cs typeface="Cambria" pitchFamily="34" charset="-120"/>
               </a:rPr>
-              <a:t>2</a:t>
+              <a:t>3</a:t>
             </a:r>
             <a:endParaRPr lang="en-US" sz="1500" dirty="0"/>
           </a:p>
@@ -5334,14 +5981,14 @@
       </p:sp>
       <p:sp>
         <p:nvSpPr>
-          <p:cNvPr id="12" name="Text 10"/>
-          <p:cNvSpPr txBox="1"/>
-          <p:nvPr/>
-        </p:nvSpPr>
-        <p:spPr>
-          <a:xfrm>
-            <a:off x="7132320" y="1600200"/>
-            <a:ext cx="4114800" cy="329184"/>
+          <p:cNvPr id="17" name="Text 15"/>
+          <p:cNvSpPr txBox="1"/>
+          <p:nvPr/>
+        </p:nvSpPr>
+        <p:spPr>
+          <a:xfrm>
+            <a:off x="1600200" y="3794760"/>
+            <a:ext cx="9601200" cy="310896"/>
           </a:xfrm>
           <a:prstGeom prst="rect">
             <a:avLst/>
@@ -5365,7 +6012,7 @@
                 <a:ea typeface="Calibri" pitchFamily="34" charset="-122"/>
                 <a:cs typeface="Calibri" pitchFamily="34" charset="-120"/>
               </a:rPr>
-              <a:t>A vocabulary gap let a bad night pass</a:t>
+              <a:t>Judged scores rise, then plateau near 4</a:t>
             </a:r>
             <a:endParaRPr lang="en-US" sz="1400" dirty="0"/>
           </a:p>
@@ -5373,30 +6020,30 @@
       </p:sp>
       <p:sp>
         <p:nvSpPr>
-          <p:cNvPr id="13" name="Text 11"/>
-          <p:cNvSpPr txBox="1"/>
-          <p:nvPr/>
-        </p:nvSpPr>
-        <p:spPr>
-          <a:xfrm>
-            <a:off x="6583680" y="2075688"/>
-            <a:ext cx="4663440" cy="868680"/>
-          </a:xfrm>
-          <a:prstGeom prst="rect">
-            <a:avLst/>
-          </a:prstGeom>
-          <a:noFill/>
-          <a:ln/>
-        </p:spPr>
-        <p:txBody>
-          <a:bodyPr wrap="square" lIns="0" tIns="0" rIns="0" bIns="0" rtlCol="0" anchor="ctr"/>
-          <a:lstStyle/>
-          <a:p>
-            <a:pPr indent="0" marL="0">
-              <a:buNone/>
-            </a:pPr>
-            <a:r>
-              <a:rPr lang="en-US" sz="1200" dirty="0">
+          <p:cNvPr id="18" name="Text 16"/>
+          <p:cNvSpPr txBox="1"/>
+          <p:nvPr/>
+        </p:nvSpPr>
+        <p:spPr>
+          <a:xfrm>
+            <a:off x="1600200" y="4105656"/>
+            <a:ext cx="9601200" cy="530352"/>
+          </a:xfrm>
+          <a:prstGeom prst="rect">
+            <a:avLst/>
+          </a:prstGeom>
+          <a:noFill/>
+          <a:ln/>
+        </p:spPr>
+        <p:txBody>
+          <a:bodyPr wrap="square" lIns="0" tIns="0" rIns="0" bIns="0" rtlCol="0" anchor="ctr"/>
+          <a:lstStyle/>
+          <a:p>
+            <a:pPr indent="0" marL="0">
+              <a:buNone/>
+            </a:pPr>
+            <a:r>
+              <a:rPr lang="en-US" sz="1250" dirty="0">
                 <a:solidFill>
                   <a:srgbClr val="5F7A80"/>
                 </a:solidFill>
@@ -5404,34 +6051,34 @@
                 <a:ea typeface="Calibri" pitchFamily="34" charset="-122"/>
                 <a:cs typeface="Calibri" pitchFamily="34" charset="-120"/>
               </a:rPr>
-              <a:t>Sleep validation MANUALLY_CONFIRMED was outside our enum, so a hand-edited night sailed through the trust rule the whole demo depends on.</a:t>
-            </a:r>
-            <a:endParaRPr lang="en-US" sz="1200" dirty="0"/>
-          </a:p>
-        </p:txBody>
-      </p:sp>
-      <p:sp>
-        <p:nvSpPr>
-          <p:cNvPr id="14" name="Shape 12"/>
+              <a:t>What is left are the cases where the honest answer is “the data cannot tell you that.” The rubric rewards it. Models resist it.</a:t>
+            </a:r>
+            <a:endParaRPr lang="en-US" sz="1250" dirty="0"/>
+          </a:p>
+        </p:txBody>
+      </p:sp>
+      <p:sp>
+        <p:nvSpPr>
+          <p:cNvPr id="19" name="Shape 17"/>
           <p:cNvSpPr/>
           <p:nvPr/>
         </p:nvSpPr>
         <p:spPr>
           <a:xfrm>
-            <a:off x="640080" y="3429000"/>
-            <a:ext cx="5257800" cy="1874520"/>
+            <a:off x="640080" y="4837176"/>
+            <a:ext cx="10881360" cy="1024128"/>
           </a:xfrm>
           <a:prstGeom prst="roundRect">
             <a:avLst>
-              <a:gd name="adj" fmla="val 4390"/>
+              <a:gd name="adj" fmla="val 8036"/>
             </a:avLst>
           </a:prstGeom>
           <a:solidFill>
-            <a:srgbClr val="F1F6F6"/>
+            <a:srgbClr val="E3EDEE"/>
           </a:solidFill>
           <a:ln w="12700">
             <a:solidFill>
-              <a:srgbClr val="F1F6F6"/>
+              <a:srgbClr val="E3EDEE"/>
             </a:solidFill>
             <a:prstDash val="solid"/>
           </a:ln>
@@ -5439,14 +6086,14 @@
       </p:sp>
       <p:sp>
         <p:nvSpPr>
-          <p:cNvPr id="15" name="Shape 13"/>
+          <p:cNvPr id="20" name="Shape 18"/>
           <p:cNvSpPr/>
           <p:nvPr/>
         </p:nvSpPr>
         <p:spPr>
           <a:xfrm>
-            <a:off x="960120" y="3685032"/>
-            <a:ext cx="402336" cy="402336"/>
+            <a:off x="960120" y="5120640"/>
+            <a:ext cx="457200" cy="457200"/>
           </a:xfrm>
           <a:prstGeom prst="ellipse">
             <a:avLst/>
@@ -5464,14 +6111,14 @@
       </p:sp>
       <p:sp>
         <p:nvSpPr>
-          <p:cNvPr id="16" name="Text 14"/>
-          <p:cNvSpPr txBox="1"/>
-          <p:nvPr/>
-        </p:nvSpPr>
-        <p:spPr>
-          <a:xfrm>
-            <a:off x="960120" y="3685032"/>
-            <a:ext cx="402336" cy="402336"/>
+          <p:cNvPr id="21" name="Text 19"/>
+          <p:cNvSpPr txBox="1"/>
+          <p:nvPr/>
+        </p:nvSpPr>
+        <p:spPr>
+          <a:xfrm>
+            <a:off x="960120" y="5120640"/>
+            <a:ext cx="457200" cy="457200"/>
           </a:xfrm>
           <a:prstGeom prst="rect">
             <a:avLst/>
@@ -5495,7 +6142,7 @@
                 <a:ea typeface="Cambria" pitchFamily="34" charset="-122"/>
                 <a:cs typeface="Cambria" pitchFamily="34" charset="-120"/>
               </a:rPr>
-              <a:t>3</a:t>
+              <a:t>4</a:t>
             </a:r>
             <a:endParaRPr lang="en-US" sz="1500" dirty="0"/>
           </a:p>
@@ -5503,14 +6150,14 @@
       </p:sp>
       <p:sp>
         <p:nvSpPr>
-          <p:cNvPr id="17" name="Text 15"/>
-          <p:cNvSpPr txBox="1"/>
-          <p:nvPr/>
-        </p:nvSpPr>
-        <p:spPr>
-          <a:xfrm>
-            <a:off x="1508760" y="3703320"/>
-            <a:ext cx="4114800" cy="329184"/>
+          <p:cNvPr id="22" name="Text 20"/>
+          <p:cNvSpPr txBox="1"/>
+          <p:nvPr/>
+        </p:nvSpPr>
+        <p:spPr>
+          <a:xfrm>
+            <a:off x="1600200" y="4965192"/>
+            <a:ext cx="9601200" cy="310896"/>
           </a:xfrm>
           <a:prstGeom prst="rect">
             <a:avLst/>
@@ -5534,7 +6181,7 @@
                 <a:ea typeface="Calibri" pitchFamily="34" charset="-122"/>
                 <a:cs typeface="Calibri" pitchFamily="34" charset="-120"/>
               </a:rPr>
-              <a:t>The real export has no HRV at all</a:t>
+              <a:t>Thirty cases give direction, not significance</a:t>
             </a:r>
             <a:endParaRPr lang="en-US" sz="1400" dirty="0"/>
           </a:p>
@@ -5542,30 +6189,30 @@
       </p:sp>
       <p:sp>
         <p:nvSpPr>
-          <p:cNvPr id="18" name="Text 16"/>
-          <p:cNvSpPr txBox="1"/>
-          <p:nvPr/>
-        </p:nvSpPr>
-        <p:spPr>
-          <a:xfrm>
-            <a:off x="960120" y="4178808"/>
-            <a:ext cx="4663440" cy="868680"/>
-          </a:xfrm>
-          <a:prstGeom prst="rect">
-            <a:avLst/>
-          </a:prstGeom>
-          <a:noFill/>
-          <a:ln/>
-        </p:spPr>
-        <p:txBody>
-          <a:bodyPr wrap="square" lIns="0" tIns="0" rIns="0" bIns="0" rtlCol="0" anchor="ctr"/>
-          <a:lstStyle/>
-          <a:p>
-            <a:pPr indent="0" marL="0">
-              <a:buNone/>
-            </a:pPr>
-            <a:r>
-              <a:rPr lang="en-US" sz="1200" dirty="0">
+          <p:cNvPr id="23" name="Text 21"/>
+          <p:cNvSpPr txBox="1"/>
+          <p:nvPr/>
+        </p:nvSpPr>
+        <p:spPr>
+          <a:xfrm>
+            <a:off x="1600200" y="5276088"/>
+            <a:ext cx="9601200" cy="530352"/>
+          </a:xfrm>
+          <a:prstGeom prst="rect">
+            <a:avLst/>
+          </a:prstGeom>
+          <a:noFill/>
+          <a:ln/>
+        </p:spPr>
+        <p:txBody>
+          <a:bodyPr wrap="square" lIns="0" tIns="0" rIns="0" bIns="0" rtlCol="0" anchor="ctr"/>
+          <a:lstStyle/>
+          <a:p>
+            <a:pPr indent="0" marL="0">
+              <a:buNone/>
+            </a:pPr>
+            <a:r>
+              <a:rPr lang="en-US" sz="1250" dirty="0">
                 <a:solidFill>
                   <a:srgbClr val="5F7A80"/>
                 </a:solidFill>
@@ -5573,168 +6220,38 @@
                 <a:ea typeface="Calibri" pitchFamily="34" charset="-122"/>
                 <a:cs typeface="Calibri" pitchFamily="34" charset="-120"/>
               </a:rPr>
-              <a:t>Scored sleep stops in March — the watch is not worn overnight. So the demo runs on a fixture calibrated to the real profile, and the real database becomes its own eval case.</a:t>
-            </a:r>
-            <a:endParaRPr lang="en-US" sz="1200" dirty="0"/>
-          </a:p>
-        </p:txBody>
-      </p:sp>
-      <p:sp>
-        <p:nvSpPr>
-          <p:cNvPr id="19" name="Shape 17"/>
-          <p:cNvSpPr/>
-          <p:nvPr/>
-        </p:nvSpPr>
-        <p:spPr>
-          <a:xfrm>
-            <a:off x="6263640" y="3429000"/>
-            <a:ext cx="5257800" cy="1874520"/>
-          </a:xfrm>
-          <a:prstGeom prst="roundRect">
-            <a:avLst>
-              <a:gd name="adj" fmla="val 4390"/>
-            </a:avLst>
-          </a:prstGeom>
-          <a:solidFill>
-            <a:srgbClr val="F1F6F6"/>
-          </a:solidFill>
-          <a:ln w="12700">
-            <a:solidFill>
-              <a:srgbClr val="F1F6F6"/>
-            </a:solidFill>
-            <a:prstDash val="solid"/>
-          </a:ln>
-        </p:spPr>
-      </p:sp>
-      <p:sp>
-        <p:nvSpPr>
-          <p:cNvPr id="20" name="Shape 18"/>
-          <p:cNvSpPr/>
-          <p:nvPr/>
-        </p:nvSpPr>
-        <p:spPr>
-          <a:xfrm>
-            <a:off x="6583680" y="3685032"/>
-            <a:ext cx="402336" cy="402336"/>
-          </a:xfrm>
-          <a:prstGeom prst="ellipse">
-            <a:avLst/>
-          </a:prstGeom>
-          <a:solidFill>
-            <a:srgbClr val="0D2B33"/>
-          </a:solidFill>
-          <a:ln w="12700">
-            <a:solidFill>
-              <a:srgbClr val="0D2B33"/>
-            </a:solidFill>
-            <a:prstDash val="solid"/>
-          </a:ln>
-        </p:spPr>
-      </p:sp>
-      <p:sp>
-        <p:nvSpPr>
-          <p:cNvPr id="21" name="Text 19"/>
-          <p:cNvSpPr txBox="1"/>
-          <p:nvPr/>
-        </p:nvSpPr>
-        <p:spPr>
-          <a:xfrm>
-            <a:off x="6583680" y="3685032"/>
-            <a:ext cx="402336" cy="402336"/>
-          </a:xfrm>
-          <a:prstGeom prst="rect">
-            <a:avLst/>
-          </a:prstGeom>
-          <a:noFill/>
-          <a:ln/>
-        </p:spPr>
-        <p:txBody>
-          <a:bodyPr wrap="square" lIns="0" tIns="0" rIns="0" bIns="0" rtlCol="0" anchor="ctr"/>
-          <a:lstStyle/>
-          <a:p>
-            <a:pPr algn="ctr" indent="0" marL="0">
-              <a:buNone/>
-            </a:pPr>
-            <a:r>
-              <a:rPr lang="en-US" sz="1500" b="1" dirty="0">
-                <a:solidFill>
-                  <a:srgbClr val="FFFFFF"/>
-                </a:solidFill>
-                <a:latin typeface="Cambria" pitchFamily="34" charset="0"/>
-                <a:ea typeface="Cambria" pitchFamily="34" charset="-122"/>
-                <a:cs typeface="Cambria" pitchFamily="34" charset="-120"/>
-              </a:rPr>
-              <a:t>4</a:t>
-            </a:r>
-            <a:endParaRPr lang="en-US" sz="1500" dirty="0"/>
-          </a:p>
-        </p:txBody>
-      </p:sp>
-      <p:sp>
-        <p:nvSpPr>
-          <p:cNvPr id="22" name="Text 20"/>
-          <p:cNvSpPr txBox="1"/>
-          <p:nvPr/>
-        </p:nvSpPr>
-        <p:spPr>
-          <a:xfrm>
-            <a:off x="7132320" y="3703320"/>
-            <a:ext cx="4114800" cy="329184"/>
-          </a:xfrm>
-          <a:prstGeom prst="rect">
-            <a:avLst/>
-          </a:prstGeom>
-          <a:noFill/>
-          <a:ln/>
-        </p:spPr>
-        <p:txBody>
-          <a:bodyPr wrap="square" lIns="0" tIns="0" rIns="0" bIns="0" rtlCol="0" anchor="ctr"/>
-          <a:lstStyle/>
-          <a:p>
-            <a:pPr indent="0" marL="0">
-              <a:buNone/>
-            </a:pPr>
-            <a:r>
-              <a:rPr lang="en-US" sz="1400" b="1" dirty="0">
-                <a:solidFill>
-                  <a:srgbClr val="1B3239"/>
-                </a:solidFill>
-                <a:latin typeface="Calibri" pitchFamily="34" charset="0"/>
-                <a:ea typeface="Calibri" pitchFamily="34" charset="-122"/>
-                <a:cs typeface="Calibri" pitchFamily="34" charset="-120"/>
-              </a:rPr>
-              <a:t>n8n emitted zero traces</a:t>
-            </a:r>
-            <a:endParaRPr lang="en-US" sz="1400" dirty="0"/>
-          </a:p>
-        </p:txBody>
-      </p:sp>
-      <p:sp>
-        <p:nvSpPr>
-          <p:cNvPr id="23" name="Text 21"/>
-          <p:cNvSpPr txBox="1"/>
-          <p:nvPr/>
-        </p:nvSpPr>
-        <p:spPr>
-          <a:xfrm>
-            <a:off x="6583680" y="4178808"/>
-            <a:ext cx="4663440" cy="868680"/>
-          </a:xfrm>
-          <a:prstGeom prst="rect">
-            <a:avLst/>
-          </a:prstGeom>
-          <a:noFill/>
-          <a:ln/>
-        </p:spPr>
-        <p:txBody>
-          <a:bodyPr wrap="square" lIns="0" tIns="0" rIns="0" bIns="0" rtlCol="0" anchor="ctr"/>
-          <a:lstStyle/>
-          <a:p>
-            <a:pPr indent="0" marL="0">
-              <a:buNone/>
-            </a:pPr>
-            <a:r>
-              <a:rPr lang="en-US" sz="1200" dirty="0">
+              <a:t>One point of judge score across twelve cases is noise. Treat the harness as a compass, and distrust anyone reporting it to two decimals.</a:t>
+            </a:r>
+            <a:endParaRPr lang="en-US" sz="1250" dirty="0"/>
+          </a:p>
+        </p:txBody>
+      </p:sp>
+      <p:sp>
+        <p:nvSpPr>
+          <p:cNvPr id="24" name="Text 22"/>
+          <p:cNvSpPr txBox="1"/>
+          <p:nvPr/>
+        </p:nvSpPr>
+        <p:spPr>
+          <a:xfrm>
+            <a:off x="640080" y="6080760"/>
+            <a:ext cx="10881360" cy="365760"/>
+          </a:xfrm>
+          <a:prstGeom prst="rect">
+            <a:avLst/>
+          </a:prstGeom>
+          <a:noFill/>
+          <a:ln/>
+        </p:spPr>
+        <p:txBody>
+          <a:bodyPr wrap="square" lIns="0" tIns="0" rIns="0" bIns="0" rtlCol="0" anchor="ctr"/>
+          <a:lstStyle/>
+          <a:p>
+            <a:pPr algn="l" indent="0" marL="0">
+              <a:buNone/>
+            </a:pPr>
+            <a:r>
+              <a:rPr lang="en-US" sz="1200" i="1" dirty="0">
                 <a:solidFill>
                   <a:srgbClr val="5F7A80"/>
                 </a:solidFill>
@@ -5742,46 +6259,7 @@
                 <a:ea typeface="Calibri" pitchFamily="34" charset="-122"/>
                 <a:cs typeface="Calibri" pitchFamily="34" charset="-120"/>
               </a:rPr>
-              <a:t>The AI Agent node has no Langfuse exporter. Setting the env vars changed nothing. Every model call now routes through a LiteLLM proxy, and the proxy writes the trace.</a:t>
-            </a:r>
-            <a:endParaRPr lang="en-US" sz="1200" dirty="0"/>
-          </a:p>
-        </p:txBody>
-      </p:sp>
-      <p:sp>
-        <p:nvSpPr>
-          <p:cNvPr id="24" name="Text 22"/>
-          <p:cNvSpPr txBox="1"/>
-          <p:nvPr/>
-        </p:nvSpPr>
-        <p:spPr>
-          <a:xfrm>
-            <a:off x="640080" y="5623560"/>
-            <a:ext cx="10881360" cy="365760"/>
-          </a:xfrm>
-          <a:prstGeom prst="rect">
-            <a:avLst/>
-          </a:prstGeom>
-          <a:noFill/>
-          <a:ln/>
-        </p:spPr>
-        <p:txBody>
-          <a:bodyPr wrap="square" lIns="0" tIns="0" rIns="0" bIns="0" rtlCol="0" anchor="ctr"/>
-          <a:lstStyle/>
-          <a:p>
-            <a:pPr algn="l" indent="0" marL="0">
-              <a:buNone/>
-            </a:pPr>
-            <a:r>
-              <a:rPr lang="en-US" sz="1200" i="1" dirty="0">
-                <a:solidFill>
-                  <a:srgbClr val="5F7A80"/>
-                </a:solidFill>
-                <a:latin typeface="Calibri" pitchFamily="34" charset="0"/>
-                <a:ea typeface="Calibri" pitchFamily="34" charset="-122"/>
-                <a:cs typeface="Calibri" pitchFamily="34" charset="-120"/>
-              </a:rPr>
-              <a:t>Three of these four were invisible until real data hit the loader. The fourth was invisible until I went looking for a trace that was never written.</a:t>
+              <a:t>Say this part out loud. An eval deck that only shows wins is a sales deck.</a:t>
             </a:r>
             <a:endParaRPr lang="en-US" sz="1200" dirty="0"/>
           </a:p>
@@ -5798,6 +6276,824 @@
 <file path=ppt/slides/slide14.xml><?xml version="1.0" encoding="utf-8"?>
 <p:sld xmlns:a="http://schemas.openxmlformats.org/drawingml/2006/main" xmlns:r="http://schemas.openxmlformats.org/officeDocument/2006/relationships" xmlns:p="http://schemas.openxmlformats.org/presentationml/2006/main">
   <p:cSld name="Slide 14">
+    <p:spTree>
+      <p:nvGrpSpPr>
+        <p:cNvPr id="1" name=""/>
+        <p:cNvGrpSpPr/>
+        <p:nvPr/>
+      </p:nvGrpSpPr>
+      <p:grpSpPr>
+        <a:xfrm>
+          <a:off x="0" y="0"/>
+          <a:ext cx="0" cy="0"/>
+          <a:chOff x="0" y="0"/>
+          <a:chExt cx="0" cy="0"/>
+        </a:xfrm>
+      </p:grpSpPr>
+      <p:sp>
+        <p:nvSpPr>
+          <p:cNvPr id="2" name="Text 0"/>
+          <p:cNvSpPr txBox="1"/>
+          <p:nvPr/>
+        </p:nvSpPr>
+        <p:spPr>
+          <a:xfrm>
+            <a:off x="640080" y="128016"/>
+            <a:ext cx="10881360" cy="256032"/>
+          </a:xfrm>
+          <a:prstGeom prst="rect">
+            <a:avLst/>
+          </a:prstGeom>
+          <a:noFill/>
+          <a:ln/>
+        </p:spPr>
+        <p:txBody>
+          <a:bodyPr wrap="square" lIns="0" tIns="0" rIns="0" bIns="0" rtlCol="0" anchor="ctr"/>
+          <a:lstStyle/>
+          <a:p>
+            <a:pPr algn="l" indent="0" marL="0">
+              <a:buNone/>
+            </a:pPr>
+            <a:r>
+              <a:rPr lang="en-US" sz="1100" b="1" spc="200" kern="0" dirty="0">
+                <a:solidFill>
+                  <a:srgbClr val="00A896"/>
+                </a:solidFill>
+                <a:latin typeface="Calibri" pitchFamily="34" charset="0"/>
+                <a:ea typeface="Calibri" pitchFamily="34" charset="-122"/>
+                <a:cs typeface="Calibri" pitchFamily="34" charset="-120"/>
+              </a:rPr>
+              <a:t>CHALLENGES &amp; LEARNINGS</a:t>
+            </a:r>
+            <a:endParaRPr lang="en-US" sz="1100" dirty="0"/>
+          </a:p>
+        </p:txBody>
+      </p:sp>
+      <p:sp>
+        <p:nvSpPr>
+          <p:cNvPr id="3" name="Text 1"/>
+          <p:cNvSpPr txBox="1"/>
+          <p:nvPr/>
+        </p:nvSpPr>
+        <p:spPr>
+          <a:xfrm>
+            <a:off x="640080" y="402336"/>
+            <a:ext cx="10881360" cy="914400"/>
+          </a:xfrm>
+          <a:prstGeom prst="rect">
+            <a:avLst/>
+          </a:prstGeom>
+          <a:noFill/>
+          <a:ln/>
+        </p:spPr>
+        <p:txBody>
+          <a:bodyPr wrap="square" lIns="0" tIns="0" rIns="0" bIns="0" rtlCol="0" anchor="t"/>
+          <a:lstStyle/>
+          <a:p>
+            <a:pPr algn="l" indent="0" marL="0">
+              <a:buNone/>
+            </a:pPr>
+            <a:r>
+              <a:rPr lang="en-US" sz="3200" b="1" dirty="0">
+                <a:solidFill>
+                  <a:srgbClr val="0D2B33"/>
+                </a:solidFill>
+                <a:latin typeface="Cambria" pitchFamily="34" charset="0"/>
+                <a:ea typeface="Cambria" pitchFamily="34" charset="-122"/>
+                <a:cs typeface="Cambria" pitchFamily="34" charset="-120"/>
+              </a:rPr>
+              <a:t>Four things the happy path never showed me</a:t>
+            </a:r>
+            <a:endParaRPr lang="en-US" sz="3200" dirty="0"/>
+          </a:p>
+        </p:txBody>
+      </p:sp>
+      <p:sp>
+        <p:nvSpPr>
+          <p:cNvPr id="4" name="Shape 2"/>
+          <p:cNvSpPr/>
+          <p:nvPr/>
+        </p:nvSpPr>
+        <p:spPr>
+          <a:xfrm>
+            <a:off x="640080" y="1325880"/>
+            <a:ext cx="5257800" cy="1874520"/>
+          </a:xfrm>
+          <a:prstGeom prst="roundRect">
+            <a:avLst>
+              <a:gd name="adj" fmla="val 4390"/>
+            </a:avLst>
+          </a:prstGeom>
+          <a:solidFill>
+            <a:srgbClr val="F1F6F6"/>
+          </a:solidFill>
+          <a:ln w="12700">
+            <a:solidFill>
+              <a:srgbClr val="F1F6F6"/>
+            </a:solidFill>
+            <a:prstDash val="solid"/>
+          </a:ln>
+        </p:spPr>
+      </p:sp>
+      <p:sp>
+        <p:nvSpPr>
+          <p:cNvPr id="5" name="Shape 3"/>
+          <p:cNvSpPr/>
+          <p:nvPr/>
+        </p:nvSpPr>
+        <p:spPr>
+          <a:xfrm>
+            <a:off x="960120" y="1581912"/>
+            <a:ext cx="402336" cy="402336"/>
+          </a:xfrm>
+          <a:prstGeom prst="ellipse">
+            <a:avLst/>
+          </a:prstGeom>
+          <a:solidFill>
+            <a:srgbClr val="00A896"/>
+          </a:solidFill>
+          <a:ln w="12700">
+            <a:solidFill>
+              <a:srgbClr val="00A896"/>
+            </a:solidFill>
+            <a:prstDash val="solid"/>
+          </a:ln>
+        </p:spPr>
+      </p:sp>
+      <p:sp>
+        <p:nvSpPr>
+          <p:cNvPr id="6" name="Text 4"/>
+          <p:cNvSpPr txBox="1"/>
+          <p:nvPr/>
+        </p:nvSpPr>
+        <p:spPr>
+          <a:xfrm>
+            <a:off x="960120" y="1581912"/>
+            <a:ext cx="402336" cy="402336"/>
+          </a:xfrm>
+          <a:prstGeom prst="rect">
+            <a:avLst/>
+          </a:prstGeom>
+          <a:noFill/>
+          <a:ln/>
+        </p:spPr>
+        <p:txBody>
+          <a:bodyPr wrap="square" lIns="0" tIns="0" rIns="0" bIns="0" rtlCol="0" anchor="ctr"/>
+          <a:lstStyle/>
+          <a:p>
+            <a:pPr algn="ctr" indent="0" marL="0">
+              <a:buNone/>
+            </a:pPr>
+            <a:r>
+              <a:rPr lang="en-US" sz="1500" b="1" dirty="0">
+                <a:solidFill>
+                  <a:srgbClr val="FFFFFF"/>
+                </a:solidFill>
+                <a:latin typeface="Cambria" pitchFamily="34" charset="0"/>
+                <a:ea typeface="Cambria" pitchFamily="34" charset="-122"/>
+                <a:cs typeface="Cambria" pitchFamily="34" charset="-120"/>
+              </a:rPr>
+              <a:t>1</a:t>
+            </a:r>
+            <a:endParaRPr lang="en-US" sz="1500" dirty="0"/>
+          </a:p>
+        </p:txBody>
+      </p:sp>
+      <p:sp>
+        <p:nvSpPr>
+          <p:cNvPr id="7" name="Text 5"/>
+          <p:cNvSpPr txBox="1"/>
+          <p:nvPr/>
+        </p:nvSpPr>
+        <p:spPr>
+          <a:xfrm>
+            <a:off x="1508760" y="1600200"/>
+            <a:ext cx="4114800" cy="329184"/>
+          </a:xfrm>
+          <a:prstGeom prst="rect">
+            <a:avLst/>
+          </a:prstGeom>
+          <a:noFill/>
+          <a:ln/>
+        </p:spPr>
+        <p:txBody>
+          <a:bodyPr wrap="square" lIns="0" tIns="0" rIns="0" bIns="0" rtlCol="0" anchor="ctr"/>
+          <a:lstStyle/>
+          <a:p>
+            <a:pPr indent="0" marL="0">
+              <a:buNone/>
+            </a:pPr>
+            <a:r>
+              <a:rPr lang="en-US" sz="1400" b="1" dirty="0">
+                <a:solidFill>
+                  <a:srgbClr val="1B3239"/>
+                </a:solidFill>
+                <a:latin typeface="Calibri" pitchFamily="34" charset="0"/>
+                <a:ea typeface="Calibri" pitchFamily="34" charset="-122"/>
+                <a:cs typeface="Calibri" pitchFamily="34" charset="-120"/>
+              </a:rPr>
+              <a:t>Calories were kilojoules</a:t>
+            </a:r>
+            <a:endParaRPr lang="en-US" sz="1400" dirty="0"/>
+          </a:p>
+        </p:txBody>
+      </p:sp>
+      <p:sp>
+        <p:nvSpPr>
+          <p:cNvPr id="8" name="Text 6"/>
+          <p:cNvSpPr txBox="1"/>
+          <p:nvPr/>
+        </p:nvSpPr>
+        <p:spPr>
+          <a:xfrm>
+            <a:off x="960120" y="2075688"/>
+            <a:ext cx="4663440" cy="868680"/>
+          </a:xfrm>
+          <a:prstGeom prst="rect">
+            <a:avLst/>
+          </a:prstGeom>
+          <a:noFill/>
+          <a:ln/>
+        </p:spPr>
+        <p:txBody>
+          <a:bodyPr wrap="square" lIns="0" tIns="0" rIns="0" bIns="0" rtlCol="0" anchor="ctr"/>
+          <a:lstStyle/>
+          <a:p>
+            <a:pPr indent="0" marL="0">
+              <a:buNone/>
+            </a:pPr>
+            <a:r>
+              <a:rPr lang="en-US" sz="1200" dirty="0">
+                <a:solidFill>
+                  <a:srgbClr val="5F7A80"/>
+                </a:solidFill>
+                <a:latin typeface="Calibri" pitchFamily="34" charset="0"/>
+                <a:ea typeface="Calibri" pitchFamily="34" charset="-122"/>
+                <a:cs typeface="Calibri" pitchFamily="34" charset="-120"/>
+              </a:rPr>
+              <a:t>A 10 km run logged 3,636.9. Divide by 4.184 and it is 869 kcal — absurd before, plausible after. Every downstream number was quietly wrong.</a:t>
+            </a:r>
+            <a:endParaRPr lang="en-US" sz="1200" dirty="0"/>
+          </a:p>
+        </p:txBody>
+      </p:sp>
+      <p:sp>
+        <p:nvSpPr>
+          <p:cNvPr id="9" name="Shape 7"/>
+          <p:cNvSpPr/>
+          <p:nvPr/>
+        </p:nvSpPr>
+        <p:spPr>
+          <a:xfrm>
+            <a:off x="6263640" y="1325880"/>
+            <a:ext cx="5257800" cy="1874520"/>
+          </a:xfrm>
+          <a:prstGeom prst="roundRect">
+            <a:avLst>
+              <a:gd name="adj" fmla="val 4390"/>
+            </a:avLst>
+          </a:prstGeom>
+          <a:solidFill>
+            <a:srgbClr val="F1F6F6"/>
+          </a:solidFill>
+          <a:ln w="12700">
+            <a:solidFill>
+              <a:srgbClr val="F1F6F6"/>
+            </a:solidFill>
+            <a:prstDash val="solid"/>
+          </a:ln>
+        </p:spPr>
+      </p:sp>
+      <p:sp>
+        <p:nvSpPr>
+          <p:cNvPr id="10" name="Shape 8"/>
+          <p:cNvSpPr/>
+          <p:nvPr/>
+        </p:nvSpPr>
+        <p:spPr>
+          <a:xfrm>
+            <a:off x="6583680" y="1581912"/>
+            <a:ext cx="402336" cy="402336"/>
+          </a:xfrm>
+          <a:prstGeom prst="ellipse">
+            <a:avLst/>
+          </a:prstGeom>
+          <a:solidFill>
+            <a:srgbClr val="E08A3C"/>
+          </a:solidFill>
+          <a:ln w="12700">
+            <a:solidFill>
+              <a:srgbClr val="E08A3C"/>
+            </a:solidFill>
+            <a:prstDash val="solid"/>
+          </a:ln>
+        </p:spPr>
+      </p:sp>
+      <p:sp>
+        <p:nvSpPr>
+          <p:cNvPr id="11" name="Text 9"/>
+          <p:cNvSpPr txBox="1"/>
+          <p:nvPr/>
+        </p:nvSpPr>
+        <p:spPr>
+          <a:xfrm>
+            <a:off x="6583680" y="1581912"/>
+            <a:ext cx="402336" cy="402336"/>
+          </a:xfrm>
+          <a:prstGeom prst="rect">
+            <a:avLst/>
+          </a:prstGeom>
+          <a:noFill/>
+          <a:ln/>
+        </p:spPr>
+        <p:txBody>
+          <a:bodyPr wrap="square" lIns="0" tIns="0" rIns="0" bIns="0" rtlCol="0" anchor="ctr"/>
+          <a:lstStyle/>
+          <a:p>
+            <a:pPr algn="ctr" indent="0" marL="0">
+              <a:buNone/>
+            </a:pPr>
+            <a:r>
+              <a:rPr lang="en-US" sz="1500" b="1" dirty="0">
+                <a:solidFill>
+                  <a:srgbClr val="FFFFFF"/>
+                </a:solidFill>
+                <a:latin typeface="Cambria" pitchFamily="34" charset="0"/>
+                <a:ea typeface="Cambria" pitchFamily="34" charset="-122"/>
+                <a:cs typeface="Cambria" pitchFamily="34" charset="-120"/>
+              </a:rPr>
+              <a:t>2</a:t>
+            </a:r>
+            <a:endParaRPr lang="en-US" sz="1500" dirty="0"/>
+          </a:p>
+        </p:txBody>
+      </p:sp>
+      <p:sp>
+        <p:nvSpPr>
+          <p:cNvPr id="12" name="Text 10"/>
+          <p:cNvSpPr txBox="1"/>
+          <p:nvPr/>
+        </p:nvSpPr>
+        <p:spPr>
+          <a:xfrm>
+            <a:off x="7132320" y="1600200"/>
+            <a:ext cx="4114800" cy="329184"/>
+          </a:xfrm>
+          <a:prstGeom prst="rect">
+            <a:avLst/>
+          </a:prstGeom>
+          <a:noFill/>
+          <a:ln/>
+        </p:spPr>
+        <p:txBody>
+          <a:bodyPr wrap="square" lIns="0" tIns="0" rIns="0" bIns="0" rtlCol="0" anchor="ctr"/>
+          <a:lstStyle/>
+          <a:p>
+            <a:pPr indent="0" marL="0">
+              <a:buNone/>
+            </a:pPr>
+            <a:r>
+              <a:rPr lang="en-US" sz="1400" b="1" dirty="0">
+                <a:solidFill>
+                  <a:srgbClr val="1B3239"/>
+                </a:solidFill>
+                <a:latin typeface="Calibri" pitchFamily="34" charset="0"/>
+                <a:ea typeface="Calibri" pitchFamily="34" charset="-122"/>
+                <a:cs typeface="Calibri" pitchFamily="34" charset="-120"/>
+              </a:rPr>
+              <a:t>A vocabulary gap let a bad night pass</a:t>
+            </a:r>
+            <a:endParaRPr lang="en-US" sz="1400" dirty="0"/>
+          </a:p>
+        </p:txBody>
+      </p:sp>
+      <p:sp>
+        <p:nvSpPr>
+          <p:cNvPr id="13" name="Text 11"/>
+          <p:cNvSpPr txBox="1"/>
+          <p:nvPr/>
+        </p:nvSpPr>
+        <p:spPr>
+          <a:xfrm>
+            <a:off x="6583680" y="2075688"/>
+            <a:ext cx="4663440" cy="868680"/>
+          </a:xfrm>
+          <a:prstGeom prst="rect">
+            <a:avLst/>
+          </a:prstGeom>
+          <a:noFill/>
+          <a:ln/>
+        </p:spPr>
+        <p:txBody>
+          <a:bodyPr wrap="square" lIns="0" tIns="0" rIns="0" bIns="0" rtlCol="0" anchor="ctr"/>
+          <a:lstStyle/>
+          <a:p>
+            <a:pPr indent="0" marL="0">
+              <a:buNone/>
+            </a:pPr>
+            <a:r>
+              <a:rPr lang="en-US" sz="1200" dirty="0">
+                <a:solidFill>
+                  <a:srgbClr val="5F7A80"/>
+                </a:solidFill>
+                <a:latin typeface="Calibri" pitchFamily="34" charset="0"/>
+                <a:ea typeface="Calibri" pitchFamily="34" charset="-122"/>
+                <a:cs typeface="Calibri" pitchFamily="34" charset="-120"/>
+              </a:rPr>
+              <a:t>Sleep validation MANUALLY_CONFIRMED was outside our enum, so a hand-edited night sailed through the trust rule the whole demo depends on.</a:t>
+            </a:r>
+            <a:endParaRPr lang="en-US" sz="1200" dirty="0"/>
+          </a:p>
+        </p:txBody>
+      </p:sp>
+      <p:sp>
+        <p:nvSpPr>
+          <p:cNvPr id="14" name="Shape 12"/>
+          <p:cNvSpPr/>
+          <p:nvPr/>
+        </p:nvSpPr>
+        <p:spPr>
+          <a:xfrm>
+            <a:off x="640080" y="3429000"/>
+            <a:ext cx="5257800" cy="1874520"/>
+          </a:xfrm>
+          <a:prstGeom prst="roundRect">
+            <a:avLst>
+              <a:gd name="adj" fmla="val 4390"/>
+            </a:avLst>
+          </a:prstGeom>
+          <a:solidFill>
+            <a:srgbClr val="F1F6F6"/>
+          </a:solidFill>
+          <a:ln w="12700">
+            <a:solidFill>
+              <a:srgbClr val="F1F6F6"/>
+            </a:solidFill>
+            <a:prstDash val="solid"/>
+          </a:ln>
+        </p:spPr>
+      </p:sp>
+      <p:sp>
+        <p:nvSpPr>
+          <p:cNvPr id="15" name="Shape 13"/>
+          <p:cNvSpPr/>
+          <p:nvPr/>
+        </p:nvSpPr>
+        <p:spPr>
+          <a:xfrm>
+            <a:off x="960120" y="3685032"/>
+            <a:ext cx="402336" cy="402336"/>
+          </a:xfrm>
+          <a:prstGeom prst="ellipse">
+            <a:avLst/>
+          </a:prstGeom>
+          <a:solidFill>
+            <a:srgbClr val="C4455A"/>
+          </a:solidFill>
+          <a:ln w="12700">
+            <a:solidFill>
+              <a:srgbClr val="C4455A"/>
+            </a:solidFill>
+            <a:prstDash val="solid"/>
+          </a:ln>
+        </p:spPr>
+      </p:sp>
+      <p:sp>
+        <p:nvSpPr>
+          <p:cNvPr id="16" name="Text 14"/>
+          <p:cNvSpPr txBox="1"/>
+          <p:nvPr/>
+        </p:nvSpPr>
+        <p:spPr>
+          <a:xfrm>
+            <a:off x="960120" y="3685032"/>
+            <a:ext cx="402336" cy="402336"/>
+          </a:xfrm>
+          <a:prstGeom prst="rect">
+            <a:avLst/>
+          </a:prstGeom>
+          <a:noFill/>
+          <a:ln/>
+        </p:spPr>
+        <p:txBody>
+          <a:bodyPr wrap="square" lIns="0" tIns="0" rIns="0" bIns="0" rtlCol="0" anchor="ctr"/>
+          <a:lstStyle/>
+          <a:p>
+            <a:pPr algn="ctr" indent="0" marL="0">
+              <a:buNone/>
+            </a:pPr>
+            <a:r>
+              <a:rPr lang="en-US" sz="1500" b="1" dirty="0">
+                <a:solidFill>
+                  <a:srgbClr val="FFFFFF"/>
+                </a:solidFill>
+                <a:latin typeface="Cambria" pitchFamily="34" charset="0"/>
+                <a:ea typeface="Cambria" pitchFamily="34" charset="-122"/>
+                <a:cs typeface="Cambria" pitchFamily="34" charset="-120"/>
+              </a:rPr>
+              <a:t>3</a:t>
+            </a:r>
+            <a:endParaRPr lang="en-US" sz="1500" dirty="0"/>
+          </a:p>
+        </p:txBody>
+      </p:sp>
+      <p:sp>
+        <p:nvSpPr>
+          <p:cNvPr id="17" name="Text 15"/>
+          <p:cNvSpPr txBox="1"/>
+          <p:nvPr/>
+        </p:nvSpPr>
+        <p:spPr>
+          <a:xfrm>
+            <a:off x="1508760" y="3703320"/>
+            <a:ext cx="4114800" cy="329184"/>
+          </a:xfrm>
+          <a:prstGeom prst="rect">
+            <a:avLst/>
+          </a:prstGeom>
+          <a:noFill/>
+          <a:ln/>
+        </p:spPr>
+        <p:txBody>
+          <a:bodyPr wrap="square" lIns="0" tIns="0" rIns="0" bIns="0" rtlCol="0" anchor="ctr"/>
+          <a:lstStyle/>
+          <a:p>
+            <a:pPr indent="0" marL="0">
+              <a:buNone/>
+            </a:pPr>
+            <a:r>
+              <a:rPr lang="en-US" sz="1400" b="1" dirty="0">
+                <a:solidFill>
+                  <a:srgbClr val="1B3239"/>
+                </a:solidFill>
+                <a:latin typeface="Calibri" pitchFamily="34" charset="0"/>
+                <a:ea typeface="Calibri" pitchFamily="34" charset="-122"/>
+                <a:cs typeface="Calibri" pitchFamily="34" charset="-120"/>
+              </a:rPr>
+              <a:t>The real export has no HRV at all</a:t>
+            </a:r>
+            <a:endParaRPr lang="en-US" sz="1400" dirty="0"/>
+          </a:p>
+        </p:txBody>
+      </p:sp>
+      <p:sp>
+        <p:nvSpPr>
+          <p:cNvPr id="18" name="Text 16"/>
+          <p:cNvSpPr txBox="1"/>
+          <p:nvPr/>
+        </p:nvSpPr>
+        <p:spPr>
+          <a:xfrm>
+            <a:off x="960120" y="4178808"/>
+            <a:ext cx="4663440" cy="868680"/>
+          </a:xfrm>
+          <a:prstGeom prst="rect">
+            <a:avLst/>
+          </a:prstGeom>
+          <a:noFill/>
+          <a:ln/>
+        </p:spPr>
+        <p:txBody>
+          <a:bodyPr wrap="square" lIns="0" tIns="0" rIns="0" bIns="0" rtlCol="0" anchor="ctr"/>
+          <a:lstStyle/>
+          <a:p>
+            <a:pPr indent="0" marL="0">
+              <a:buNone/>
+            </a:pPr>
+            <a:r>
+              <a:rPr lang="en-US" sz="1200" dirty="0">
+                <a:solidFill>
+                  <a:srgbClr val="5F7A80"/>
+                </a:solidFill>
+                <a:latin typeface="Calibri" pitchFamily="34" charset="0"/>
+                <a:ea typeface="Calibri" pitchFamily="34" charset="-122"/>
+                <a:cs typeface="Calibri" pitchFamily="34" charset="-120"/>
+              </a:rPr>
+              <a:t>Scored sleep stops in March — the watch is not worn overnight. So the demo runs on a fixture calibrated to the real profile, and the real database becomes its own eval case.</a:t>
+            </a:r>
+            <a:endParaRPr lang="en-US" sz="1200" dirty="0"/>
+          </a:p>
+        </p:txBody>
+      </p:sp>
+      <p:sp>
+        <p:nvSpPr>
+          <p:cNvPr id="19" name="Shape 17"/>
+          <p:cNvSpPr/>
+          <p:nvPr/>
+        </p:nvSpPr>
+        <p:spPr>
+          <a:xfrm>
+            <a:off x="6263640" y="3429000"/>
+            <a:ext cx="5257800" cy="1874520"/>
+          </a:xfrm>
+          <a:prstGeom prst="roundRect">
+            <a:avLst>
+              <a:gd name="adj" fmla="val 4390"/>
+            </a:avLst>
+          </a:prstGeom>
+          <a:solidFill>
+            <a:srgbClr val="F1F6F6"/>
+          </a:solidFill>
+          <a:ln w="12700">
+            <a:solidFill>
+              <a:srgbClr val="F1F6F6"/>
+            </a:solidFill>
+            <a:prstDash val="solid"/>
+          </a:ln>
+        </p:spPr>
+      </p:sp>
+      <p:sp>
+        <p:nvSpPr>
+          <p:cNvPr id="20" name="Shape 18"/>
+          <p:cNvSpPr/>
+          <p:nvPr/>
+        </p:nvSpPr>
+        <p:spPr>
+          <a:xfrm>
+            <a:off x="6583680" y="3685032"/>
+            <a:ext cx="402336" cy="402336"/>
+          </a:xfrm>
+          <a:prstGeom prst="ellipse">
+            <a:avLst/>
+          </a:prstGeom>
+          <a:solidFill>
+            <a:srgbClr val="0D2B33"/>
+          </a:solidFill>
+          <a:ln w="12700">
+            <a:solidFill>
+              <a:srgbClr val="0D2B33"/>
+            </a:solidFill>
+            <a:prstDash val="solid"/>
+          </a:ln>
+        </p:spPr>
+      </p:sp>
+      <p:sp>
+        <p:nvSpPr>
+          <p:cNvPr id="21" name="Text 19"/>
+          <p:cNvSpPr txBox="1"/>
+          <p:nvPr/>
+        </p:nvSpPr>
+        <p:spPr>
+          <a:xfrm>
+            <a:off x="6583680" y="3685032"/>
+            <a:ext cx="402336" cy="402336"/>
+          </a:xfrm>
+          <a:prstGeom prst="rect">
+            <a:avLst/>
+          </a:prstGeom>
+          <a:noFill/>
+          <a:ln/>
+        </p:spPr>
+        <p:txBody>
+          <a:bodyPr wrap="square" lIns="0" tIns="0" rIns="0" bIns="0" rtlCol="0" anchor="ctr"/>
+          <a:lstStyle/>
+          <a:p>
+            <a:pPr algn="ctr" indent="0" marL="0">
+              <a:buNone/>
+            </a:pPr>
+            <a:r>
+              <a:rPr lang="en-US" sz="1500" b="1" dirty="0">
+                <a:solidFill>
+                  <a:srgbClr val="FFFFFF"/>
+                </a:solidFill>
+                <a:latin typeface="Cambria" pitchFamily="34" charset="0"/>
+                <a:ea typeface="Cambria" pitchFamily="34" charset="-122"/>
+                <a:cs typeface="Cambria" pitchFamily="34" charset="-120"/>
+              </a:rPr>
+              <a:t>4</a:t>
+            </a:r>
+            <a:endParaRPr lang="en-US" sz="1500" dirty="0"/>
+          </a:p>
+        </p:txBody>
+      </p:sp>
+      <p:sp>
+        <p:nvSpPr>
+          <p:cNvPr id="22" name="Text 20"/>
+          <p:cNvSpPr txBox="1"/>
+          <p:nvPr/>
+        </p:nvSpPr>
+        <p:spPr>
+          <a:xfrm>
+            <a:off x="7132320" y="3703320"/>
+            <a:ext cx="4114800" cy="329184"/>
+          </a:xfrm>
+          <a:prstGeom prst="rect">
+            <a:avLst/>
+          </a:prstGeom>
+          <a:noFill/>
+          <a:ln/>
+        </p:spPr>
+        <p:txBody>
+          <a:bodyPr wrap="square" lIns="0" tIns="0" rIns="0" bIns="0" rtlCol="0" anchor="ctr"/>
+          <a:lstStyle/>
+          <a:p>
+            <a:pPr indent="0" marL="0">
+              <a:buNone/>
+            </a:pPr>
+            <a:r>
+              <a:rPr lang="en-US" sz="1400" b="1" dirty="0">
+                <a:solidFill>
+                  <a:srgbClr val="1B3239"/>
+                </a:solidFill>
+                <a:latin typeface="Calibri" pitchFamily="34" charset="0"/>
+                <a:ea typeface="Calibri" pitchFamily="34" charset="-122"/>
+                <a:cs typeface="Calibri" pitchFamily="34" charset="-120"/>
+              </a:rPr>
+              <a:t>n8n emitted zero traces</a:t>
+            </a:r>
+            <a:endParaRPr lang="en-US" sz="1400" dirty="0"/>
+          </a:p>
+        </p:txBody>
+      </p:sp>
+      <p:sp>
+        <p:nvSpPr>
+          <p:cNvPr id="23" name="Text 21"/>
+          <p:cNvSpPr txBox="1"/>
+          <p:nvPr/>
+        </p:nvSpPr>
+        <p:spPr>
+          <a:xfrm>
+            <a:off x="6583680" y="4178808"/>
+            <a:ext cx="4663440" cy="868680"/>
+          </a:xfrm>
+          <a:prstGeom prst="rect">
+            <a:avLst/>
+          </a:prstGeom>
+          <a:noFill/>
+          <a:ln/>
+        </p:spPr>
+        <p:txBody>
+          <a:bodyPr wrap="square" lIns="0" tIns="0" rIns="0" bIns="0" rtlCol="0" anchor="ctr"/>
+          <a:lstStyle/>
+          <a:p>
+            <a:pPr indent="0" marL="0">
+              <a:buNone/>
+            </a:pPr>
+            <a:r>
+              <a:rPr lang="en-US" sz="1200" dirty="0">
+                <a:solidFill>
+                  <a:srgbClr val="5F7A80"/>
+                </a:solidFill>
+                <a:latin typeface="Calibri" pitchFamily="34" charset="0"/>
+                <a:ea typeface="Calibri" pitchFamily="34" charset="-122"/>
+                <a:cs typeface="Calibri" pitchFamily="34" charset="-120"/>
+              </a:rPr>
+              <a:t>The AI Agent node has no Langfuse exporter. Setting the env vars changed nothing. Every model call now routes through a LiteLLM proxy, and the proxy writes the trace.</a:t>
+            </a:r>
+            <a:endParaRPr lang="en-US" sz="1200" dirty="0"/>
+          </a:p>
+        </p:txBody>
+      </p:sp>
+      <p:sp>
+        <p:nvSpPr>
+          <p:cNvPr id="24" name="Text 22"/>
+          <p:cNvSpPr txBox="1"/>
+          <p:nvPr/>
+        </p:nvSpPr>
+        <p:spPr>
+          <a:xfrm>
+            <a:off x="640080" y="5623560"/>
+            <a:ext cx="10881360" cy="365760"/>
+          </a:xfrm>
+          <a:prstGeom prst="rect">
+            <a:avLst/>
+          </a:prstGeom>
+          <a:noFill/>
+          <a:ln/>
+        </p:spPr>
+        <p:txBody>
+          <a:bodyPr wrap="square" lIns="0" tIns="0" rIns="0" bIns="0" rtlCol="0" anchor="ctr"/>
+          <a:lstStyle/>
+          <a:p>
+            <a:pPr algn="l" indent="0" marL="0">
+              <a:buNone/>
+            </a:pPr>
+            <a:r>
+              <a:rPr lang="en-US" sz="1200" i="1" dirty="0">
+                <a:solidFill>
+                  <a:srgbClr val="5F7A80"/>
+                </a:solidFill>
+                <a:latin typeface="Calibri" pitchFamily="34" charset="0"/>
+                <a:ea typeface="Calibri" pitchFamily="34" charset="-122"/>
+                <a:cs typeface="Calibri" pitchFamily="34" charset="-120"/>
+              </a:rPr>
+              <a:t>Three of these four were invisible until real data hit the loader. The fourth was invisible until I went looking for a trace that was never written.</a:t>
+            </a:r>
+            <a:endParaRPr lang="en-US" sz="1200" dirty="0"/>
+          </a:p>
+        </p:txBody>
+      </p:sp>
+    </p:spTree>
+  </p:cSld>
+  <p:clrMapOvr>
+    <a:masterClrMapping/>
+  </p:clrMapOvr>
+</p:sld>
+</file>
+
+<file path=ppt/slides/slide15.xml><?xml version="1.0" encoding="utf-8"?>
+<p:sld xmlns:a="http://schemas.openxmlformats.org/drawingml/2006/main" xmlns:r="http://schemas.openxmlformats.org/officeDocument/2006/relationships" xmlns:p="http://schemas.openxmlformats.org/presentationml/2006/main">
+  <p:cSld name="Slide 15">
     <p:bg>
       <p:bgPr>
         <a:solidFill>
@@ -12682,13 +13978,6 @@
 <file path=ppt/slides/slide9.xml><?xml version="1.0" encoding="utf-8"?>
 <p:sld xmlns:a="http://schemas.openxmlformats.org/drawingml/2006/main" xmlns:r="http://schemas.openxmlformats.org/officeDocument/2006/relationships" xmlns:p="http://schemas.openxmlformats.org/presentationml/2006/main">
   <p:cSld name="Slide 9">
-    <p:bg>
-      <p:bgPr>
-        <a:solidFill>
-          <a:srgbClr val="0D2B33"/>
-        </a:solidFill>
-      </p:bgPr>
-    </p:bg>
     <p:spTree>
       <p:nvGrpSpPr>
         <p:cNvPr id="1" name=""/>
@@ -12736,7 +14025,7 @@
                 <a:ea typeface="Calibri" pitchFamily="34" charset="-122"/>
                 <a:cs typeface="Calibri" pitchFamily="34" charset="-120"/>
               </a:rPr>
-              <a:t>YOUR TURN</a:t>
+              <a:t>THE TRACE</a:t>
             </a:r>
             <a:endParaRPr lang="en-US" sz="1100" dirty="0"/>
           </a:p>
@@ -12769,13 +14058,13 @@
             <a:r>
               <a:rPr lang="en-US" sz="3200" b="1" dirty="0">
                 <a:solidFill>
-                  <a:srgbClr val="FFFFFF"/>
+                  <a:srgbClr val="0D2B33"/>
                 </a:solidFill>
                 <a:latin typeface="Cambria" pitchFamily="34" charset="0"/>
                 <a:ea typeface="Cambria" pitchFamily="34" charset="-122"/>
                 <a:cs typeface="Cambria" pitchFamily="34" charset="-120"/>
               </a:rPr>
-              <a:t>Which answer should score higher?</a:t>
+              <a:t>The harness says something is wrong</a:t>
             </a:r>
             <a:endParaRPr lang="en-US" sz="3200" dirty="0"/>
           </a:p>
@@ -12783,26 +14072,65 @@
       </p:sp>
       <p:sp>
         <p:nvSpPr>
-          <p:cNvPr id="4" name="Shape 2"/>
+          <p:cNvPr id="4" name="Text 2"/>
+          <p:cNvSpPr txBox="1"/>
+          <p:nvPr/>
+        </p:nvSpPr>
+        <p:spPr>
+          <a:xfrm>
+            <a:off x="640080" y="1170432"/>
+            <a:ext cx="10881360" cy="329184"/>
+          </a:xfrm>
+          <a:prstGeom prst="rect">
+            <a:avLst/>
+          </a:prstGeom>
+          <a:noFill/>
+          <a:ln/>
+        </p:spPr>
+        <p:txBody>
+          <a:bodyPr wrap="square" lIns="0" tIns="0" rIns="0" bIns="0" rtlCol="0" anchor="ctr"/>
+          <a:lstStyle/>
+          <a:p>
+            <a:pPr indent="0" marL="0">
+              <a:buNone/>
+            </a:pPr>
+            <a:r>
+              <a:rPr lang="en-US" sz="1500" i="1" dirty="0">
+                <a:solidFill>
+                  <a:srgbClr val="5F7A80"/>
+                </a:solidFill>
+                <a:latin typeface="Calibri" pitchFamily="34" charset="0"/>
+                <a:ea typeface="Calibri" pitchFamily="34" charset="-122"/>
+                <a:cs typeface="Calibri" pitchFamily="34" charset="-120"/>
+              </a:rPr>
+              <a:t>Only the trace says which layer to fix.</a:t>
+            </a:r>
+            <a:endParaRPr lang="en-US" sz="1500" dirty="0"/>
+          </a:p>
+        </p:txBody>
+      </p:sp>
+      <p:sp>
+        <p:nvSpPr>
+          <p:cNvPr id="5" name="Shape 3"/>
           <p:cNvSpPr/>
           <p:nvPr/>
         </p:nvSpPr>
         <p:spPr>
           <a:xfrm>
-            <a:off x="640080" y="1371600"/>
-            <a:ext cx="5257800" cy="3017520"/>
+            <a:off x="640080" y="1627632"/>
+            <a:ext cx="5257800" cy="3246120"/>
           </a:xfrm>
           <a:prstGeom prst="roundRect">
             <a:avLst>
-              <a:gd name="adj" fmla="val 2727"/>
+              <a:gd name="adj" fmla="val 2535"/>
             </a:avLst>
           </a:prstGeom>
           <a:solidFill>
-            <a:srgbClr val="16414C"/>
+            <a:srgbClr val="F1F6F6"/>
           </a:solidFill>
           <a:ln w="12700">
             <a:solidFill>
-              <a:srgbClr val="16414C"/>
+              <a:srgbClr val="F1F6F6"/>
             </a:solidFill>
             <a:prstDash val="solid"/>
           </a:ln>
@@ -12810,14 +14138,391 @@
       </p:sp>
       <p:sp>
         <p:nvSpPr>
-          <p:cNvPr id="5" name="Shape 3"/>
+          <p:cNvPr id="6" name="Text 4"/>
+          <p:cNvSpPr txBox="1"/>
+          <p:nvPr/>
+        </p:nvSpPr>
+        <p:spPr>
+          <a:xfrm>
+            <a:off x="960120" y="1792224"/>
+            <a:ext cx="4617720" cy="329184"/>
+          </a:xfrm>
+          <a:prstGeom prst="rect">
+            <a:avLst/>
+          </a:prstGeom>
+          <a:noFill/>
+          <a:ln/>
+        </p:spPr>
+        <p:txBody>
+          <a:bodyPr wrap="square" lIns="0" tIns="0" rIns="0" bIns="0" rtlCol="0" anchor="ctr"/>
+          <a:lstStyle/>
+          <a:p>
+            <a:pPr indent="0" marL="0">
+              <a:buNone/>
+            </a:pPr>
+            <a:r>
+              <a:rPr lang="en-US" sz="1300" b="1" dirty="0">
+                <a:solidFill>
+                  <a:srgbClr val="1B3239"/>
+                </a:solidFill>
+                <a:latin typeface="Calibri" pitchFamily="34" charset="0"/>
+                <a:ea typeface="Calibri" pitchFamily="34" charset="-122"/>
+                <a:cs typeface="Calibri" pitchFamily="34" charset="-120"/>
+              </a:rPr>
+              <a:t>“What was my workout split like in the past one year?”</a:t>
+            </a:r>
+            <a:endParaRPr lang="en-US" sz="1300" dirty="0"/>
+          </a:p>
+        </p:txBody>
+      </p:sp>
+      <p:sp>
+        <p:nvSpPr>
+          <p:cNvPr id="7" name="Text 5"/>
+          <p:cNvSpPr txBox="1"/>
+          <p:nvPr/>
+        </p:nvSpPr>
+        <p:spPr>
+          <a:xfrm>
+            <a:off x="960120" y="2212848"/>
+            <a:ext cx="4617720" cy="1417320"/>
+          </a:xfrm>
+          <a:prstGeom prst="rect">
+            <a:avLst/>
+          </a:prstGeom>
+          <a:noFill/>
+          <a:ln/>
+        </p:spPr>
+        <p:txBody>
+          <a:bodyPr wrap="square" lIns="0" tIns="0" rIns="0" bIns="0" rtlCol="0" anchor="t"/>
+          <a:lstStyle/>
+          <a:p>
+            <a:pPr indent="0" marL="0">
+              <a:lnSpc>
+                <a:spcPts val="1800"/>
+              </a:lnSpc>
+              <a:buNone/>
+            </a:pPr>
+            <a:r>
+              <a:rPr lang="en-US" sz="1200" dirty="0">
+                <a:solidFill>
+                  <a:srgbClr val="5F7A80"/>
+                </a:solidFill>
+                <a:latin typeface="Courier New" pitchFamily="34" charset="0"/>
+                <a:ea typeface="Courier New" pitchFamily="34" charset="-122"/>
+                <a:cs typeface="Courier New" pitchFamily="34" charset="-120"/>
+              </a:rPr>
+              <a:t>call 1  </a:t>
+            </a:r>
+            <a:pPr indent="0" marL="0">
+              <a:lnSpc>
+                <a:spcPts val="1800"/>
+              </a:lnSpc>
+              <a:buNone/>
+            </a:pPr>
+            <a:r>
+              <a:rPr lang="en-US" sz="1200" dirty="0">
+                <a:solidFill>
+                  <a:srgbClr val="E08A3C"/>
+                </a:solidFill>
+                <a:latin typeface="Courier New" pitchFamily="34" charset="0"/>
+                <a:ea typeface="Courier New" pitchFamily="34" charset="-122"/>
+                <a:cs typeface="Courier New" pitchFamily="34" charset="-120"/>
+              </a:rPr>
+              <a:t>list_activities → 422
+</a:t>
+            </a:r>
+            <a:pPr indent="0" marL="0">
+              <a:lnSpc>
+                <a:spcPts val="1800"/>
+              </a:lnSpc>
+              <a:buNone/>
+            </a:pPr>
+            <a:r>
+              <a:rPr lang="en-US" sz="1200" dirty="0">
+                <a:solidFill>
+                  <a:srgbClr val="5F7A80"/>
+                </a:solidFill>
+                <a:latin typeface="Courier New" pitchFamily="34" charset="0"/>
+                <a:ea typeface="Courier New" pitchFamily="34" charset="-122"/>
+                <a:cs typeface="Courier New" pitchFamily="34" charset="-120"/>
+              </a:rPr>
+              <a:t>call 2  </a:t>
+            </a:r>
+            <a:pPr indent="0" marL="0">
+              <a:lnSpc>
+                <a:spcPts val="1800"/>
+              </a:lnSpc>
+              <a:buNone/>
+            </a:pPr>
+            <a:r>
+              <a:rPr lang="en-US" sz="1200" dirty="0">
+                <a:solidFill>
+                  <a:srgbClr val="E08A3C"/>
+                </a:solidFill>
+                <a:latin typeface="Courier New" pitchFamily="34" charset="0"/>
+                <a:ea typeface="Courier New" pitchFamily="34" charset="-122"/>
+                <a:cs typeface="Courier New" pitchFamily="34" charset="-120"/>
+              </a:rPr>
+              <a:t>identical request → 422
+</a:t>
+            </a:r>
+            <a:pPr indent="0" marL="0">
+              <a:lnSpc>
+                <a:spcPts val="1800"/>
+              </a:lnSpc>
+              <a:buNone/>
+            </a:pPr>
+            <a:r>
+              <a:rPr lang="en-US" sz="1200" dirty="0">
+                <a:solidFill>
+                  <a:srgbClr val="5F7A80"/>
+                </a:solidFill>
+                <a:latin typeface="Courier New" pitchFamily="34" charset="0"/>
+                <a:ea typeface="Courier New" pitchFamily="34" charset="-122"/>
+                <a:cs typeface="Courier New" pitchFamily="34" charset="-120"/>
+              </a:rPr>
+              <a:t>call 3  </a:t>
+            </a:r>
+            <a:pPr indent="0" marL="0">
+              <a:lnSpc>
+                <a:spcPts val="1800"/>
+              </a:lnSpc>
+              <a:buNone/>
+            </a:pPr>
+            <a:r>
+              <a:rPr lang="en-US" sz="1200" dirty="0">
+                <a:solidFill>
+                  <a:srgbClr val="E08A3C"/>
+                </a:solidFill>
+                <a:latin typeface="Courier New" pitchFamily="34" charset="0"/>
+                <a:ea typeface="Courier New" pitchFamily="34" charset="-122"/>
+                <a:cs typeface="Courier New" pitchFamily="34" charset="-120"/>
+              </a:rPr>
+              <a:t>identical request → 422
+</a:t>
+            </a:r>
+            <a:pPr indent="0" marL="0">
+              <a:lnSpc>
+                <a:spcPts val="1800"/>
+              </a:lnSpc>
+              <a:buNone/>
+            </a:pPr>
+            <a:r>
+              <a:rPr lang="en-US" sz="1200" dirty="0">
+                <a:solidFill>
+                  <a:srgbClr val="5F7A80"/>
+                </a:solidFill>
+                <a:latin typeface="Courier New" pitchFamily="34" charset="0"/>
+                <a:ea typeface="Courier New" pitchFamily="34" charset="-122"/>
+                <a:cs typeface="Courier New" pitchFamily="34" charset="-120"/>
+              </a:rPr>
+              <a:t>call 4  </a:t>
+            </a:r>
+            <a:pPr indent="0" marL="0">
+              <a:lnSpc>
+                <a:spcPts val="1800"/>
+              </a:lnSpc>
+              <a:buNone/>
+            </a:pPr>
+            <a:r>
+              <a:rPr lang="en-US" sz="1200" dirty="0">
+                <a:solidFill>
+                  <a:srgbClr val="1B3239"/>
+                </a:solidFill>
+                <a:latin typeface="Courier New" pitchFamily="34" charset="0"/>
+                <a:ea typeface="Courier New" pitchFamily="34" charset="-122"/>
+                <a:cs typeface="Courier New" pitchFamily="34" charset="-120"/>
+              </a:rPr>
+              <a:t>splits the year into quarters
+</a:t>
+            </a:r>
+            <a:pPr indent="0" marL="0">
+              <a:lnSpc>
+                <a:spcPts val="1800"/>
+              </a:lnSpc>
+              <a:buNone/>
+            </a:pPr>
+            <a:r>
+              <a:rPr lang="en-US" sz="1200" dirty="0">
+                <a:solidFill>
+                  <a:srgbClr val="5F7A80"/>
+                </a:solidFill>
+                <a:latin typeface="Courier New" pitchFamily="34" charset="0"/>
+                <a:ea typeface="Courier New" pitchFamily="34" charset="-122"/>
+                <a:cs typeface="Courier New" pitchFamily="34" charset="-120"/>
+              </a:rPr>
+              <a:t>call 5  </a:t>
+            </a:r>
+            <a:pPr indent="0" marL="0">
+              <a:lnSpc>
+                <a:spcPts val="1800"/>
+              </a:lnSpc>
+              <a:buNone/>
+            </a:pPr>
+            <a:r>
+              <a:rPr lang="en-US" sz="1200" dirty="0">
+                <a:solidFill>
+                  <a:srgbClr val="00A896"/>
+                </a:solidFill>
+                <a:latin typeface="Courier New" pitchFamily="34" charset="0"/>
+                <a:ea typeface="Courier New" pitchFamily="34" charset="-122"/>
+                <a:cs typeface="Courier New" pitchFamily="34" charset="-120"/>
+              </a:rPr>
+              <a:t>answers</a:t>
+            </a:r>
+            <a:endParaRPr lang="en-US" sz="1200" dirty="0"/>
+          </a:p>
+        </p:txBody>
+      </p:sp>
+      <p:sp>
+        <p:nvSpPr>
+          <p:cNvPr id="8" name="Text 6"/>
+          <p:cNvSpPr txBox="1"/>
+          <p:nvPr/>
+        </p:nvSpPr>
+        <p:spPr>
+          <a:xfrm>
+            <a:off x="960120" y="3977640"/>
+            <a:ext cx="4617720" cy="274320"/>
+          </a:xfrm>
+          <a:prstGeom prst="rect">
+            <a:avLst/>
+          </a:prstGeom>
+          <a:noFill/>
+          <a:ln/>
+        </p:spPr>
+        <p:txBody>
+          <a:bodyPr wrap="square" lIns="0" tIns="0" rIns="0" bIns="0" rtlCol="0" anchor="ctr"/>
+          <a:lstStyle/>
+          <a:p>
+            <a:pPr indent="0" marL="0">
+              <a:buNone/>
+            </a:pPr>
+            <a:r>
+              <a:rPr lang="en-US" sz="1150" i="1" dirty="0">
+                <a:solidFill>
+                  <a:srgbClr val="5F7A80"/>
+                </a:solidFill>
+                <a:latin typeface="Calibri" pitchFamily="34" charset="0"/>
+                <a:ea typeface="Calibri" pitchFamily="34" charset="-122"/>
+                <a:cs typeface="Calibri" pitchFamily="34" charset="-120"/>
+              </a:rPr>
+              <a:t>Five model calls to recover from one fixable mistake.</a:t>
+            </a:r>
+            <a:endParaRPr lang="en-US" sz="1150" dirty="0"/>
+          </a:p>
+        </p:txBody>
+      </p:sp>
+      <p:sp>
+        <p:nvSpPr>
+          <p:cNvPr id="9" name="Shape 7"/>
           <p:cNvSpPr/>
           <p:nvPr/>
         </p:nvSpPr>
         <p:spPr>
           <a:xfrm>
-            <a:off x="960120" y="1572768"/>
-            <a:ext cx="402336" cy="402336"/>
+            <a:off x="960120" y="4343400"/>
+            <a:ext cx="4617720" cy="365760"/>
+          </a:xfrm>
+          <a:prstGeom prst="roundRect">
+            <a:avLst>
+              <a:gd name="adj" fmla="val 22500"/>
+            </a:avLst>
+          </a:prstGeom>
+          <a:solidFill>
+            <a:srgbClr val="FFFFFF"/>
+          </a:solidFill>
+          <a:ln w="12700">
+            <a:solidFill>
+              <a:srgbClr val="FFFFFF"/>
+            </a:solidFill>
+            <a:prstDash val="solid"/>
+          </a:ln>
+        </p:spPr>
+      </p:sp>
+      <p:sp>
+        <p:nvSpPr>
+          <p:cNvPr id="10" name="Text 8"/>
+          <p:cNvSpPr txBox="1"/>
+          <p:nvPr/>
+        </p:nvSpPr>
+        <p:spPr>
+          <a:xfrm>
+            <a:off x="1143000" y="4343400"/>
+            <a:ext cx="4251960" cy="365760"/>
+          </a:xfrm>
+          <a:prstGeom prst="rect">
+            <a:avLst/>
+          </a:prstGeom>
+          <a:noFill/>
+          <a:ln/>
+        </p:spPr>
+        <p:txBody>
+          <a:bodyPr wrap="square" lIns="0" tIns="0" rIns="0" bIns="0" rtlCol="0" anchor="ctr"/>
+          <a:lstStyle/>
+          <a:p>
+            <a:pPr indent="0" marL="0">
+              <a:buNone/>
+            </a:pPr>
+            <a:r>
+              <a:rPr lang="en-US" sz="1100" dirty="0">
+                <a:solidFill>
+                  <a:srgbClr val="E08A3C"/>
+                </a:solidFill>
+                <a:latin typeface="Calibri" pitchFamily="34" charset="0"/>
+                <a:ea typeface="Calibri" pitchFamily="34" charset="-122"/>
+                <a:cs typeface="Calibri" pitchFamily="34" charset="-120"/>
+              </a:rPr>
+              <a:t>latency and cost, paid three times over</a:t>
+            </a:r>
+            <a:endParaRPr lang="en-US" sz="1100" dirty="0"/>
+          </a:p>
+        </p:txBody>
+      </p:sp>
+      <p:sp>
+        <p:nvSpPr>
+          <p:cNvPr id="11" name="Shape 9"/>
+          <p:cNvSpPr/>
+          <p:nvPr/>
+        </p:nvSpPr>
+        <p:spPr>
+          <a:xfrm>
+            <a:off x="6263640" y="1627632"/>
+            <a:ext cx="5257800" cy="1051560"/>
+          </a:xfrm>
+          <a:prstGeom prst="roundRect">
+            <a:avLst>
+              <a:gd name="adj" fmla="val 7826"/>
+            </a:avLst>
+          </a:prstGeom>
+          <a:solidFill>
+            <a:srgbClr val="FFFFFF"/>
+          </a:solidFill>
+          <a:ln w="12700">
+            <a:solidFill>
+              <a:srgbClr val="E3EDEE"/>
+            </a:solidFill>
+            <a:prstDash val="solid"/>
+          </a:ln>
+          <a:effectLst>
+            <a:outerShdw sx="100000" sy="100000" kx="0" ky="0" algn="bl" rotWithShape="0" blurRad="127000" dist="25400" dir="5400000">
+              <a:srgbClr val="0D2B33">
+                <a:alpha val="10000"/>
+              </a:srgbClr>
+            </a:outerShdw>
+          </a:effectLst>
+        </p:spPr>
+      </p:sp>
+      <p:sp>
+        <p:nvSpPr>
+          <p:cNvPr id="12" name="Shape 10"/>
+          <p:cNvSpPr/>
+          <p:nvPr/>
+        </p:nvSpPr>
+        <p:spPr>
+          <a:xfrm>
+            <a:off x="6537960" y="1947672"/>
+            <a:ext cx="384048" cy="384048"/>
           </a:xfrm>
           <a:prstGeom prst="ellipse">
             <a:avLst/>
@@ -12835,14 +14540,14 @@
       </p:sp>
       <p:sp>
         <p:nvSpPr>
-          <p:cNvPr id="6" name="Text 4"/>
-          <p:cNvSpPr txBox="1"/>
-          <p:nvPr/>
-        </p:nvSpPr>
-        <p:spPr>
-          <a:xfrm>
-            <a:off x="960120" y="1572768"/>
-            <a:ext cx="402336" cy="402336"/>
+          <p:cNvPr id="13" name="Text 11"/>
+          <p:cNvSpPr txBox="1"/>
+          <p:nvPr/>
+        </p:nvSpPr>
+        <p:spPr>
+          <a:xfrm>
+            <a:off x="6537960" y="1947672"/>
+            <a:ext cx="384048" cy="384048"/>
           </a:xfrm>
           <a:prstGeom prst="rect">
             <a:avLst/>
@@ -12866,7 +14571,7 @@
                 <a:ea typeface="Cambria" pitchFamily="34" charset="-122"/>
                 <a:cs typeface="Cambria" pitchFamily="34" charset="-120"/>
               </a:rPr>
-              <a:t>A</a:t>
+              <a:t>1</a:t>
             </a:r>
             <a:endParaRPr lang="en-US" sz="1500" dirty="0"/>
           </a:p>
@@ -12874,129 +14579,136 @@
       </p:sp>
       <p:sp>
         <p:nvSpPr>
-          <p:cNvPr id="7" name="Text 5"/>
-          <p:cNvSpPr txBox="1"/>
-          <p:nvPr/>
-        </p:nvSpPr>
-        <p:spPr>
-          <a:xfrm>
-            <a:off x="1508760" y="1627632"/>
-            <a:ext cx="4023360" cy="292608"/>
-          </a:xfrm>
-          <a:prstGeom prst="rect">
-            <a:avLst/>
-          </a:prstGeom>
-          <a:noFill/>
-          <a:ln/>
-        </p:spPr>
-        <p:txBody>
-          <a:bodyPr wrap="square" lIns="0" tIns="0" rIns="0" bIns="0" rtlCol="0" anchor="ctr"/>
-          <a:lstStyle/>
-          <a:p>
-            <a:pPr indent="0" marL="0">
-              <a:buNone/>
-            </a:pPr>
-            <a:r>
-              <a:rPr lang="en-US" sz="1200" b="1" dirty="0">
-                <a:solidFill>
-                  <a:srgbClr val="E08A3C"/>
-                </a:solidFill>
-                <a:latin typeface="Calibri" pitchFamily="34" charset="0"/>
-                <a:ea typeface="Calibri" pitchFamily="34" charset="-122"/>
-                <a:cs typeface="Calibri" pitchFamily="34" charset="-120"/>
-              </a:rPr>
-              <a:t>48 words</a:t>
-            </a:r>
-            <a:endParaRPr lang="en-US" sz="1200" dirty="0"/>
-          </a:p>
-        </p:txBody>
-      </p:sp>
-      <p:sp>
-        <p:nvSpPr>
-          <p:cNvPr id="8" name="Text 6"/>
-          <p:cNvSpPr txBox="1"/>
-          <p:nvPr/>
-        </p:nvSpPr>
-        <p:spPr>
-          <a:xfrm>
-            <a:off x="960120" y="2084832"/>
-            <a:ext cx="4617720" cy="2194560"/>
-          </a:xfrm>
-          <a:prstGeom prst="rect">
-            <a:avLst/>
-          </a:prstGeom>
-          <a:noFill/>
-          <a:ln/>
-        </p:spPr>
-        <p:txBody>
-          <a:bodyPr wrap="square" lIns="0" tIns="0" rIns="0" bIns="0" rtlCol="0" anchor="t"/>
-          <a:lstStyle/>
-          <a:p>
-            <a:pPr indent="0" marL="0">
-              <a:buNone/>
-            </a:pPr>
-            <a:r>
-              <a:rPr lang="en-US" sz="1250" dirty="0">
-                <a:solidFill>
-                  <a:srgbClr val="C7D8DB"/>
-                </a:solidFill>
-                <a:latin typeface="Calibri" pitchFamily="34" charset="0"/>
-                <a:ea typeface="Calibri" pitchFamily="34" charset="-122"/>
-                <a:cs typeface="Calibri" pitchFamily="34" charset="-120"/>
-              </a:rPr>
-              <a:t>“Great question! Your recovery is looking solid overall. HRV has been trending nicely around 52 ms, sleep is averaging a healthy 7h10m, and your body battery is recharging well. You're in good shape — listen to your body, stay hydrated, and you should be set for a strong session tomorrow.”</a:t>
-            </a:r>
-            <a:endParaRPr lang="en-US" sz="1250" dirty="0"/>
-          </a:p>
-        </p:txBody>
-      </p:sp>
-      <p:sp>
-        <p:nvSpPr>
-          <p:cNvPr id="9" name="Shape 7"/>
+          <p:cNvPr id="14" name="Text 12"/>
+          <p:cNvSpPr txBox="1"/>
+          <p:nvPr/>
+        </p:nvSpPr>
+        <p:spPr>
+          <a:xfrm>
+            <a:off x="7086600" y="1773936"/>
+            <a:ext cx="4206240" cy="274320"/>
+          </a:xfrm>
+          <a:prstGeom prst="rect">
+            <a:avLst/>
+          </a:prstGeom>
+          <a:noFill/>
+          <a:ln/>
+        </p:spPr>
+        <p:txBody>
+          <a:bodyPr wrap="square" lIns="0" tIns="0" rIns="0" bIns="0" rtlCol="0" anchor="ctr"/>
+          <a:lstStyle/>
+          <a:p>
+            <a:pPr indent="0" marL="0">
+              <a:buNone/>
+            </a:pPr>
+            <a:r>
+              <a:rPr lang="en-US" sz="1300" b="1" dirty="0">
+                <a:solidFill>
+                  <a:srgbClr val="1B3239"/>
+                </a:solidFill>
+                <a:latin typeface="Calibri" pitchFamily="34" charset="0"/>
+                <a:ea typeface="Calibri" pitchFamily="34" charset="-122"/>
+                <a:cs typeface="Calibri" pitchFamily="34" charset="-120"/>
+              </a:rPr>
+              <a:t>The range was 366 days</a:t>
+            </a:r>
+            <a:endParaRPr lang="en-US" sz="1300" dirty="0"/>
+          </a:p>
+        </p:txBody>
+      </p:sp>
+      <p:sp>
+        <p:nvSpPr>
+          <p:cNvPr id="15" name="Text 13"/>
+          <p:cNvSpPr txBox="1"/>
+          <p:nvPr/>
+        </p:nvSpPr>
+        <p:spPr>
+          <a:xfrm>
+            <a:off x="7086600" y="2048256"/>
+            <a:ext cx="4206240" cy="566928"/>
+          </a:xfrm>
+          <a:prstGeom prst="rect">
+            <a:avLst/>
+          </a:prstGeom>
+          <a:noFill/>
+          <a:ln/>
+        </p:spPr>
+        <p:txBody>
+          <a:bodyPr wrap="square" lIns="0" tIns="0" rIns="0" bIns="0" rtlCol="0" anchor="ctr"/>
+          <a:lstStyle/>
+          <a:p>
+            <a:pPr indent="0" marL="0">
+              <a:buNone/>
+            </a:pPr>
+            <a:r>
+              <a:rPr lang="en-US" sz="1100" dirty="0">
+                <a:solidFill>
+                  <a:srgbClr val="5F7A80"/>
+                </a:solidFill>
+                <a:latin typeface="Calibri" pitchFamily="34" charset="0"/>
+                <a:ea typeface="Calibri" pitchFamily="34" charset="-122"/>
+                <a:cs typeface="Calibri" pitchFamily="34" charset="-120"/>
+              </a:rPr>
+              <a:t>A year inclusive of both endpoints, against a 365-day cap. An off-by-one in the tool contract — not a model failure.</a:t>
+            </a:r>
+            <a:endParaRPr lang="en-US" sz="1100" dirty="0"/>
+          </a:p>
+        </p:txBody>
+      </p:sp>
+      <p:sp>
+        <p:nvSpPr>
+          <p:cNvPr id="16" name="Shape 14"/>
           <p:cNvSpPr/>
           <p:nvPr/>
         </p:nvSpPr>
         <p:spPr>
           <a:xfrm>
-            <a:off x="6263640" y="1371600"/>
-            <a:ext cx="5257800" cy="3017520"/>
+            <a:off x="6263640" y="2816352"/>
+            <a:ext cx="5257800" cy="1051560"/>
           </a:xfrm>
           <a:prstGeom prst="roundRect">
             <a:avLst>
-              <a:gd name="adj" fmla="val 2727"/>
+              <a:gd name="adj" fmla="val 7826"/>
             </a:avLst>
           </a:prstGeom>
           <a:solidFill>
-            <a:srgbClr val="16414C"/>
+            <a:srgbClr val="FFFFFF"/>
           </a:solidFill>
           <a:ln w="12700">
             <a:solidFill>
-              <a:srgbClr val="16414C"/>
+              <a:srgbClr val="E3EDEE"/>
             </a:solidFill>
             <a:prstDash val="solid"/>
           </a:ln>
-        </p:spPr>
-      </p:sp>
-      <p:sp>
-        <p:nvSpPr>
-          <p:cNvPr id="10" name="Shape 8"/>
+          <a:effectLst>
+            <a:outerShdw sx="100000" sy="100000" kx="0" ky="0" algn="bl" rotWithShape="0" blurRad="127000" dist="25400" dir="5400000">
+              <a:srgbClr val="0D2B33">
+                <a:alpha val="10000"/>
+              </a:srgbClr>
+            </a:outerShdw>
+          </a:effectLst>
+        </p:spPr>
+      </p:sp>
+      <p:sp>
+        <p:nvSpPr>
+          <p:cNvPr id="17" name="Shape 15"/>
           <p:cNvSpPr/>
           <p:nvPr/>
         </p:nvSpPr>
         <p:spPr>
           <a:xfrm>
-            <a:off x="6583680" y="1572768"/>
-            <a:ext cx="402336" cy="402336"/>
+            <a:off x="6537960" y="3136392"/>
+            <a:ext cx="384048" cy="384048"/>
           </a:xfrm>
           <a:prstGeom prst="ellipse">
             <a:avLst/>
           </a:prstGeom>
           <a:solidFill>
-            <a:srgbClr val="00A896"/>
+            <a:srgbClr val="C4455A"/>
           </a:solidFill>
           <a:ln w="12700">
             <a:solidFill>
-              <a:srgbClr val="00A896"/>
+              <a:srgbClr val="C4455A"/>
             </a:solidFill>
             <a:prstDash val="solid"/>
           </a:ln>
@@ -13004,14 +14716,14 @@
       </p:sp>
       <p:sp>
         <p:nvSpPr>
-          <p:cNvPr id="11" name="Text 9"/>
-          <p:cNvSpPr txBox="1"/>
-          <p:nvPr/>
-        </p:nvSpPr>
-        <p:spPr>
-          <a:xfrm>
-            <a:off x="6583680" y="1572768"/>
-            <a:ext cx="402336" cy="402336"/>
+          <p:cNvPr id="18" name="Text 16"/>
+          <p:cNvSpPr txBox="1"/>
+          <p:nvPr/>
+        </p:nvSpPr>
+        <p:spPr>
+          <a:xfrm>
+            <a:off x="6537960" y="3136392"/>
+            <a:ext cx="384048" cy="384048"/>
           </a:xfrm>
           <a:prstGeom prst="rect">
             <a:avLst/>
@@ -13035,7 +14747,7 @@
                 <a:ea typeface="Cambria" pitchFamily="34" charset="-122"/>
                 <a:cs typeface="Cambria" pitchFamily="34" charset="-120"/>
               </a:rPr>
-              <a:t>B</a:t>
+              <a:t>2</a:t>
             </a:r>
             <a:endParaRPr lang="en-US" sz="1500" dirty="0"/>
           </a:p>
@@ -13043,104 +14755,104 @@
       </p:sp>
       <p:sp>
         <p:nvSpPr>
-          <p:cNvPr id="12" name="Text 10"/>
-          <p:cNvSpPr txBox="1"/>
-          <p:nvPr/>
-        </p:nvSpPr>
-        <p:spPr>
-          <a:xfrm>
-            <a:off x="7132320" y="1627632"/>
-            <a:ext cx="4023360" cy="292608"/>
-          </a:xfrm>
-          <a:prstGeom prst="rect">
-            <a:avLst/>
-          </a:prstGeom>
-          <a:noFill/>
-          <a:ln/>
-        </p:spPr>
-        <p:txBody>
-          <a:bodyPr wrap="square" lIns="0" tIns="0" rIns="0" bIns="0" rtlCol="0" anchor="ctr"/>
-          <a:lstStyle/>
-          <a:p>
-            <a:pPr indent="0" marL="0">
-              <a:buNone/>
-            </a:pPr>
-            <a:r>
-              <a:rPr lang="en-US" sz="1200" b="1" dirty="0">
-                <a:solidFill>
-                  <a:srgbClr val="00A896"/>
-                </a:solidFill>
-                <a:latin typeface="Calibri" pitchFamily="34" charset="0"/>
-                <a:ea typeface="Calibri" pitchFamily="34" charset="-122"/>
-                <a:cs typeface="Calibri" pitchFamily="34" charset="-120"/>
-              </a:rPr>
-              <a:t>52 words</a:t>
-            </a:r>
-            <a:endParaRPr lang="en-US" sz="1200" dirty="0"/>
-          </a:p>
-        </p:txBody>
-      </p:sp>
-      <p:sp>
-        <p:nvSpPr>
-          <p:cNvPr id="13" name="Text 11"/>
-          <p:cNvSpPr txBox="1"/>
-          <p:nvPr/>
-        </p:nvSpPr>
-        <p:spPr>
-          <a:xfrm>
-            <a:off x="6583680" y="2084832"/>
-            <a:ext cx="4617720" cy="2194560"/>
-          </a:xfrm>
-          <a:prstGeom prst="rect">
-            <a:avLst/>
-          </a:prstGeom>
-          <a:noFill/>
-          <a:ln/>
-        </p:spPr>
-        <p:txBody>
-          <a:bodyPr wrap="square" lIns="0" tIns="0" rIns="0" bIns="0" rtlCol="0" anchor="t"/>
-          <a:lstStyle/>
-          <a:p>
-            <a:pPr indent="0" marL="0">
-              <a:buNone/>
-            </a:pPr>
-            <a:r>
-              <a:rPr lang="en-US" sz="1250" dirty="0">
-                <a:solidFill>
-                  <a:srgbClr val="C7D8DB"/>
-                </a:solidFill>
-                <a:latin typeface="Calibri" pitchFamily="34" charset="0"/>
-                <a:ea typeface="Calibri" pitchFamily="34" charset="-122"/>
-                <a:cs typeface="Calibri" pitchFamily="34" charset="-120"/>
-              </a:rPr>
-              <a:t>“Red. Sleep scored 72 on 12 Sep, but the 10 Sep night was hand-edited so I discounted it. HRV 48 sits below your 50–65 band, and resting HR is 3.3 bpm over your 30-day mean. 18 hours of recovery are still outstanding from Thursday's badminton. Move only today.”</a:t>
-            </a:r>
-            <a:endParaRPr lang="en-US" sz="1250" dirty="0"/>
-          </a:p>
-        </p:txBody>
-      </p:sp>
-      <p:sp>
-        <p:nvSpPr>
-          <p:cNvPr id="14" name="Shape 12"/>
+          <p:cNvPr id="19" name="Text 17"/>
+          <p:cNvSpPr txBox="1"/>
+          <p:nvPr/>
+        </p:nvSpPr>
+        <p:spPr>
+          <a:xfrm>
+            <a:off x="7086600" y="2962656"/>
+            <a:ext cx="4206240" cy="274320"/>
+          </a:xfrm>
+          <a:prstGeom prst="rect">
+            <a:avLst/>
+          </a:prstGeom>
+          <a:noFill/>
+          <a:ln/>
+        </p:spPr>
+        <p:txBody>
+          <a:bodyPr wrap="square" lIns="0" tIns="0" rIns="0" bIns="0" rtlCol="0" anchor="ctr"/>
+          <a:lstStyle/>
+          <a:p>
+            <a:pPr indent="0" marL="0">
+              <a:buNone/>
+            </a:pPr>
+            <a:r>
+              <a:rPr lang="en-US" sz="1300" b="1" dirty="0">
+                <a:solidFill>
+                  <a:srgbClr val="1B3239"/>
+                </a:solidFill>
+                <a:latin typeface="Calibri" pitchFamily="34" charset="0"/>
+                <a:ea typeface="Calibri" pitchFamily="34" charset="-122"/>
+                <a:cs typeface="Calibri" pitchFamily="34" charset="-120"/>
+              </a:rPr>
+              <a:t>The model could not see why</a:t>
+            </a:r>
+            <a:endParaRPr lang="en-US" sz="1300" dirty="0"/>
+          </a:p>
+        </p:txBody>
+      </p:sp>
+      <p:sp>
+        <p:nvSpPr>
+          <p:cNvPr id="20" name="Text 18"/>
+          <p:cNvSpPr txBox="1"/>
+          <p:nvPr/>
+        </p:nvSpPr>
+        <p:spPr>
+          <a:xfrm>
+            <a:off x="7086600" y="3236976"/>
+            <a:ext cx="4206240" cy="566928"/>
+          </a:xfrm>
+          <a:prstGeom prst="rect">
+            <a:avLst/>
+          </a:prstGeom>
+          <a:noFill/>
+          <a:ln/>
+        </p:spPr>
+        <p:txBody>
+          <a:bodyPr wrap="square" lIns="0" tIns="0" rIns="0" bIns="0" rtlCol="0" anchor="ctr"/>
+          <a:lstStyle/>
+          <a:p>
+            <a:pPr indent="0" marL="0">
+              <a:buNone/>
+            </a:pPr>
+            <a:r>
+              <a:rPr lang="en-US" sz="1100" dirty="0">
+                <a:solidFill>
+                  <a:srgbClr val="5F7A80"/>
+                </a:solidFill>
+                <a:latin typeface="Calibri" pitchFamily="34" charset="0"/>
+                <a:ea typeface="Calibri" pitchFamily="34" charset="-122"/>
+                <a:cs typeface="Calibri" pitchFamily="34" charset="-120"/>
+              </a:rPr>
+              <a:t>n8n's HTTP Request Tool had replaced the body with “Request failed with status code 422”. The server's explanation was thrown away.</a:t>
+            </a:r>
+            <a:endParaRPr lang="en-US" sz="1100" dirty="0"/>
+          </a:p>
+        </p:txBody>
+      </p:sp>
+      <p:sp>
+        <p:nvSpPr>
+          <p:cNvPr id="21" name="Shape 19"/>
           <p:cNvSpPr/>
           <p:nvPr/>
         </p:nvSpPr>
         <p:spPr>
           <a:xfrm>
-            <a:off x="640080" y="4800600"/>
-            <a:ext cx="10881360" cy="1097280"/>
+            <a:off x="6263640" y="4005072"/>
+            <a:ext cx="5257800" cy="868680"/>
           </a:xfrm>
           <a:prstGeom prst="roundRect">
             <a:avLst>
-              <a:gd name="adj" fmla="val 7500"/>
+              <a:gd name="adj" fmla="val 9474"/>
             </a:avLst>
           </a:prstGeom>
           <a:solidFill>
-            <a:srgbClr val="16414C"/>
+            <a:srgbClr val="F1F6F6"/>
           </a:solidFill>
           <a:ln w="12700">
             <a:solidFill>
-              <a:srgbClr val="16414C"/>
+              <a:srgbClr val="F1F6F6"/>
             </a:solidFill>
             <a:prstDash val="solid"/>
           </a:ln>
@@ -13148,54 +14860,123 @@
       </p:sp>
       <p:sp>
         <p:nvSpPr>
-          <p:cNvPr id="15" name="Text 13"/>
-          <p:cNvSpPr txBox="1"/>
-          <p:nvPr/>
-        </p:nvSpPr>
-        <p:spPr>
-          <a:xfrm>
-            <a:off x="1005840" y="4956048"/>
-            <a:ext cx="10149840" cy="777240"/>
-          </a:xfrm>
-          <a:prstGeom prst="rect">
-            <a:avLst/>
-          </a:prstGeom>
-          <a:noFill/>
-          <a:ln/>
-        </p:spPr>
-        <p:txBody>
-          <a:bodyPr wrap="square" lIns="0" tIns="0" rIns="0" bIns="0" rtlCol="0" anchor="ctr"/>
-          <a:lstStyle/>
-          <a:p>
-            <a:pPr indent="0" marL="0">
-              <a:buNone/>
-            </a:pPr>
-            <a:r>
-              <a:rPr lang="en-US" sz="1800" b="1" dirty="0">
-                <a:solidFill>
-                  <a:srgbClr val="E08A3C"/>
+          <p:cNvPr id="22" name="Text 20"/>
+          <p:cNvSpPr txBox="1"/>
+          <p:nvPr/>
+        </p:nvSpPr>
+        <p:spPr>
+          <a:xfrm>
+            <a:off x="6583680" y="4133088"/>
+            <a:ext cx="4617720" cy="640080"/>
+          </a:xfrm>
+          <a:prstGeom prst="rect">
+            <a:avLst/>
+          </a:prstGeom>
+          <a:noFill/>
+          <a:ln/>
+        </p:spPr>
+        <p:txBody>
+          <a:bodyPr wrap="square" lIns="0" tIns="0" rIns="0" bIns="0" rtlCol="0" anchor="ctr"/>
+          <a:lstStyle/>
+          <a:p>
+            <a:pPr indent="0" marL="0">
+              <a:buNone/>
+            </a:pPr>
+            <a:r>
+              <a:rPr lang="en-US" sz="1200" dirty="0">
+                <a:solidFill>
+                  <a:srgbClr val="1B3239"/>
+                </a:solidFill>
+                <a:latin typeface="Calibri" pitchFamily="34" charset="0"/>
+                <a:ea typeface="Calibri" pitchFamily="34" charset="-122"/>
+                <a:cs typeface="Calibri" pitchFamily="34" charset="-120"/>
+              </a:rPr>
+              <a:t>Two fixes, neither of them prompt engineering:</a:t>
+            </a:r>
+            <a:endParaRPr lang="en-US" sz="1200" dirty="0"/>
+          </a:p>
+          <a:p>
+            <a:pPr indent="0" marL="0">
+              <a:buNone/>
+            </a:pPr>
+            <a:r>
+              <a:rPr lang="en-US" sz="1200" dirty="0">
+                <a:solidFill>
+                  <a:srgbClr val="1B3239"/>
+                </a:solidFill>
+                <a:latin typeface="Calibri" pitchFamily="34" charset="0"/>
+                <a:ea typeface="Calibri" pitchFamily="34" charset="-122"/>
+                <a:cs typeface="Calibri" pitchFamily="34" charset="-120"/>
+              </a:rPr>
+              <a:t>raise the cap to 366, and turn on Never Error.</a:t>
+            </a:r>
+            <a:endParaRPr lang="en-US" sz="1200" dirty="0"/>
+          </a:p>
+        </p:txBody>
+      </p:sp>
+      <p:sp>
+        <p:nvSpPr>
+          <p:cNvPr id="23" name="Shape 21"/>
+          <p:cNvSpPr/>
+          <p:nvPr/>
+        </p:nvSpPr>
+        <p:spPr>
+          <a:xfrm>
+            <a:off x="640080" y="5029200"/>
+            <a:ext cx="10881360" cy="914400"/>
+          </a:xfrm>
+          <a:prstGeom prst="roundRect">
+            <a:avLst>
+              <a:gd name="adj" fmla="val 9000"/>
+            </a:avLst>
+          </a:prstGeom>
+          <a:solidFill>
+            <a:srgbClr val="0D2B33"/>
+          </a:solidFill>
+          <a:ln w="12700">
+            <a:solidFill>
+              <a:srgbClr val="0D2B33"/>
+            </a:solidFill>
+            <a:prstDash val="solid"/>
+          </a:ln>
+        </p:spPr>
+      </p:sp>
+      <p:sp>
+        <p:nvSpPr>
+          <p:cNvPr id="24" name="Text 22"/>
+          <p:cNvSpPr txBox="1"/>
+          <p:nvPr/>
+        </p:nvSpPr>
+        <p:spPr>
+          <a:xfrm>
+            <a:off x="1005840" y="5138928"/>
+            <a:ext cx="10149840" cy="694944"/>
+          </a:xfrm>
+          <a:prstGeom prst="rect">
+            <a:avLst/>
+          </a:prstGeom>
+          <a:noFill/>
+          <a:ln/>
+        </p:spPr>
+        <p:txBody>
+          <a:bodyPr wrap="square" lIns="0" tIns="0" rIns="0" bIns="0" rtlCol="0" anchor="ctr"/>
+          <a:lstStyle/>
+          <a:p>
+            <a:pPr indent="0" marL="0">
+              <a:buNone/>
+            </a:pPr>
+            <a:r>
+              <a:rPr lang="en-US" sz="1700" dirty="0">
+                <a:solidFill>
+                  <a:srgbClr val="FFFFFF"/>
                 </a:solidFill>
                 <a:latin typeface="Cambria" pitchFamily="34" charset="0"/>
                 <a:ea typeface="Cambria" pitchFamily="34" charset="-122"/>
                 <a:cs typeface="Cambria" pitchFamily="34" charset="-120"/>
               </a:rPr>
-              <a:t>The v1 rubric picks A. </a:t>
-            </a:r>
-            <a:pPr indent="0" marL="0">
-              <a:buNone/>
-            </a:pPr>
-            <a:r>
-              <a:rPr lang="en-US" sz="1800" dirty="0">
-                <a:solidFill>
-                  <a:srgbClr val="FFFFFF"/>
-                </a:solidFill>
-                <a:latin typeface="Cambria" pitchFamily="34" charset="0"/>
-                <a:ea typeface="Cambria" pitchFamily="34" charset="-122"/>
-                <a:cs typeface="Cambria" pitchFamily="34" charset="-120"/>
-              </a:rPr>
-              <a:t>Not one of A's numbers appears in the tool results.</a:t>
-            </a:r>
-            <a:endParaRPr lang="en-US" sz="1800" dirty="0"/>
+              <a:t>Most of what looks like model stupidity is an interface that refuses to say what it wants.</a:t>
+            </a:r>
+            <a:endParaRPr lang="en-US" sz="1700" dirty="0"/>
           </a:p>
         </p:txBody>
       </p:sp>
